--- a/public/fun/pack/pptx/review/보장점검양식_19_부모님점검_반딧불마을.pptx
+++ b/public/fun/pack/pptx/review/보장점검양식_19_부모님점검_반딧불마을.pptx
@@ -3286,14 +3286,6 @@
 <file path=ppt/slides/slide1.xml><?xml version="1.0" encoding="utf-8"?>
 <p:sld xmlns:a="http://schemas.openxmlformats.org/drawingml/2006/main" xmlns:p="http://schemas.openxmlformats.org/presentationml/2006/main" xmlns:r="http://schemas.openxmlformats.org/officeDocument/2006/relationships">
   <p:cSld>
-    <p:bg>
-      <p:bgPr>
-        <a:solidFill>
-          <a:srgbClr val="FFFFFF"/>
-        </a:solidFill>
-        <a:effectLst/>
-      </p:bgPr>
-    </p:bg>
     <p:spTree>
       <p:nvGrpSpPr>
         <p:cNvPr id="1" name=""/>
@@ -3301,238 +3293,30 @@
         <p:nvPr/>
       </p:nvGrpSpPr>
       <p:grpSpPr/>
-      <p:sp>
-        <p:nvSpPr>
-          <p:cNvPr id="3" name="장식"/>
-          <p:cNvSpPr/>
+      <p:pic>
+        <p:nvPicPr>
+          <p:cNvPr id="3" name="표지 그림" descr="review-19.jpg"/>
+          <p:cNvPicPr>
+            <a:picLocks noChangeAspect="1"/>
+          </p:cNvPicPr>
           <p:nvPr/>
-        </p:nvSpPr>
-        <p:spPr>
-          <a:xfrm>
-            <a:off x="7071183" y="-1714500"/>
-            <a:ext cx="7886700" cy="7886700"/>
-          </a:xfrm>
-          <a:prstGeom prst="ellipse">
+        </p:nvPicPr>
+        <p:blipFill>
+          <a:blip r:embed="rId2"/>
+          <a:stretch>
+            <a:fillRect/>
+          </a:stretch>
+        </p:blipFill>
+        <p:spPr>
+          <a:xfrm>
+            <a:off x="0" y="0"/>
+            <a:ext cx="12191695" cy="6858000"/>
+          </a:xfrm>
+          <a:prstGeom prst="rect">
             <a:avLst/>
           </a:prstGeom>
-          <a:solidFill>
-            <a:srgbClr val="D0F1E6"/>
-          </a:solidFill>
-          <a:ln>
-            <a:noFill/>
-          </a:ln>
-        </p:spPr>
-        <p:txBody>
-          <a:bodyPr rtlCol="0" anchor="ctr"/>
-          <a:lstStyle/>
-          <a:p>
-            <a:pPr algn="ctr"/>
-          </a:p>
-        </p:txBody>
-      </p:sp>
-      <p:sp>
-        <p:nvSpPr>
-          <p:cNvPr id="4" name="장식"/>
-          <p:cNvSpPr/>
-          <p:nvPr/>
-        </p:nvSpPr>
-        <p:spPr>
-          <a:xfrm>
-            <a:off x="9509522" y="3977639"/>
-            <a:ext cx="3429000" cy="3429000"/>
-          </a:xfrm>
-          <a:prstGeom prst="ellipse">
-            <a:avLst/>
-          </a:prstGeom>
-          <a:solidFill>
-            <a:srgbClr val="246B53"/>
-          </a:solidFill>
-          <a:ln>
-            <a:noFill/>
-          </a:ln>
-        </p:spPr>
-        <p:txBody>
-          <a:bodyPr rtlCol="0" anchor="ctr"/>
-          <a:lstStyle/>
-          <a:p>
-            <a:pPr algn="ctr"/>
-          </a:p>
-        </p:txBody>
-      </p:sp>
-      <p:sp>
-        <p:nvSpPr>
-          <p:cNvPr id="5" name="장식"/>
-          <p:cNvSpPr/>
-          <p:nvPr/>
-        </p:nvSpPr>
-        <p:spPr>
-          <a:xfrm rot="47073">
-            <a:off x="10370041" y="1303642"/>
-            <a:ext cx="972669" cy="972669"/>
-          </a:xfrm>
-          <a:prstGeom prst="star5">
-            <a:avLst/>
-          </a:prstGeom>
-          <a:solidFill>
-            <a:srgbClr val="246B53"/>
-          </a:solidFill>
-          <a:ln>
-            <a:noFill/>
-          </a:ln>
-        </p:spPr>
-        <p:txBody>
-          <a:bodyPr rtlCol="0" anchor="ctr"/>
-          <a:lstStyle/>
-          <a:p>
-            <a:pPr algn="ctr"/>
-          </a:p>
-        </p:txBody>
-      </p:sp>
-      <p:sp>
-        <p:nvSpPr>
-          <p:cNvPr id="6" name="장식"/>
-          <p:cNvSpPr/>
-          <p:nvPr/>
-        </p:nvSpPr>
-        <p:spPr>
-          <a:xfrm rot="616000">
-            <a:off x="10966056" y="404965"/>
-            <a:ext cx="415579" cy="415579"/>
-          </a:xfrm>
-          <a:prstGeom prst="star5">
-            <a:avLst/>
-          </a:prstGeom>
-          <a:solidFill>
-            <a:srgbClr val="D0F1E6"/>
-          </a:solidFill>
-          <a:ln>
-            <a:noFill/>
-          </a:ln>
-        </p:spPr>
-        <p:txBody>
-          <a:bodyPr rtlCol="0" anchor="ctr"/>
-          <a:lstStyle/>
-          <a:p>
-            <a:pPr algn="ctr"/>
-          </a:p>
-        </p:txBody>
-      </p:sp>
-      <p:sp>
-        <p:nvSpPr>
-          <p:cNvPr id="7" name="장식"/>
-          <p:cNvSpPr/>
-          <p:nvPr/>
-        </p:nvSpPr>
-        <p:spPr>
-          <a:xfrm rot="291727">
-            <a:off x="8517029" y="1857812"/>
-            <a:ext cx="743304" cy="743304"/>
-          </a:xfrm>
-          <a:prstGeom prst="star5">
-            <a:avLst/>
-          </a:prstGeom>
-          <a:solidFill>
-            <a:srgbClr val="913B83"/>
-          </a:solidFill>
-          <a:ln>
-            <a:noFill/>
-          </a:ln>
-        </p:spPr>
-        <p:txBody>
-          <a:bodyPr rtlCol="0" anchor="ctr"/>
-          <a:lstStyle/>
-          <a:p>
-            <a:pPr algn="ctr"/>
-          </a:p>
-        </p:txBody>
-      </p:sp>
-      <p:sp>
-        <p:nvSpPr>
-          <p:cNvPr id="8" name="장식"/>
-          <p:cNvSpPr/>
-          <p:nvPr/>
-        </p:nvSpPr>
-        <p:spPr>
-          <a:xfrm rot="486238">
-            <a:off x="10732199" y="2536825"/>
-            <a:ext cx="862336" cy="862336"/>
-          </a:xfrm>
-          <a:prstGeom prst="star5">
-            <a:avLst/>
-          </a:prstGeom>
-          <a:solidFill>
-            <a:srgbClr val="246B53"/>
-          </a:solidFill>
-          <a:ln>
-            <a:noFill/>
-          </a:ln>
-        </p:spPr>
-        <p:txBody>
-          <a:bodyPr rtlCol="0" anchor="ctr"/>
-          <a:lstStyle/>
-          <a:p>
-            <a:pPr algn="ctr"/>
-          </a:p>
-        </p:txBody>
-      </p:sp>
-      <p:sp>
-        <p:nvSpPr>
-          <p:cNvPr id="9" name="장식"/>
-          <p:cNvSpPr/>
-          <p:nvPr/>
-        </p:nvSpPr>
-        <p:spPr>
-          <a:xfrm rot="21114457">
-            <a:off x="10694079" y="2423818"/>
-            <a:ext cx="852890" cy="852890"/>
-          </a:xfrm>
-          <a:prstGeom prst="star5">
-            <a:avLst/>
-          </a:prstGeom>
-          <a:solidFill>
-            <a:srgbClr val="D0F1E6"/>
-          </a:solidFill>
-          <a:ln>
-            <a:noFill/>
-          </a:ln>
-        </p:spPr>
-        <p:txBody>
-          <a:bodyPr rtlCol="0" anchor="ctr"/>
-          <a:lstStyle/>
-          <a:p>
-            <a:pPr algn="ctr"/>
-          </a:p>
-        </p:txBody>
-      </p:sp>
-      <p:sp>
-        <p:nvSpPr>
-          <p:cNvPr id="10" name="장식"/>
-          <p:cNvSpPr/>
-          <p:nvPr/>
-        </p:nvSpPr>
-        <p:spPr>
-          <a:xfrm rot="21340827">
-            <a:off x="10442192" y="1296230"/>
-            <a:ext cx="435134" cy="435134"/>
-          </a:xfrm>
-          <a:prstGeom prst="star5">
-            <a:avLst/>
-          </a:prstGeom>
-          <a:solidFill>
-            <a:srgbClr val="913B83"/>
-          </a:solidFill>
-          <a:ln>
-            <a:noFill/>
-          </a:ln>
-        </p:spPr>
-        <p:txBody>
-          <a:bodyPr rtlCol="0" anchor="ctr"/>
-          <a:lstStyle/>
-          <a:p>
-            <a:pPr algn="ctr"/>
-          </a:p>
-        </p:txBody>
-      </p:sp>
+        </p:spPr>
+      </p:pic>
       <p:sp>
         <p:nvSpPr>
           <p:cNvPr id="2" name="Title 1"/>
@@ -3546,7 +3330,7 @@
         <p:spPr>
           <a:xfrm>
             <a:off x="853418" y="2057400"/>
-            <a:ext cx="6705432" cy="1463040"/>
+            <a:ext cx="6095847" cy="1554480"/>
           </a:xfrm>
         </p:spPr>
         <p:txBody>
@@ -3573,13 +3357,13 @@
       </p:sp>
       <p:sp>
         <p:nvSpPr>
-          <p:cNvPr id="11" name="한 줄 문구"/>
+          <p:cNvPr id="4" name="한 줄 문구"/>
           <p:cNvSpPr txBox="1"/>
           <p:nvPr/>
         </p:nvSpPr>
         <p:spPr>
           <a:xfrm>
-            <a:off x="853418" y="3611880"/>
+            <a:off x="853418" y="3749039"/>
             <a:ext cx="6095847" cy="822960"/>
           </a:xfrm>
           <a:prstGeom prst="rect">
@@ -3604,20 +3388,20 @@
                   <a:srgbClr val="143D30"/>
                 </a:solidFill>
               </a:rPr>
-              <a:t>작은 불빛 같은 메모가 큰 안심이 돼요</a:t>
+              <a:t>연세와 건강 상태를 메모해 둡니다</a:t>
             </a:r>
           </a:p>
         </p:txBody>
       </p:sp>
       <p:sp>
         <p:nvSpPr>
-          <p:cNvPr id="12" name="안내 문구"/>
+          <p:cNvPr id="5" name="안내 문구"/>
           <p:cNvSpPr txBox="1"/>
           <p:nvPr/>
         </p:nvSpPr>
         <p:spPr>
           <a:xfrm>
-            <a:off x="853418" y="4480560"/>
+            <a:off x="853418" y="4617720"/>
             <a:ext cx="6095847" cy="914400"/>
           </a:xfrm>
           <a:prstGeom prst="rect">
@@ -3642,7 +3426,7 @@
                   <a:srgbClr val="666666"/>
                 </a:solidFill>
               </a:rPr>
-              <a:t>부모님 점검 · 2026. 00. 00</a:t>
+              <a:t>부모님 점검 · 2027. 00. 00</a:t>
             </a:r>
           </a:p>
           <a:p>
@@ -3748,180 +3532,6 @@
       </p:sp>
       <p:sp>
         <p:nvSpPr>
-          <p:cNvPr id="5" name="장식"/>
-          <p:cNvSpPr/>
-          <p:nvPr/>
-        </p:nvSpPr>
-        <p:spPr>
-          <a:xfrm rot="47073">
-            <a:off x="11538365" y="657714"/>
-            <a:ext cx="339662" cy="339662"/>
-          </a:xfrm>
-          <a:prstGeom prst="star5">
-            <a:avLst/>
-          </a:prstGeom>
-          <a:solidFill>
-            <a:srgbClr val="246B53"/>
-          </a:solidFill>
-          <a:ln>
-            <a:noFill/>
-          </a:ln>
-        </p:spPr>
-        <p:txBody>
-          <a:bodyPr rtlCol="0" anchor="ctr"/>
-          <a:lstStyle/>
-          <a:p>
-            <a:pPr algn="ctr"/>
-          </a:p>
-        </p:txBody>
-      </p:sp>
-      <p:sp>
-        <p:nvSpPr>
-          <p:cNvPr id="6" name="장식"/>
-          <p:cNvSpPr/>
-          <p:nvPr/>
-        </p:nvSpPr>
-        <p:spPr>
-          <a:xfrm rot="616000">
-            <a:off x="11746497" y="343890"/>
-            <a:ext cx="145122" cy="145122"/>
-          </a:xfrm>
-          <a:prstGeom prst="star5">
-            <a:avLst/>
-          </a:prstGeom>
-          <a:solidFill>
-            <a:srgbClr val="D0F1E6"/>
-          </a:solidFill>
-          <a:ln>
-            <a:noFill/>
-          </a:ln>
-        </p:spPr>
-        <p:txBody>
-          <a:bodyPr rtlCol="0" anchor="ctr"/>
-          <a:lstStyle/>
-          <a:p>
-            <a:pPr algn="ctr"/>
-          </a:p>
-        </p:txBody>
-      </p:sp>
-      <p:sp>
-        <p:nvSpPr>
-          <p:cNvPr id="7" name="장식"/>
-          <p:cNvSpPr/>
-          <p:nvPr/>
-        </p:nvSpPr>
-        <p:spPr>
-          <a:xfrm rot="291727">
-            <a:off x="10891282" y="851234"/>
-            <a:ext cx="259566" cy="259566"/>
-          </a:xfrm>
-          <a:prstGeom prst="star5">
-            <a:avLst/>
-          </a:prstGeom>
-          <a:solidFill>
-            <a:srgbClr val="913B83"/>
-          </a:solidFill>
-          <a:ln>
-            <a:noFill/>
-          </a:ln>
-        </p:spPr>
-        <p:txBody>
-          <a:bodyPr rtlCol="0" anchor="ctr"/>
-          <a:lstStyle/>
-          <a:p>
-            <a:pPr algn="ctr"/>
-          </a:p>
-        </p:txBody>
-      </p:sp>
-      <p:sp>
-        <p:nvSpPr>
-          <p:cNvPr id="8" name="장식"/>
-          <p:cNvSpPr/>
-          <p:nvPr/>
-        </p:nvSpPr>
-        <p:spPr>
-          <a:xfrm rot="486238">
-            <a:off x="11664833" y="1088349"/>
-            <a:ext cx="301133" cy="301133"/>
-          </a:xfrm>
-          <a:prstGeom prst="star5">
-            <a:avLst/>
-          </a:prstGeom>
-          <a:solidFill>
-            <a:srgbClr val="246B53"/>
-          </a:solidFill>
-          <a:ln>
-            <a:noFill/>
-          </a:ln>
-        </p:spPr>
-        <p:txBody>
-          <a:bodyPr rtlCol="0" anchor="ctr"/>
-          <a:lstStyle/>
-          <a:p>
-            <a:pPr algn="ctr"/>
-          </a:p>
-        </p:txBody>
-      </p:sp>
-      <p:sp>
-        <p:nvSpPr>
-          <p:cNvPr id="9" name="장식"/>
-          <p:cNvSpPr/>
-          <p:nvPr/>
-        </p:nvSpPr>
-        <p:spPr>
-          <a:xfrm rot="21114457">
-            <a:off x="11651521" y="1048887"/>
-            <a:ext cx="297834" cy="297834"/>
-          </a:xfrm>
-          <a:prstGeom prst="star5">
-            <a:avLst/>
-          </a:prstGeom>
-          <a:solidFill>
-            <a:srgbClr val="D0F1E6"/>
-          </a:solidFill>
-          <a:ln>
-            <a:noFill/>
-          </a:ln>
-        </p:spPr>
-        <p:txBody>
-          <a:bodyPr rtlCol="0" anchor="ctr"/>
-          <a:lstStyle/>
-          <a:p>
-            <a:pPr algn="ctr"/>
-          </a:p>
-        </p:txBody>
-      </p:sp>
-      <p:sp>
-        <p:nvSpPr>
-          <p:cNvPr id="10" name="장식"/>
-          <p:cNvSpPr/>
-          <p:nvPr/>
-        </p:nvSpPr>
-        <p:spPr>
-          <a:xfrm rot="21340827">
-            <a:off x="11563561" y="655126"/>
-            <a:ext cx="151951" cy="151951"/>
-          </a:xfrm>
-          <a:prstGeom prst="star5">
-            <a:avLst/>
-          </a:prstGeom>
-          <a:solidFill>
-            <a:srgbClr val="913B83"/>
-          </a:solidFill>
-          <a:ln>
-            <a:noFill/>
-          </a:ln>
-        </p:spPr>
-        <p:txBody>
-          <a:bodyPr rtlCol="0" anchor="ctr"/>
-          <a:lstStyle/>
-          <a:p>
-            <a:pPr algn="ctr"/>
-          </a:p>
-        </p:txBody>
-      </p:sp>
-      <p:sp>
-        <p:nvSpPr>
           <p:cNvPr id="2" name="Title 1"/>
           <p:cNvSpPr>
             <a:spLocks noGrp="1"/>
@@ -3960,7 +3570,7 @@
       </p:sp>
       <p:graphicFrame>
         <p:nvGraphicFramePr>
-          <p:cNvPr id="11" name="표"/>
+          <p:cNvPr id="5" name="표"/>
           <p:cNvGraphicFramePr>
             <a:graphicFrameLocks noGrp="1"/>
           </p:cNvGraphicFramePr>
@@ -4771,180 +4381,6 @@
       </p:sp>
       <p:sp>
         <p:nvSpPr>
-          <p:cNvPr id="5" name="장식"/>
-          <p:cNvSpPr/>
-          <p:nvPr/>
-        </p:nvSpPr>
-        <p:spPr>
-          <a:xfrm rot="47073">
-            <a:off x="11538365" y="657714"/>
-            <a:ext cx="339662" cy="339662"/>
-          </a:xfrm>
-          <a:prstGeom prst="star5">
-            <a:avLst/>
-          </a:prstGeom>
-          <a:solidFill>
-            <a:srgbClr val="246B53"/>
-          </a:solidFill>
-          <a:ln>
-            <a:noFill/>
-          </a:ln>
-        </p:spPr>
-        <p:txBody>
-          <a:bodyPr rtlCol="0" anchor="ctr"/>
-          <a:lstStyle/>
-          <a:p>
-            <a:pPr algn="ctr"/>
-          </a:p>
-        </p:txBody>
-      </p:sp>
-      <p:sp>
-        <p:nvSpPr>
-          <p:cNvPr id="6" name="장식"/>
-          <p:cNvSpPr/>
-          <p:nvPr/>
-        </p:nvSpPr>
-        <p:spPr>
-          <a:xfrm rot="616000">
-            <a:off x="11746497" y="343890"/>
-            <a:ext cx="145122" cy="145122"/>
-          </a:xfrm>
-          <a:prstGeom prst="star5">
-            <a:avLst/>
-          </a:prstGeom>
-          <a:solidFill>
-            <a:srgbClr val="D0F1E6"/>
-          </a:solidFill>
-          <a:ln>
-            <a:noFill/>
-          </a:ln>
-        </p:spPr>
-        <p:txBody>
-          <a:bodyPr rtlCol="0" anchor="ctr"/>
-          <a:lstStyle/>
-          <a:p>
-            <a:pPr algn="ctr"/>
-          </a:p>
-        </p:txBody>
-      </p:sp>
-      <p:sp>
-        <p:nvSpPr>
-          <p:cNvPr id="7" name="장식"/>
-          <p:cNvSpPr/>
-          <p:nvPr/>
-        </p:nvSpPr>
-        <p:spPr>
-          <a:xfrm rot="291727">
-            <a:off x="10891282" y="851234"/>
-            <a:ext cx="259566" cy="259566"/>
-          </a:xfrm>
-          <a:prstGeom prst="star5">
-            <a:avLst/>
-          </a:prstGeom>
-          <a:solidFill>
-            <a:srgbClr val="913B83"/>
-          </a:solidFill>
-          <a:ln>
-            <a:noFill/>
-          </a:ln>
-        </p:spPr>
-        <p:txBody>
-          <a:bodyPr rtlCol="0" anchor="ctr"/>
-          <a:lstStyle/>
-          <a:p>
-            <a:pPr algn="ctr"/>
-          </a:p>
-        </p:txBody>
-      </p:sp>
-      <p:sp>
-        <p:nvSpPr>
-          <p:cNvPr id="8" name="장식"/>
-          <p:cNvSpPr/>
-          <p:nvPr/>
-        </p:nvSpPr>
-        <p:spPr>
-          <a:xfrm rot="486238">
-            <a:off x="11664833" y="1088349"/>
-            <a:ext cx="301133" cy="301133"/>
-          </a:xfrm>
-          <a:prstGeom prst="star5">
-            <a:avLst/>
-          </a:prstGeom>
-          <a:solidFill>
-            <a:srgbClr val="246B53"/>
-          </a:solidFill>
-          <a:ln>
-            <a:noFill/>
-          </a:ln>
-        </p:spPr>
-        <p:txBody>
-          <a:bodyPr rtlCol="0" anchor="ctr"/>
-          <a:lstStyle/>
-          <a:p>
-            <a:pPr algn="ctr"/>
-          </a:p>
-        </p:txBody>
-      </p:sp>
-      <p:sp>
-        <p:nvSpPr>
-          <p:cNvPr id="9" name="장식"/>
-          <p:cNvSpPr/>
-          <p:nvPr/>
-        </p:nvSpPr>
-        <p:spPr>
-          <a:xfrm rot="21114457">
-            <a:off x="11651521" y="1048887"/>
-            <a:ext cx="297834" cy="297834"/>
-          </a:xfrm>
-          <a:prstGeom prst="star5">
-            <a:avLst/>
-          </a:prstGeom>
-          <a:solidFill>
-            <a:srgbClr val="D0F1E6"/>
-          </a:solidFill>
-          <a:ln>
-            <a:noFill/>
-          </a:ln>
-        </p:spPr>
-        <p:txBody>
-          <a:bodyPr rtlCol="0" anchor="ctr"/>
-          <a:lstStyle/>
-          <a:p>
-            <a:pPr algn="ctr"/>
-          </a:p>
-        </p:txBody>
-      </p:sp>
-      <p:sp>
-        <p:nvSpPr>
-          <p:cNvPr id="10" name="장식"/>
-          <p:cNvSpPr/>
-          <p:nvPr/>
-        </p:nvSpPr>
-        <p:spPr>
-          <a:xfrm rot="21340827">
-            <a:off x="11563561" y="655126"/>
-            <a:ext cx="151951" cy="151951"/>
-          </a:xfrm>
-          <a:prstGeom prst="star5">
-            <a:avLst/>
-          </a:prstGeom>
-          <a:solidFill>
-            <a:srgbClr val="913B83"/>
-          </a:solidFill>
-          <a:ln>
-            <a:noFill/>
-          </a:ln>
-        </p:spPr>
-        <p:txBody>
-          <a:bodyPr rtlCol="0" anchor="ctr"/>
-          <a:lstStyle/>
-          <a:p>
-            <a:pPr algn="ctr"/>
-          </a:p>
-        </p:txBody>
-      </p:sp>
-      <p:sp>
-        <p:nvSpPr>
           <p:cNvPr id="2" name="Title 1"/>
           <p:cNvSpPr>
             <a:spLocks noGrp="1"/>
@@ -4983,7 +4419,7 @@
       </p:sp>
       <p:graphicFrame>
         <p:nvGraphicFramePr>
-          <p:cNvPr id="11" name="표"/>
+          <p:cNvPr id="5" name="표"/>
           <p:cNvGraphicFramePr>
             <a:graphicFrameLocks noGrp="1"/>
           </p:cNvGraphicFramePr>
@@ -6720,180 +6156,6 @@
       </p:sp>
       <p:sp>
         <p:nvSpPr>
-          <p:cNvPr id="5" name="장식"/>
-          <p:cNvSpPr/>
-          <p:nvPr/>
-        </p:nvSpPr>
-        <p:spPr>
-          <a:xfrm rot="47073">
-            <a:off x="11538365" y="657714"/>
-            <a:ext cx="339662" cy="339662"/>
-          </a:xfrm>
-          <a:prstGeom prst="star5">
-            <a:avLst/>
-          </a:prstGeom>
-          <a:solidFill>
-            <a:srgbClr val="246B53"/>
-          </a:solidFill>
-          <a:ln>
-            <a:noFill/>
-          </a:ln>
-        </p:spPr>
-        <p:txBody>
-          <a:bodyPr rtlCol="0" anchor="ctr"/>
-          <a:lstStyle/>
-          <a:p>
-            <a:pPr algn="ctr"/>
-          </a:p>
-        </p:txBody>
-      </p:sp>
-      <p:sp>
-        <p:nvSpPr>
-          <p:cNvPr id="6" name="장식"/>
-          <p:cNvSpPr/>
-          <p:nvPr/>
-        </p:nvSpPr>
-        <p:spPr>
-          <a:xfrm rot="616000">
-            <a:off x="11746497" y="343890"/>
-            <a:ext cx="145122" cy="145122"/>
-          </a:xfrm>
-          <a:prstGeom prst="star5">
-            <a:avLst/>
-          </a:prstGeom>
-          <a:solidFill>
-            <a:srgbClr val="D0F1E6"/>
-          </a:solidFill>
-          <a:ln>
-            <a:noFill/>
-          </a:ln>
-        </p:spPr>
-        <p:txBody>
-          <a:bodyPr rtlCol="0" anchor="ctr"/>
-          <a:lstStyle/>
-          <a:p>
-            <a:pPr algn="ctr"/>
-          </a:p>
-        </p:txBody>
-      </p:sp>
-      <p:sp>
-        <p:nvSpPr>
-          <p:cNvPr id="7" name="장식"/>
-          <p:cNvSpPr/>
-          <p:nvPr/>
-        </p:nvSpPr>
-        <p:spPr>
-          <a:xfrm rot="291727">
-            <a:off x="10891282" y="851234"/>
-            <a:ext cx="259566" cy="259566"/>
-          </a:xfrm>
-          <a:prstGeom prst="star5">
-            <a:avLst/>
-          </a:prstGeom>
-          <a:solidFill>
-            <a:srgbClr val="913B83"/>
-          </a:solidFill>
-          <a:ln>
-            <a:noFill/>
-          </a:ln>
-        </p:spPr>
-        <p:txBody>
-          <a:bodyPr rtlCol="0" anchor="ctr"/>
-          <a:lstStyle/>
-          <a:p>
-            <a:pPr algn="ctr"/>
-          </a:p>
-        </p:txBody>
-      </p:sp>
-      <p:sp>
-        <p:nvSpPr>
-          <p:cNvPr id="8" name="장식"/>
-          <p:cNvSpPr/>
-          <p:nvPr/>
-        </p:nvSpPr>
-        <p:spPr>
-          <a:xfrm rot="486238">
-            <a:off x="11664833" y="1088349"/>
-            <a:ext cx="301133" cy="301133"/>
-          </a:xfrm>
-          <a:prstGeom prst="star5">
-            <a:avLst/>
-          </a:prstGeom>
-          <a:solidFill>
-            <a:srgbClr val="246B53"/>
-          </a:solidFill>
-          <a:ln>
-            <a:noFill/>
-          </a:ln>
-        </p:spPr>
-        <p:txBody>
-          <a:bodyPr rtlCol="0" anchor="ctr"/>
-          <a:lstStyle/>
-          <a:p>
-            <a:pPr algn="ctr"/>
-          </a:p>
-        </p:txBody>
-      </p:sp>
-      <p:sp>
-        <p:nvSpPr>
-          <p:cNvPr id="9" name="장식"/>
-          <p:cNvSpPr/>
-          <p:nvPr/>
-        </p:nvSpPr>
-        <p:spPr>
-          <a:xfrm rot="21114457">
-            <a:off x="11651521" y="1048887"/>
-            <a:ext cx="297834" cy="297834"/>
-          </a:xfrm>
-          <a:prstGeom prst="star5">
-            <a:avLst/>
-          </a:prstGeom>
-          <a:solidFill>
-            <a:srgbClr val="D0F1E6"/>
-          </a:solidFill>
-          <a:ln>
-            <a:noFill/>
-          </a:ln>
-        </p:spPr>
-        <p:txBody>
-          <a:bodyPr rtlCol="0" anchor="ctr"/>
-          <a:lstStyle/>
-          <a:p>
-            <a:pPr algn="ctr"/>
-          </a:p>
-        </p:txBody>
-      </p:sp>
-      <p:sp>
-        <p:nvSpPr>
-          <p:cNvPr id="10" name="장식"/>
-          <p:cNvSpPr/>
-          <p:nvPr/>
-        </p:nvSpPr>
-        <p:spPr>
-          <a:xfrm rot="21340827">
-            <a:off x="11563561" y="655126"/>
-            <a:ext cx="151951" cy="151951"/>
-          </a:xfrm>
-          <a:prstGeom prst="star5">
-            <a:avLst/>
-          </a:prstGeom>
-          <a:solidFill>
-            <a:srgbClr val="913B83"/>
-          </a:solidFill>
-          <a:ln>
-            <a:noFill/>
-          </a:ln>
-        </p:spPr>
-        <p:txBody>
-          <a:bodyPr rtlCol="0" anchor="ctr"/>
-          <a:lstStyle/>
-          <a:p>
-            <a:pPr algn="ctr"/>
-          </a:p>
-        </p:txBody>
-      </p:sp>
-      <p:sp>
-        <p:nvSpPr>
           <p:cNvPr id="2" name="Title 1"/>
           <p:cNvSpPr>
             <a:spLocks noGrp="1"/>
@@ -6932,7 +6194,7 @@
       </p:sp>
       <p:graphicFrame>
         <p:nvGraphicFramePr>
-          <p:cNvPr id="11" name="표"/>
+          <p:cNvPr id="5" name="표"/>
           <p:cNvGraphicFramePr>
             <a:graphicFrameLocks noGrp="1"/>
           </p:cNvGraphicFramePr>
@@ -8718,180 +7980,6 @@
       </p:sp>
       <p:sp>
         <p:nvSpPr>
-          <p:cNvPr id="5" name="장식"/>
-          <p:cNvSpPr/>
-          <p:nvPr/>
-        </p:nvSpPr>
-        <p:spPr>
-          <a:xfrm rot="47073">
-            <a:off x="11538365" y="657714"/>
-            <a:ext cx="339662" cy="339662"/>
-          </a:xfrm>
-          <a:prstGeom prst="star5">
-            <a:avLst/>
-          </a:prstGeom>
-          <a:solidFill>
-            <a:srgbClr val="246B53"/>
-          </a:solidFill>
-          <a:ln>
-            <a:noFill/>
-          </a:ln>
-        </p:spPr>
-        <p:txBody>
-          <a:bodyPr rtlCol="0" anchor="ctr"/>
-          <a:lstStyle/>
-          <a:p>
-            <a:pPr algn="ctr"/>
-          </a:p>
-        </p:txBody>
-      </p:sp>
-      <p:sp>
-        <p:nvSpPr>
-          <p:cNvPr id="6" name="장식"/>
-          <p:cNvSpPr/>
-          <p:nvPr/>
-        </p:nvSpPr>
-        <p:spPr>
-          <a:xfrm rot="616000">
-            <a:off x="11746497" y="343890"/>
-            <a:ext cx="145122" cy="145122"/>
-          </a:xfrm>
-          <a:prstGeom prst="star5">
-            <a:avLst/>
-          </a:prstGeom>
-          <a:solidFill>
-            <a:srgbClr val="D0F1E6"/>
-          </a:solidFill>
-          <a:ln>
-            <a:noFill/>
-          </a:ln>
-        </p:spPr>
-        <p:txBody>
-          <a:bodyPr rtlCol="0" anchor="ctr"/>
-          <a:lstStyle/>
-          <a:p>
-            <a:pPr algn="ctr"/>
-          </a:p>
-        </p:txBody>
-      </p:sp>
-      <p:sp>
-        <p:nvSpPr>
-          <p:cNvPr id="7" name="장식"/>
-          <p:cNvSpPr/>
-          <p:nvPr/>
-        </p:nvSpPr>
-        <p:spPr>
-          <a:xfrm rot="291727">
-            <a:off x="10891282" y="851234"/>
-            <a:ext cx="259566" cy="259566"/>
-          </a:xfrm>
-          <a:prstGeom prst="star5">
-            <a:avLst/>
-          </a:prstGeom>
-          <a:solidFill>
-            <a:srgbClr val="913B83"/>
-          </a:solidFill>
-          <a:ln>
-            <a:noFill/>
-          </a:ln>
-        </p:spPr>
-        <p:txBody>
-          <a:bodyPr rtlCol="0" anchor="ctr"/>
-          <a:lstStyle/>
-          <a:p>
-            <a:pPr algn="ctr"/>
-          </a:p>
-        </p:txBody>
-      </p:sp>
-      <p:sp>
-        <p:nvSpPr>
-          <p:cNvPr id="8" name="장식"/>
-          <p:cNvSpPr/>
-          <p:nvPr/>
-        </p:nvSpPr>
-        <p:spPr>
-          <a:xfrm rot="486238">
-            <a:off x="11664833" y="1088349"/>
-            <a:ext cx="301133" cy="301133"/>
-          </a:xfrm>
-          <a:prstGeom prst="star5">
-            <a:avLst/>
-          </a:prstGeom>
-          <a:solidFill>
-            <a:srgbClr val="246B53"/>
-          </a:solidFill>
-          <a:ln>
-            <a:noFill/>
-          </a:ln>
-        </p:spPr>
-        <p:txBody>
-          <a:bodyPr rtlCol="0" anchor="ctr"/>
-          <a:lstStyle/>
-          <a:p>
-            <a:pPr algn="ctr"/>
-          </a:p>
-        </p:txBody>
-      </p:sp>
-      <p:sp>
-        <p:nvSpPr>
-          <p:cNvPr id="9" name="장식"/>
-          <p:cNvSpPr/>
-          <p:nvPr/>
-        </p:nvSpPr>
-        <p:spPr>
-          <a:xfrm rot="21114457">
-            <a:off x="11651521" y="1048887"/>
-            <a:ext cx="297834" cy="297834"/>
-          </a:xfrm>
-          <a:prstGeom prst="star5">
-            <a:avLst/>
-          </a:prstGeom>
-          <a:solidFill>
-            <a:srgbClr val="D0F1E6"/>
-          </a:solidFill>
-          <a:ln>
-            <a:noFill/>
-          </a:ln>
-        </p:spPr>
-        <p:txBody>
-          <a:bodyPr rtlCol="0" anchor="ctr"/>
-          <a:lstStyle/>
-          <a:p>
-            <a:pPr algn="ctr"/>
-          </a:p>
-        </p:txBody>
-      </p:sp>
-      <p:sp>
-        <p:nvSpPr>
-          <p:cNvPr id="10" name="장식"/>
-          <p:cNvSpPr/>
-          <p:nvPr/>
-        </p:nvSpPr>
-        <p:spPr>
-          <a:xfrm rot="21340827">
-            <a:off x="11563561" y="655126"/>
-            <a:ext cx="151951" cy="151951"/>
-          </a:xfrm>
-          <a:prstGeom prst="star5">
-            <a:avLst/>
-          </a:prstGeom>
-          <a:solidFill>
-            <a:srgbClr val="913B83"/>
-          </a:solidFill>
-          <a:ln>
-            <a:noFill/>
-          </a:ln>
-        </p:spPr>
-        <p:txBody>
-          <a:bodyPr rtlCol="0" anchor="ctr"/>
-          <a:lstStyle/>
-          <a:p>
-            <a:pPr algn="ctr"/>
-          </a:p>
-        </p:txBody>
-      </p:sp>
-      <p:sp>
-        <p:nvSpPr>
           <p:cNvPr id="2" name="Title 1"/>
           <p:cNvSpPr>
             <a:spLocks noGrp="1"/>
@@ -8930,7 +8018,7 @@
       </p:sp>
       <p:sp>
         <p:nvSpPr>
-          <p:cNvPr id="11" name="카드 1"/>
+          <p:cNvPr id="5" name="카드 1"/>
           <p:cNvSpPr/>
           <p:nvPr/>
         </p:nvSpPr>
@@ -8963,7 +8051,7 @@
       </p:sp>
       <p:sp>
         <p:nvSpPr>
-          <p:cNvPr id="12" name="번호 1"/>
+          <p:cNvPr id="6" name="번호 1"/>
           <p:cNvSpPr/>
           <p:nvPr/>
         </p:nvSpPr>
@@ -9006,7 +8094,7 @@
       </p:sp>
       <p:sp>
         <p:nvSpPr>
-          <p:cNvPr id="13" name="TextBox 12"/>
+          <p:cNvPr id="7" name="TextBox 6"/>
           <p:cNvSpPr txBox="1"/>
           <p:nvPr/>
         </p:nvSpPr>
@@ -9044,7 +8132,7 @@
       </p:sp>
       <p:sp>
         <p:nvSpPr>
-          <p:cNvPr id="14" name="TextBox 13"/>
+          <p:cNvPr id="8" name="TextBox 7"/>
           <p:cNvSpPr txBox="1"/>
           <p:nvPr/>
         </p:nvSpPr>
@@ -9082,7 +8170,7 @@
       </p:sp>
       <p:sp>
         <p:nvSpPr>
-          <p:cNvPr id="15" name="카드 2"/>
+          <p:cNvPr id="9" name="카드 2"/>
           <p:cNvSpPr/>
           <p:nvPr/>
         </p:nvSpPr>
@@ -9115,7 +8203,7 @@
       </p:sp>
       <p:sp>
         <p:nvSpPr>
-          <p:cNvPr id="16" name="번호 2"/>
+          <p:cNvPr id="10" name="번호 2"/>
           <p:cNvSpPr/>
           <p:nvPr/>
         </p:nvSpPr>
@@ -9158,7 +8246,7 @@
       </p:sp>
       <p:sp>
         <p:nvSpPr>
-          <p:cNvPr id="17" name="TextBox 16"/>
+          <p:cNvPr id="11" name="TextBox 10"/>
           <p:cNvSpPr txBox="1"/>
           <p:nvPr/>
         </p:nvSpPr>
@@ -9196,7 +8284,7 @@
       </p:sp>
       <p:sp>
         <p:nvSpPr>
-          <p:cNvPr id="18" name="TextBox 17"/>
+          <p:cNvPr id="12" name="TextBox 11"/>
           <p:cNvSpPr txBox="1"/>
           <p:nvPr/>
         </p:nvSpPr>
@@ -9234,7 +8322,7 @@
       </p:sp>
       <p:sp>
         <p:nvSpPr>
-          <p:cNvPr id="19" name="카드 3"/>
+          <p:cNvPr id="13" name="카드 3"/>
           <p:cNvSpPr/>
           <p:nvPr/>
         </p:nvSpPr>
@@ -9267,7 +8355,7 @@
       </p:sp>
       <p:sp>
         <p:nvSpPr>
-          <p:cNvPr id="20" name="번호 3"/>
+          <p:cNvPr id="14" name="번호 3"/>
           <p:cNvSpPr/>
           <p:nvPr/>
         </p:nvSpPr>
@@ -9310,7 +8398,7 @@
       </p:sp>
       <p:sp>
         <p:nvSpPr>
-          <p:cNvPr id="21" name="TextBox 20"/>
+          <p:cNvPr id="15" name="TextBox 14"/>
           <p:cNvSpPr txBox="1"/>
           <p:nvPr/>
         </p:nvSpPr>
@@ -9348,7 +8436,7 @@
       </p:sp>
       <p:sp>
         <p:nvSpPr>
-          <p:cNvPr id="22" name="TextBox 21"/>
+          <p:cNvPr id="16" name="TextBox 15"/>
           <p:cNvSpPr txBox="1"/>
           <p:nvPr/>
         </p:nvSpPr>
@@ -9386,7 +8474,7 @@
       </p:sp>
       <p:sp>
         <p:nvSpPr>
-          <p:cNvPr id="23" name="안내"/>
+          <p:cNvPr id="17" name="안내"/>
           <p:cNvSpPr txBox="1"/>
           <p:nvPr/>
         </p:nvSpPr>
@@ -9508,180 +8596,6 @@
       </p:sp>
       <p:sp>
         <p:nvSpPr>
-          <p:cNvPr id="5" name="장식"/>
-          <p:cNvSpPr/>
-          <p:nvPr/>
-        </p:nvSpPr>
-        <p:spPr>
-          <a:xfrm rot="47073">
-            <a:off x="11538365" y="657714"/>
-            <a:ext cx="339662" cy="339662"/>
-          </a:xfrm>
-          <a:prstGeom prst="star5">
-            <a:avLst/>
-          </a:prstGeom>
-          <a:solidFill>
-            <a:srgbClr val="246B53"/>
-          </a:solidFill>
-          <a:ln>
-            <a:noFill/>
-          </a:ln>
-        </p:spPr>
-        <p:txBody>
-          <a:bodyPr rtlCol="0" anchor="ctr"/>
-          <a:lstStyle/>
-          <a:p>
-            <a:pPr algn="ctr"/>
-          </a:p>
-        </p:txBody>
-      </p:sp>
-      <p:sp>
-        <p:nvSpPr>
-          <p:cNvPr id="6" name="장식"/>
-          <p:cNvSpPr/>
-          <p:nvPr/>
-        </p:nvSpPr>
-        <p:spPr>
-          <a:xfrm rot="616000">
-            <a:off x="11746497" y="343890"/>
-            <a:ext cx="145122" cy="145122"/>
-          </a:xfrm>
-          <a:prstGeom prst="star5">
-            <a:avLst/>
-          </a:prstGeom>
-          <a:solidFill>
-            <a:srgbClr val="D0F1E6"/>
-          </a:solidFill>
-          <a:ln>
-            <a:noFill/>
-          </a:ln>
-        </p:spPr>
-        <p:txBody>
-          <a:bodyPr rtlCol="0" anchor="ctr"/>
-          <a:lstStyle/>
-          <a:p>
-            <a:pPr algn="ctr"/>
-          </a:p>
-        </p:txBody>
-      </p:sp>
-      <p:sp>
-        <p:nvSpPr>
-          <p:cNvPr id="7" name="장식"/>
-          <p:cNvSpPr/>
-          <p:nvPr/>
-        </p:nvSpPr>
-        <p:spPr>
-          <a:xfrm rot="291727">
-            <a:off x="10891282" y="851234"/>
-            <a:ext cx="259566" cy="259566"/>
-          </a:xfrm>
-          <a:prstGeom prst="star5">
-            <a:avLst/>
-          </a:prstGeom>
-          <a:solidFill>
-            <a:srgbClr val="913B83"/>
-          </a:solidFill>
-          <a:ln>
-            <a:noFill/>
-          </a:ln>
-        </p:spPr>
-        <p:txBody>
-          <a:bodyPr rtlCol="0" anchor="ctr"/>
-          <a:lstStyle/>
-          <a:p>
-            <a:pPr algn="ctr"/>
-          </a:p>
-        </p:txBody>
-      </p:sp>
-      <p:sp>
-        <p:nvSpPr>
-          <p:cNvPr id="8" name="장식"/>
-          <p:cNvSpPr/>
-          <p:nvPr/>
-        </p:nvSpPr>
-        <p:spPr>
-          <a:xfrm rot="486238">
-            <a:off x="11664833" y="1088349"/>
-            <a:ext cx="301133" cy="301133"/>
-          </a:xfrm>
-          <a:prstGeom prst="star5">
-            <a:avLst/>
-          </a:prstGeom>
-          <a:solidFill>
-            <a:srgbClr val="246B53"/>
-          </a:solidFill>
-          <a:ln>
-            <a:noFill/>
-          </a:ln>
-        </p:spPr>
-        <p:txBody>
-          <a:bodyPr rtlCol="0" anchor="ctr"/>
-          <a:lstStyle/>
-          <a:p>
-            <a:pPr algn="ctr"/>
-          </a:p>
-        </p:txBody>
-      </p:sp>
-      <p:sp>
-        <p:nvSpPr>
-          <p:cNvPr id="9" name="장식"/>
-          <p:cNvSpPr/>
-          <p:nvPr/>
-        </p:nvSpPr>
-        <p:spPr>
-          <a:xfrm rot="21114457">
-            <a:off x="11651521" y="1048887"/>
-            <a:ext cx="297834" cy="297834"/>
-          </a:xfrm>
-          <a:prstGeom prst="star5">
-            <a:avLst/>
-          </a:prstGeom>
-          <a:solidFill>
-            <a:srgbClr val="D0F1E6"/>
-          </a:solidFill>
-          <a:ln>
-            <a:noFill/>
-          </a:ln>
-        </p:spPr>
-        <p:txBody>
-          <a:bodyPr rtlCol="0" anchor="ctr"/>
-          <a:lstStyle/>
-          <a:p>
-            <a:pPr algn="ctr"/>
-          </a:p>
-        </p:txBody>
-      </p:sp>
-      <p:sp>
-        <p:nvSpPr>
-          <p:cNvPr id="10" name="장식"/>
-          <p:cNvSpPr/>
-          <p:nvPr/>
-        </p:nvSpPr>
-        <p:spPr>
-          <a:xfrm rot="21340827">
-            <a:off x="11563561" y="655126"/>
-            <a:ext cx="151951" cy="151951"/>
-          </a:xfrm>
-          <a:prstGeom prst="star5">
-            <a:avLst/>
-          </a:prstGeom>
-          <a:solidFill>
-            <a:srgbClr val="913B83"/>
-          </a:solidFill>
-          <a:ln>
-            <a:noFill/>
-          </a:ln>
-        </p:spPr>
-        <p:txBody>
-          <a:bodyPr rtlCol="0" anchor="ctr"/>
-          <a:lstStyle/>
-          <a:p>
-            <a:pPr algn="ctr"/>
-          </a:p>
-        </p:txBody>
-      </p:sp>
-      <p:sp>
-        <p:nvSpPr>
           <p:cNvPr id="2" name="Title 1"/>
           <p:cNvSpPr>
             <a:spLocks noGrp="1"/>
@@ -9720,7 +8634,7 @@
       </p:sp>
       <p:sp>
         <p:nvSpPr>
-          <p:cNvPr id="11" name="카드 1"/>
+          <p:cNvPr id="5" name="카드 1"/>
           <p:cNvSpPr/>
           <p:nvPr/>
         </p:nvSpPr>
@@ -9753,7 +8667,7 @@
       </p:sp>
       <p:sp>
         <p:nvSpPr>
-          <p:cNvPr id="12" name="번호 1"/>
+          <p:cNvPr id="6" name="번호 1"/>
           <p:cNvSpPr/>
           <p:nvPr/>
         </p:nvSpPr>
@@ -9796,7 +8710,7 @@
       </p:sp>
       <p:sp>
         <p:nvSpPr>
-          <p:cNvPr id="13" name="TextBox 12"/>
+          <p:cNvPr id="7" name="TextBox 6"/>
           <p:cNvSpPr txBox="1"/>
           <p:nvPr/>
         </p:nvSpPr>
@@ -9834,7 +8748,7 @@
       </p:sp>
       <p:sp>
         <p:nvSpPr>
-          <p:cNvPr id="14" name="TextBox 13"/>
+          <p:cNvPr id="8" name="TextBox 7"/>
           <p:cNvSpPr txBox="1"/>
           <p:nvPr/>
         </p:nvSpPr>
@@ -9872,7 +8786,7 @@
       </p:sp>
       <p:sp>
         <p:nvSpPr>
-          <p:cNvPr id="15" name="카드 2"/>
+          <p:cNvPr id="9" name="카드 2"/>
           <p:cNvSpPr/>
           <p:nvPr/>
         </p:nvSpPr>
@@ -9905,7 +8819,7 @@
       </p:sp>
       <p:sp>
         <p:nvSpPr>
-          <p:cNvPr id="16" name="번호 2"/>
+          <p:cNvPr id="10" name="번호 2"/>
           <p:cNvSpPr/>
           <p:nvPr/>
         </p:nvSpPr>
@@ -9948,7 +8862,7 @@
       </p:sp>
       <p:sp>
         <p:nvSpPr>
-          <p:cNvPr id="17" name="TextBox 16"/>
+          <p:cNvPr id="11" name="TextBox 10"/>
           <p:cNvSpPr txBox="1"/>
           <p:nvPr/>
         </p:nvSpPr>
@@ -9986,7 +8900,7 @@
       </p:sp>
       <p:sp>
         <p:nvSpPr>
-          <p:cNvPr id="18" name="TextBox 17"/>
+          <p:cNvPr id="12" name="TextBox 11"/>
           <p:cNvSpPr txBox="1"/>
           <p:nvPr/>
         </p:nvSpPr>
@@ -10024,7 +8938,7 @@
       </p:sp>
       <p:sp>
         <p:nvSpPr>
-          <p:cNvPr id="19" name="카드 3"/>
+          <p:cNvPr id="13" name="카드 3"/>
           <p:cNvSpPr/>
           <p:nvPr/>
         </p:nvSpPr>
@@ -10057,7 +8971,7 @@
       </p:sp>
       <p:sp>
         <p:nvSpPr>
-          <p:cNvPr id="20" name="번호 3"/>
+          <p:cNvPr id="14" name="번호 3"/>
           <p:cNvSpPr/>
           <p:nvPr/>
         </p:nvSpPr>
@@ -10100,7 +9014,7 @@
       </p:sp>
       <p:sp>
         <p:nvSpPr>
-          <p:cNvPr id="21" name="TextBox 20"/>
+          <p:cNvPr id="15" name="TextBox 14"/>
           <p:cNvSpPr txBox="1"/>
           <p:nvPr/>
         </p:nvSpPr>
@@ -10138,7 +9052,7 @@
       </p:sp>
       <p:sp>
         <p:nvSpPr>
-          <p:cNvPr id="22" name="TextBox 21"/>
+          <p:cNvPr id="16" name="TextBox 15"/>
           <p:cNvSpPr txBox="1"/>
           <p:nvPr/>
         </p:nvSpPr>
@@ -10176,7 +9090,7 @@
       </p:sp>
       <p:sp>
         <p:nvSpPr>
-          <p:cNvPr id="23" name="안내 문구"/>
+          <p:cNvPr id="17" name="안내 문구"/>
           <p:cNvSpPr txBox="1"/>
           <p:nvPr/>
         </p:nvSpPr>

--- a/public/fun/pack/pptx/review/보장점검양식_19_부모님점검_반딧불마을.pptx
+++ b/public/fun/pack/pptx/review/보장점검양식_19_부모님점검_반딧불마을.pptx
@@ -3347,7 +3347,7 @@
             <a:r>
               <a:rPr sz="3600" b="1" i="0">
                 <a:solidFill>
-                  <a:srgbClr val="143D30"/>
+                  <a:srgbClr val="115F45"/>
                 </a:solidFill>
               </a:rPr>
               <a:t>우리 보험 점검 시간</a:t>
@@ -3385,7 +3385,7 @@
             <a:r>
               <a:rPr sz="1700" b="0" i="1">
                 <a:solidFill>
-                  <a:srgbClr val="143D30"/>
+                  <a:srgbClr val="115F45"/>
                 </a:solidFill>
               </a:rPr>
               <a:t>연세와 건강 상태를 메모해 둡니다</a:t>
@@ -3487,7 +3487,7 @@
             <a:avLst/>
           </a:prstGeom>
           <a:solidFill>
-            <a:srgbClr val="D0F1E6"/>
+            <a:srgbClr val="D1FAEC"/>
           </a:solidFill>
           <a:ln>
             <a:noFill/>
@@ -3516,7 +3516,7 @@
             <a:avLst/>
           </a:prstGeom>
           <a:solidFill>
-            <a:srgbClr val="246B53"/>
+            <a:srgbClr val="26C590"/>
           </a:solidFill>
           <a:ln>
             <a:noFill/>
@@ -3560,7 +3560,7 @@
             <a:r>
               <a:rPr sz="3000" b="1" i="0">
                 <a:solidFill>
-                  <a:srgbClr val="143D30"/>
+                  <a:srgbClr val="115F45"/>
                 </a:solidFill>
               </a:rPr>
               <a:t>점검 대상 현황</a:t>
@@ -3611,30 +3611,30 @@
                   <a:tcPr anchor="ctr" marL="73152" marR="73152">
                     <a:lnL w="9525" cap="flat" cmpd="sng" algn="ctr">
                       <a:solidFill>
-                        <a:srgbClr val="246B53"/>
+                        <a:srgbClr val="26C590"/>
                       </a:solidFill>
                       <a:prstDash val="solid"/>
                     </a:lnL>
                     <a:lnR w="9525" cap="flat" cmpd="sng" algn="ctr">
                       <a:solidFill>
-                        <a:srgbClr val="246B53"/>
+                        <a:srgbClr val="26C590"/>
                       </a:solidFill>
                       <a:prstDash val="solid"/>
                     </a:lnR>
                     <a:lnT w="9525" cap="flat" cmpd="sng" algn="ctr">
                       <a:solidFill>
-                        <a:srgbClr val="246B53"/>
+                        <a:srgbClr val="26C590"/>
                       </a:solidFill>
                       <a:prstDash val="solid"/>
                     </a:lnT>
                     <a:lnB w="9525" cap="flat" cmpd="sng" algn="ctr">
                       <a:solidFill>
-                        <a:srgbClr val="246B53"/>
+                        <a:srgbClr val="26C590"/>
                       </a:solidFill>
                       <a:prstDash val="solid"/>
                     </a:lnB>
                     <a:solidFill>
-                      <a:srgbClr val="246B53"/>
+                      <a:srgbClr val="26C590"/>
                     </a:solidFill>
                   </a:tcPr>
                 </a:tc>
@@ -3657,30 +3657,30 @@
                   <a:tcPr anchor="ctr" marL="73152" marR="73152">
                     <a:lnL w="9525" cap="flat" cmpd="sng" algn="ctr">
                       <a:solidFill>
-                        <a:srgbClr val="246B53"/>
+                        <a:srgbClr val="26C590"/>
                       </a:solidFill>
                       <a:prstDash val="solid"/>
                     </a:lnL>
                     <a:lnR w="9525" cap="flat" cmpd="sng" algn="ctr">
                       <a:solidFill>
-                        <a:srgbClr val="246B53"/>
+                        <a:srgbClr val="26C590"/>
                       </a:solidFill>
                       <a:prstDash val="solid"/>
                     </a:lnR>
                     <a:lnT w="9525" cap="flat" cmpd="sng" algn="ctr">
                       <a:solidFill>
-                        <a:srgbClr val="246B53"/>
+                        <a:srgbClr val="26C590"/>
                       </a:solidFill>
                       <a:prstDash val="solid"/>
                     </a:lnT>
                     <a:lnB w="9525" cap="flat" cmpd="sng" algn="ctr">
                       <a:solidFill>
-                        <a:srgbClr val="246B53"/>
+                        <a:srgbClr val="26C590"/>
                       </a:solidFill>
                       <a:prstDash val="solid"/>
                     </a:lnB>
                     <a:solidFill>
-                      <a:srgbClr val="246B53"/>
+                      <a:srgbClr val="26C590"/>
                     </a:solidFill>
                   </a:tcPr>
                 </a:tc>
@@ -3703,30 +3703,30 @@
                   <a:tcPr anchor="ctr" marL="73152" marR="73152">
                     <a:lnL w="9525" cap="flat" cmpd="sng" algn="ctr">
                       <a:solidFill>
-                        <a:srgbClr val="246B53"/>
+                        <a:srgbClr val="26C590"/>
                       </a:solidFill>
                       <a:prstDash val="solid"/>
                     </a:lnL>
                     <a:lnR w="9525" cap="flat" cmpd="sng" algn="ctr">
                       <a:solidFill>
-                        <a:srgbClr val="246B53"/>
+                        <a:srgbClr val="26C590"/>
                       </a:solidFill>
                       <a:prstDash val="solid"/>
                     </a:lnR>
                     <a:lnT w="9525" cap="flat" cmpd="sng" algn="ctr">
                       <a:solidFill>
-                        <a:srgbClr val="246B53"/>
+                        <a:srgbClr val="26C590"/>
                       </a:solidFill>
                       <a:prstDash val="solid"/>
                     </a:lnT>
                     <a:lnB w="9525" cap="flat" cmpd="sng" algn="ctr">
                       <a:solidFill>
-                        <a:srgbClr val="246B53"/>
+                        <a:srgbClr val="26C590"/>
                       </a:solidFill>
                       <a:prstDash val="solid"/>
                     </a:lnB>
                     <a:solidFill>
-                      <a:srgbClr val="246B53"/>
+                      <a:srgbClr val="26C590"/>
                     </a:solidFill>
                   </a:tcPr>
                 </a:tc>
@@ -3741,7 +3741,7 @@
                       <a:r>
                         <a:rPr sz="1600" b="1">
                           <a:solidFill>
-                            <a:srgbClr val="143D30"/>
+                            <a:srgbClr val="115F45"/>
                           </a:solidFill>
                         </a:rPr>
                         <a:t>성함</a:t>
@@ -3751,30 +3751,30 @@
                   <a:tcPr anchor="ctr" marL="73152" marR="73152">
                     <a:lnL w="9525" cap="flat" cmpd="sng" algn="ctr">
                       <a:solidFill>
-                        <a:srgbClr val="D0F1E6"/>
+                        <a:srgbClr val="D1FAEC"/>
                       </a:solidFill>
                       <a:prstDash val="solid"/>
                     </a:lnL>
                     <a:lnR w="9525" cap="flat" cmpd="sng" algn="ctr">
                       <a:solidFill>
-                        <a:srgbClr val="D0F1E6"/>
+                        <a:srgbClr val="D1FAEC"/>
                       </a:solidFill>
                       <a:prstDash val="solid"/>
                     </a:lnR>
                     <a:lnT w="9525" cap="flat" cmpd="sng" algn="ctr">
                       <a:solidFill>
-                        <a:srgbClr val="D0F1E6"/>
+                        <a:srgbClr val="D1FAEC"/>
                       </a:solidFill>
                       <a:prstDash val="solid"/>
                     </a:lnT>
                     <a:lnB w="9525" cap="flat" cmpd="sng" algn="ctr">
                       <a:solidFill>
-                        <a:srgbClr val="D0F1E6"/>
+                        <a:srgbClr val="D1FAEC"/>
                       </a:solidFill>
                       <a:prstDash val="solid"/>
                     </a:lnB>
                     <a:solidFill>
-                      <a:srgbClr val="D0F1E6"/>
+                      <a:srgbClr val="D1FAEC"/>
                     </a:solidFill>
                   </a:tcPr>
                 </a:tc>
@@ -3797,25 +3797,25 @@
                   <a:tcPr anchor="ctr" marL="73152" marR="73152">
                     <a:lnL w="9525" cap="flat" cmpd="sng" algn="ctr">
                       <a:solidFill>
-                        <a:srgbClr val="D0F1E6"/>
+                        <a:srgbClr val="D1FAEC"/>
                       </a:solidFill>
                       <a:prstDash val="solid"/>
                     </a:lnL>
                     <a:lnR w="9525" cap="flat" cmpd="sng" algn="ctr">
                       <a:solidFill>
-                        <a:srgbClr val="D0F1E6"/>
+                        <a:srgbClr val="D1FAEC"/>
                       </a:solidFill>
                       <a:prstDash val="solid"/>
                     </a:lnR>
                     <a:lnT w="9525" cap="flat" cmpd="sng" algn="ctr">
                       <a:solidFill>
-                        <a:srgbClr val="D0F1E6"/>
+                        <a:srgbClr val="D1FAEC"/>
                       </a:solidFill>
                       <a:prstDash val="solid"/>
                     </a:lnT>
                     <a:lnB w="9525" cap="flat" cmpd="sng" algn="ctr">
                       <a:solidFill>
-                        <a:srgbClr val="D0F1E6"/>
+                        <a:srgbClr val="D1FAEC"/>
                       </a:solidFill>
                       <a:prstDash val="solid"/>
                     </a:lnB>
@@ -3843,25 +3843,25 @@
                   <a:tcPr anchor="ctr" marL="73152" marR="73152">
                     <a:lnL w="9525" cap="flat" cmpd="sng" algn="ctr">
                       <a:solidFill>
-                        <a:srgbClr val="D0F1E6"/>
+                        <a:srgbClr val="D1FAEC"/>
                       </a:solidFill>
                       <a:prstDash val="solid"/>
                     </a:lnL>
                     <a:lnR w="9525" cap="flat" cmpd="sng" algn="ctr">
                       <a:solidFill>
-                        <a:srgbClr val="D0F1E6"/>
+                        <a:srgbClr val="D1FAEC"/>
                       </a:solidFill>
                       <a:prstDash val="solid"/>
                     </a:lnR>
                     <a:lnT w="9525" cap="flat" cmpd="sng" algn="ctr">
                       <a:solidFill>
-                        <a:srgbClr val="D0F1E6"/>
+                        <a:srgbClr val="D1FAEC"/>
                       </a:solidFill>
                       <a:prstDash val="solid"/>
                     </a:lnT>
                     <a:lnB w="9525" cap="flat" cmpd="sng" algn="ctr">
                       <a:solidFill>
-                        <a:srgbClr val="D0F1E6"/>
+                        <a:srgbClr val="D1FAEC"/>
                       </a:solidFill>
                       <a:prstDash val="solid"/>
                     </a:lnB>
@@ -3881,7 +3881,7 @@
                       <a:r>
                         <a:rPr sz="1600" b="1">
                           <a:solidFill>
-                            <a:srgbClr val="143D30"/>
+                            <a:srgbClr val="115F45"/>
                           </a:solidFill>
                         </a:rPr>
                         <a:t>연세</a:t>
@@ -3891,30 +3891,30 @@
                   <a:tcPr anchor="ctr" marL="73152" marR="73152">
                     <a:lnL w="9525" cap="flat" cmpd="sng" algn="ctr">
                       <a:solidFill>
-                        <a:srgbClr val="D0F1E6"/>
+                        <a:srgbClr val="D1FAEC"/>
                       </a:solidFill>
                       <a:prstDash val="solid"/>
                     </a:lnL>
                     <a:lnR w="9525" cap="flat" cmpd="sng" algn="ctr">
                       <a:solidFill>
-                        <a:srgbClr val="D0F1E6"/>
+                        <a:srgbClr val="D1FAEC"/>
                       </a:solidFill>
                       <a:prstDash val="solid"/>
                     </a:lnR>
                     <a:lnT w="9525" cap="flat" cmpd="sng" algn="ctr">
                       <a:solidFill>
-                        <a:srgbClr val="D0F1E6"/>
+                        <a:srgbClr val="D1FAEC"/>
                       </a:solidFill>
                       <a:prstDash val="solid"/>
                     </a:lnT>
                     <a:lnB w="9525" cap="flat" cmpd="sng" algn="ctr">
                       <a:solidFill>
-                        <a:srgbClr val="D0F1E6"/>
+                        <a:srgbClr val="D1FAEC"/>
                       </a:solidFill>
                       <a:prstDash val="solid"/>
                     </a:lnB>
                     <a:solidFill>
-                      <a:srgbClr val="D0F1E6"/>
+                      <a:srgbClr val="D1FAEC"/>
                     </a:solidFill>
                   </a:tcPr>
                 </a:tc>
@@ -3937,30 +3937,30 @@
                   <a:tcPr anchor="ctr" marL="73152" marR="73152">
                     <a:lnL w="9525" cap="flat" cmpd="sng" algn="ctr">
                       <a:solidFill>
-                        <a:srgbClr val="D0F1E6"/>
+                        <a:srgbClr val="D1FAEC"/>
                       </a:solidFill>
                       <a:prstDash val="solid"/>
                     </a:lnL>
                     <a:lnR w="9525" cap="flat" cmpd="sng" algn="ctr">
                       <a:solidFill>
-                        <a:srgbClr val="D0F1E6"/>
+                        <a:srgbClr val="D1FAEC"/>
                       </a:solidFill>
                       <a:prstDash val="solid"/>
                     </a:lnR>
                     <a:lnT w="9525" cap="flat" cmpd="sng" algn="ctr">
                       <a:solidFill>
-                        <a:srgbClr val="D0F1E6"/>
+                        <a:srgbClr val="D1FAEC"/>
                       </a:solidFill>
                       <a:prstDash val="solid"/>
                     </a:lnT>
                     <a:lnB w="9525" cap="flat" cmpd="sng" algn="ctr">
                       <a:solidFill>
-                        <a:srgbClr val="D0F1E6"/>
+                        <a:srgbClr val="D1FAEC"/>
                       </a:solidFill>
                       <a:prstDash val="solid"/>
                     </a:lnB>
                     <a:solidFill>
-                      <a:srgbClr val="F0FAF6"/>
+                      <a:srgbClr val="EEFCF7"/>
                     </a:solidFill>
                   </a:tcPr>
                 </a:tc>
@@ -3983,30 +3983,30 @@
                   <a:tcPr anchor="ctr" marL="73152" marR="73152">
                     <a:lnL w="9525" cap="flat" cmpd="sng" algn="ctr">
                       <a:solidFill>
-                        <a:srgbClr val="D0F1E6"/>
+                        <a:srgbClr val="D1FAEC"/>
                       </a:solidFill>
                       <a:prstDash val="solid"/>
                     </a:lnL>
                     <a:lnR w="9525" cap="flat" cmpd="sng" algn="ctr">
                       <a:solidFill>
-                        <a:srgbClr val="D0F1E6"/>
+                        <a:srgbClr val="D1FAEC"/>
                       </a:solidFill>
                       <a:prstDash val="solid"/>
                     </a:lnR>
                     <a:lnT w="9525" cap="flat" cmpd="sng" algn="ctr">
                       <a:solidFill>
-                        <a:srgbClr val="D0F1E6"/>
+                        <a:srgbClr val="D1FAEC"/>
                       </a:solidFill>
                       <a:prstDash val="solid"/>
                     </a:lnT>
                     <a:lnB w="9525" cap="flat" cmpd="sng" algn="ctr">
                       <a:solidFill>
-                        <a:srgbClr val="D0F1E6"/>
+                        <a:srgbClr val="D1FAEC"/>
                       </a:solidFill>
                       <a:prstDash val="solid"/>
                     </a:lnB>
                     <a:solidFill>
-                      <a:srgbClr val="F0FAF6"/>
+                      <a:srgbClr val="EEFCF7"/>
                     </a:solidFill>
                   </a:tcPr>
                 </a:tc>
@@ -4021,7 +4021,7 @@
                       <a:r>
                         <a:rPr sz="1600" b="1">
                           <a:solidFill>
-                            <a:srgbClr val="143D30"/>
+                            <a:srgbClr val="115F45"/>
                           </a:solidFill>
                         </a:rPr>
                         <a:t>건강 상태 메모</a:t>
@@ -4031,30 +4031,30 @@
                   <a:tcPr anchor="ctr" marL="73152" marR="73152">
                     <a:lnL w="9525" cap="flat" cmpd="sng" algn="ctr">
                       <a:solidFill>
-                        <a:srgbClr val="D0F1E6"/>
+                        <a:srgbClr val="D1FAEC"/>
                       </a:solidFill>
                       <a:prstDash val="solid"/>
                     </a:lnL>
                     <a:lnR w="9525" cap="flat" cmpd="sng" algn="ctr">
                       <a:solidFill>
-                        <a:srgbClr val="D0F1E6"/>
+                        <a:srgbClr val="D1FAEC"/>
                       </a:solidFill>
                       <a:prstDash val="solid"/>
                     </a:lnR>
                     <a:lnT w="9525" cap="flat" cmpd="sng" algn="ctr">
                       <a:solidFill>
-                        <a:srgbClr val="D0F1E6"/>
+                        <a:srgbClr val="D1FAEC"/>
                       </a:solidFill>
                       <a:prstDash val="solid"/>
                     </a:lnT>
                     <a:lnB w="9525" cap="flat" cmpd="sng" algn="ctr">
                       <a:solidFill>
-                        <a:srgbClr val="D0F1E6"/>
+                        <a:srgbClr val="D1FAEC"/>
                       </a:solidFill>
                       <a:prstDash val="solid"/>
                     </a:lnB>
                     <a:solidFill>
-                      <a:srgbClr val="D0F1E6"/>
+                      <a:srgbClr val="D1FAEC"/>
                     </a:solidFill>
                   </a:tcPr>
                 </a:tc>
@@ -4077,25 +4077,25 @@
                   <a:tcPr anchor="ctr" marL="73152" marR="73152">
                     <a:lnL w="9525" cap="flat" cmpd="sng" algn="ctr">
                       <a:solidFill>
-                        <a:srgbClr val="D0F1E6"/>
+                        <a:srgbClr val="D1FAEC"/>
                       </a:solidFill>
                       <a:prstDash val="solid"/>
                     </a:lnL>
                     <a:lnR w="9525" cap="flat" cmpd="sng" algn="ctr">
                       <a:solidFill>
-                        <a:srgbClr val="D0F1E6"/>
+                        <a:srgbClr val="D1FAEC"/>
                       </a:solidFill>
                       <a:prstDash val="solid"/>
                     </a:lnR>
                     <a:lnT w="9525" cap="flat" cmpd="sng" algn="ctr">
                       <a:solidFill>
-                        <a:srgbClr val="D0F1E6"/>
+                        <a:srgbClr val="D1FAEC"/>
                       </a:solidFill>
                       <a:prstDash val="solid"/>
                     </a:lnT>
                     <a:lnB w="9525" cap="flat" cmpd="sng" algn="ctr">
                       <a:solidFill>
-                        <a:srgbClr val="D0F1E6"/>
+                        <a:srgbClr val="D1FAEC"/>
                       </a:solidFill>
                       <a:prstDash val="solid"/>
                     </a:lnB>
@@ -4123,25 +4123,25 @@
                   <a:tcPr anchor="ctr" marL="73152" marR="73152">
                     <a:lnL w="9525" cap="flat" cmpd="sng" algn="ctr">
                       <a:solidFill>
-                        <a:srgbClr val="D0F1E6"/>
+                        <a:srgbClr val="D1FAEC"/>
                       </a:solidFill>
                       <a:prstDash val="solid"/>
                     </a:lnL>
                     <a:lnR w="9525" cap="flat" cmpd="sng" algn="ctr">
                       <a:solidFill>
-                        <a:srgbClr val="D0F1E6"/>
+                        <a:srgbClr val="D1FAEC"/>
                       </a:solidFill>
                       <a:prstDash val="solid"/>
                     </a:lnR>
                     <a:lnT w="9525" cap="flat" cmpd="sng" algn="ctr">
                       <a:solidFill>
-                        <a:srgbClr val="D0F1E6"/>
+                        <a:srgbClr val="D1FAEC"/>
                       </a:solidFill>
                       <a:prstDash val="solid"/>
                     </a:lnT>
                     <a:lnB w="9525" cap="flat" cmpd="sng" algn="ctr">
                       <a:solidFill>
-                        <a:srgbClr val="D0F1E6"/>
+                        <a:srgbClr val="D1FAEC"/>
                       </a:solidFill>
                       <a:prstDash val="solid"/>
                     </a:lnB>
@@ -4161,7 +4161,7 @@
                       <a:r>
                         <a:rPr sz="1600" b="1">
                           <a:solidFill>
-                            <a:srgbClr val="143D30"/>
+                            <a:srgbClr val="115F45"/>
                           </a:solidFill>
                         </a:rPr>
                         <a:t>함께 확인할 것</a:t>
@@ -4171,30 +4171,30 @@
                   <a:tcPr anchor="ctr" marL="73152" marR="73152">
                     <a:lnL w="9525" cap="flat" cmpd="sng" algn="ctr">
                       <a:solidFill>
-                        <a:srgbClr val="D0F1E6"/>
+                        <a:srgbClr val="D1FAEC"/>
                       </a:solidFill>
                       <a:prstDash val="solid"/>
                     </a:lnL>
                     <a:lnR w="9525" cap="flat" cmpd="sng" algn="ctr">
                       <a:solidFill>
-                        <a:srgbClr val="D0F1E6"/>
+                        <a:srgbClr val="D1FAEC"/>
                       </a:solidFill>
                       <a:prstDash val="solid"/>
                     </a:lnR>
                     <a:lnT w="9525" cap="flat" cmpd="sng" algn="ctr">
                       <a:solidFill>
-                        <a:srgbClr val="D0F1E6"/>
+                        <a:srgbClr val="D1FAEC"/>
                       </a:solidFill>
                       <a:prstDash val="solid"/>
                     </a:lnT>
                     <a:lnB w="9525" cap="flat" cmpd="sng" algn="ctr">
                       <a:solidFill>
-                        <a:srgbClr val="D0F1E6"/>
+                        <a:srgbClr val="D1FAEC"/>
                       </a:solidFill>
                       <a:prstDash val="solid"/>
                     </a:lnB>
                     <a:solidFill>
-                      <a:srgbClr val="D0F1E6"/>
+                      <a:srgbClr val="D1FAEC"/>
                     </a:solidFill>
                   </a:tcPr>
                 </a:tc>
@@ -4217,30 +4217,30 @@
                   <a:tcPr anchor="ctr" marL="73152" marR="73152">
                     <a:lnL w="9525" cap="flat" cmpd="sng" algn="ctr">
                       <a:solidFill>
-                        <a:srgbClr val="D0F1E6"/>
+                        <a:srgbClr val="D1FAEC"/>
                       </a:solidFill>
                       <a:prstDash val="solid"/>
                     </a:lnL>
                     <a:lnR w="9525" cap="flat" cmpd="sng" algn="ctr">
                       <a:solidFill>
-                        <a:srgbClr val="D0F1E6"/>
+                        <a:srgbClr val="D1FAEC"/>
                       </a:solidFill>
                       <a:prstDash val="solid"/>
                     </a:lnR>
                     <a:lnT w="9525" cap="flat" cmpd="sng" algn="ctr">
                       <a:solidFill>
-                        <a:srgbClr val="D0F1E6"/>
+                        <a:srgbClr val="D1FAEC"/>
                       </a:solidFill>
                       <a:prstDash val="solid"/>
                     </a:lnT>
                     <a:lnB w="9525" cap="flat" cmpd="sng" algn="ctr">
                       <a:solidFill>
-                        <a:srgbClr val="D0F1E6"/>
+                        <a:srgbClr val="D1FAEC"/>
                       </a:solidFill>
                       <a:prstDash val="solid"/>
                     </a:lnB>
                     <a:solidFill>
-                      <a:srgbClr val="F0FAF6"/>
+                      <a:srgbClr val="EEFCF7"/>
                     </a:solidFill>
                   </a:tcPr>
                 </a:tc>
@@ -4263,30 +4263,30 @@
                   <a:tcPr anchor="ctr" marL="73152" marR="73152">
                     <a:lnL w="9525" cap="flat" cmpd="sng" algn="ctr">
                       <a:solidFill>
-                        <a:srgbClr val="D0F1E6"/>
+                        <a:srgbClr val="D1FAEC"/>
                       </a:solidFill>
                       <a:prstDash val="solid"/>
                     </a:lnL>
                     <a:lnR w="9525" cap="flat" cmpd="sng" algn="ctr">
                       <a:solidFill>
-                        <a:srgbClr val="D0F1E6"/>
+                        <a:srgbClr val="D1FAEC"/>
                       </a:solidFill>
                       <a:prstDash val="solid"/>
                     </a:lnR>
                     <a:lnT w="9525" cap="flat" cmpd="sng" algn="ctr">
                       <a:solidFill>
-                        <a:srgbClr val="D0F1E6"/>
+                        <a:srgbClr val="D1FAEC"/>
                       </a:solidFill>
                       <a:prstDash val="solid"/>
                     </a:lnT>
                     <a:lnB w="9525" cap="flat" cmpd="sng" algn="ctr">
                       <a:solidFill>
-                        <a:srgbClr val="D0F1E6"/>
+                        <a:srgbClr val="D1FAEC"/>
                       </a:solidFill>
                       <a:prstDash val="solid"/>
                     </a:lnB>
                     <a:solidFill>
-                      <a:srgbClr val="F0FAF6"/>
+                      <a:srgbClr val="EEFCF7"/>
                     </a:solidFill>
                   </a:tcPr>
                 </a:tc>
@@ -4336,7 +4336,7 @@
             <a:avLst/>
           </a:prstGeom>
           <a:solidFill>
-            <a:srgbClr val="D0F1E6"/>
+            <a:srgbClr val="D1FAEC"/>
           </a:solidFill>
           <a:ln>
             <a:noFill/>
@@ -4365,7 +4365,7 @@
             <a:avLst/>
           </a:prstGeom>
           <a:solidFill>
-            <a:srgbClr val="246B53"/>
+            <a:srgbClr val="26C590"/>
           </a:solidFill>
           <a:ln>
             <a:noFill/>
@@ -4409,7 +4409,7 @@
             <a:r>
               <a:rPr sz="3000" b="1" i="0">
                 <a:solidFill>
-                  <a:srgbClr val="143D30"/>
+                  <a:srgbClr val="115F45"/>
                 </a:solidFill>
               </a:rPr>
               <a:t>가입한 보험 목록</a:t>
@@ -4462,30 +4462,30 @@
                   <a:tcPr anchor="ctr" marL="73152" marR="73152">
                     <a:lnL w="9525" cap="flat" cmpd="sng" algn="ctr">
                       <a:solidFill>
-                        <a:srgbClr val="246B53"/>
+                        <a:srgbClr val="26C590"/>
                       </a:solidFill>
                       <a:prstDash val="solid"/>
                     </a:lnL>
                     <a:lnR w="9525" cap="flat" cmpd="sng" algn="ctr">
                       <a:solidFill>
-                        <a:srgbClr val="246B53"/>
+                        <a:srgbClr val="26C590"/>
                       </a:solidFill>
                       <a:prstDash val="solid"/>
                     </a:lnR>
                     <a:lnT w="9525" cap="flat" cmpd="sng" algn="ctr">
                       <a:solidFill>
-                        <a:srgbClr val="246B53"/>
+                        <a:srgbClr val="26C590"/>
                       </a:solidFill>
                       <a:prstDash val="solid"/>
                     </a:lnT>
                     <a:lnB w="9525" cap="flat" cmpd="sng" algn="ctr">
                       <a:solidFill>
-                        <a:srgbClr val="246B53"/>
+                        <a:srgbClr val="26C590"/>
                       </a:solidFill>
                       <a:prstDash val="solid"/>
                     </a:lnB>
                     <a:solidFill>
-                      <a:srgbClr val="246B53"/>
+                      <a:srgbClr val="26C590"/>
                     </a:solidFill>
                   </a:tcPr>
                 </a:tc>
@@ -4508,30 +4508,30 @@
                   <a:tcPr anchor="ctr" marL="73152" marR="73152">
                     <a:lnL w="9525" cap="flat" cmpd="sng" algn="ctr">
                       <a:solidFill>
-                        <a:srgbClr val="246B53"/>
+                        <a:srgbClr val="26C590"/>
                       </a:solidFill>
                       <a:prstDash val="solid"/>
                     </a:lnL>
                     <a:lnR w="9525" cap="flat" cmpd="sng" algn="ctr">
                       <a:solidFill>
-                        <a:srgbClr val="246B53"/>
+                        <a:srgbClr val="26C590"/>
                       </a:solidFill>
                       <a:prstDash val="solid"/>
                     </a:lnR>
                     <a:lnT w="9525" cap="flat" cmpd="sng" algn="ctr">
                       <a:solidFill>
-                        <a:srgbClr val="246B53"/>
+                        <a:srgbClr val="26C590"/>
                       </a:solidFill>
                       <a:prstDash val="solid"/>
                     </a:lnT>
                     <a:lnB w="9525" cap="flat" cmpd="sng" algn="ctr">
                       <a:solidFill>
-                        <a:srgbClr val="246B53"/>
+                        <a:srgbClr val="26C590"/>
                       </a:solidFill>
                       <a:prstDash val="solid"/>
                     </a:lnB>
                     <a:solidFill>
-                      <a:srgbClr val="246B53"/>
+                      <a:srgbClr val="26C590"/>
                     </a:solidFill>
                   </a:tcPr>
                 </a:tc>
@@ -4554,30 +4554,30 @@
                   <a:tcPr anchor="ctr" marL="73152" marR="73152">
                     <a:lnL w="9525" cap="flat" cmpd="sng" algn="ctr">
                       <a:solidFill>
-                        <a:srgbClr val="246B53"/>
+                        <a:srgbClr val="26C590"/>
                       </a:solidFill>
                       <a:prstDash val="solid"/>
                     </a:lnL>
                     <a:lnR w="9525" cap="flat" cmpd="sng" algn="ctr">
                       <a:solidFill>
-                        <a:srgbClr val="246B53"/>
+                        <a:srgbClr val="26C590"/>
                       </a:solidFill>
                       <a:prstDash val="solid"/>
                     </a:lnR>
                     <a:lnT w="9525" cap="flat" cmpd="sng" algn="ctr">
                       <a:solidFill>
-                        <a:srgbClr val="246B53"/>
+                        <a:srgbClr val="26C590"/>
                       </a:solidFill>
                       <a:prstDash val="solid"/>
                     </a:lnT>
                     <a:lnB w="9525" cap="flat" cmpd="sng" algn="ctr">
                       <a:solidFill>
-                        <a:srgbClr val="246B53"/>
+                        <a:srgbClr val="26C590"/>
                       </a:solidFill>
                       <a:prstDash val="solid"/>
                     </a:lnB>
                     <a:solidFill>
-                      <a:srgbClr val="246B53"/>
+                      <a:srgbClr val="26C590"/>
                     </a:solidFill>
                   </a:tcPr>
                 </a:tc>
@@ -4600,30 +4600,30 @@
                   <a:tcPr anchor="ctr" marL="73152" marR="73152">
                     <a:lnL w="9525" cap="flat" cmpd="sng" algn="ctr">
                       <a:solidFill>
-                        <a:srgbClr val="246B53"/>
+                        <a:srgbClr val="26C590"/>
                       </a:solidFill>
                       <a:prstDash val="solid"/>
                     </a:lnL>
                     <a:lnR w="9525" cap="flat" cmpd="sng" algn="ctr">
                       <a:solidFill>
-                        <a:srgbClr val="246B53"/>
+                        <a:srgbClr val="26C590"/>
                       </a:solidFill>
                       <a:prstDash val="solid"/>
                     </a:lnR>
                     <a:lnT w="9525" cap="flat" cmpd="sng" algn="ctr">
                       <a:solidFill>
-                        <a:srgbClr val="246B53"/>
+                        <a:srgbClr val="26C590"/>
                       </a:solidFill>
                       <a:prstDash val="solid"/>
                     </a:lnT>
                     <a:lnB w="9525" cap="flat" cmpd="sng" algn="ctr">
                       <a:solidFill>
-                        <a:srgbClr val="246B53"/>
+                        <a:srgbClr val="26C590"/>
                       </a:solidFill>
                       <a:prstDash val="solid"/>
                     </a:lnB>
                     <a:solidFill>
-                      <a:srgbClr val="246B53"/>
+                      <a:srgbClr val="26C590"/>
                     </a:solidFill>
                   </a:tcPr>
                 </a:tc>
@@ -4646,30 +4646,30 @@
                   <a:tcPr anchor="ctr" marL="73152" marR="73152">
                     <a:lnL w="9525" cap="flat" cmpd="sng" algn="ctr">
                       <a:solidFill>
-                        <a:srgbClr val="246B53"/>
+                        <a:srgbClr val="26C590"/>
                       </a:solidFill>
                       <a:prstDash val="solid"/>
                     </a:lnL>
                     <a:lnR w="9525" cap="flat" cmpd="sng" algn="ctr">
                       <a:solidFill>
-                        <a:srgbClr val="246B53"/>
+                        <a:srgbClr val="26C590"/>
                       </a:solidFill>
                       <a:prstDash val="solid"/>
                     </a:lnR>
                     <a:lnT w="9525" cap="flat" cmpd="sng" algn="ctr">
                       <a:solidFill>
-                        <a:srgbClr val="246B53"/>
+                        <a:srgbClr val="26C590"/>
                       </a:solidFill>
                       <a:prstDash val="solid"/>
                     </a:lnT>
                     <a:lnB w="9525" cap="flat" cmpd="sng" algn="ctr">
                       <a:solidFill>
-                        <a:srgbClr val="246B53"/>
+                        <a:srgbClr val="26C590"/>
                       </a:solidFill>
                       <a:prstDash val="solid"/>
                     </a:lnB>
                     <a:solidFill>
-                      <a:srgbClr val="246B53"/>
+                      <a:srgbClr val="26C590"/>
                     </a:solidFill>
                   </a:tcPr>
                 </a:tc>
@@ -4694,25 +4694,25 @@
                   <a:tcPr anchor="ctr" marL="73152" marR="73152">
                     <a:lnL w="9525" cap="flat" cmpd="sng" algn="ctr">
                       <a:solidFill>
-                        <a:srgbClr val="D0F1E6"/>
+                        <a:srgbClr val="D1FAEC"/>
                       </a:solidFill>
                       <a:prstDash val="solid"/>
                     </a:lnL>
                     <a:lnR w="9525" cap="flat" cmpd="sng" algn="ctr">
                       <a:solidFill>
-                        <a:srgbClr val="D0F1E6"/>
+                        <a:srgbClr val="D1FAEC"/>
                       </a:solidFill>
                       <a:prstDash val="solid"/>
                     </a:lnR>
                     <a:lnT w="9525" cap="flat" cmpd="sng" algn="ctr">
                       <a:solidFill>
-                        <a:srgbClr val="D0F1E6"/>
+                        <a:srgbClr val="D1FAEC"/>
                       </a:solidFill>
                       <a:prstDash val="solid"/>
                     </a:lnT>
                     <a:lnB w="9525" cap="flat" cmpd="sng" algn="ctr">
                       <a:solidFill>
-                        <a:srgbClr val="D0F1E6"/>
+                        <a:srgbClr val="D1FAEC"/>
                       </a:solidFill>
                       <a:prstDash val="solid"/>
                     </a:lnB>
@@ -4740,25 +4740,25 @@
                   <a:tcPr anchor="ctr" marL="73152" marR="73152">
                     <a:lnL w="9525" cap="flat" cmpd="sng" algn="ctr">
                       <a:solidFill>
-                        <a:srgbClr val="D0F1E6"/>
+                        <a:srgbClr val="D1FAEC"/>
                       </a:solidFill>
                       <a:prstDash val="solid"/>
                     </a:lnL>
                     <a:lnR w="9525" cap="flat" cmpd="sng" algn="ctr">
                       <a:solidFill>
-                        <a:srgbClr val="D0F1E6"/>
+                        <a:srgbClr val="D1FAEC"/>
                       </a:solidFill>
                       <a:prstDash val="solid"/>
                     </a:lnR>
                     <a:lnT w="9525" cap="flat" cmpd="sng" algn="ctr">
                       <a:solidFill>
-                        <a:srgbClr val="D0F1E6"/>
+                        <a:srgbClr val="D1FAEC"/>
                       </a:solidFill>
                       <a:prstDash val="solid"/>
                     </a:lnT>
                     <a:lnB w="9525" cap="flat" cmpd="sng" algn="ctr">
                       <a:solidFill>
-                        <a:srgbClr val="D0F1E6"/>
+                        <a:srgbClr val="D1FAEC"/>
                       </a:solidFill>
                       <a:prstDash val="solid"/>
                     </a:lnB>
@@ -4786,25 +4786,25 @@
                   <a:tcPr anchor="ctr" marL="73152" marR="73152">
                     <a:lnL w="9525" cap="flat" cmpd="sng" algn="ctr">
                       <a:solidFill>
-                        <a:srgbClr val="D0F1E6"/>
+                        <a:srgbClr val="D1FAEC"/>
                       </a:solidFill>
                       <a:prstDash val="solid"/>
                     </a:lnL>
                     <a:lnR w="9525" cap="flat" cmpd="sng" algn="ctr">
                       <a:solidFill>
-                        <a:srgbClr val="D0F1E6"/>
+                        <a:srgbClr val="D1FAEC"/>
                       </a:solidFill>
                       <a:prstDash val="solid"/>
                     </a:lnR>
                     <a:lnT w="9525" cap="flat" cmpd="sng" algn="ctr">
                       <a:solidFill>
-                        <a:srgbClr val="D0F1E6"/>
+                        <a:srgbClr val="D1FAEC"/>
                       </a:solidFill>
                       <a:prstDash val="solid"/>
                     </a:lnT>
                     <a:lnB w="9525" cap="flat" cmpd="sng" algn="ctr">
                       <a:solidFill>
-                        <a:srgbClr val="D0F1E6"/>
+                        <a:srgbClr val="D1FAEC"/>
                       </a:solidFill>
                       <a:prstDash val="solid"/>
                     </a:lnB>
@@ -4832,25 +4832,25 @@
                   <a:tcPr anchor="ctr" marL="73152" marR="73152">
                     <a:lnL w="9525" cap="flat" cmpd="sng" algn="ctr">
                       <a:solidFill>
-                        <a:srgbClr val="D0F1E6"/>
+                        <a:srgbClr val="D1FAEC"/>
                       </a:solidFill>
                       <a:prstDash val="solid"/>
                     </a:lnL>
                     <a:lnR w="9525" cap="flat" cmpd="sng" algn="ctr">
                       <a:solidFill>
-                        <a:srgbClr val="D0F1E6"/>
+                        <a:srgbClr val="D1FAEC"/>
                       </a:solidFill>
                       <a:prstDash val="solid"/>
                     </a:lnR>
                     <a:lnT w="9525" cap="flat" cmpd="sng" algn="ctr">
                       <a:solidFill>
-                        <a:srgbClr val="D0F1E6"/>
+                        <a:srgbClr val="D1FAEC"/>
                       </a:solidFill>
                       <a:prstDash val="solid"/>
                     </a:lnT>
                     <a:lnB w="9525" cap="flat" cmpd="sng" algn="ctr">
                       <a:solidFill>
-                        <a:srgbClr val="D0F1E6"/>
+                        <a:srgbClr val="D1FAEC"/>
                       </a:solidFill>
                       <a:prstDash val="solid"/>
                     </a:lnB>
@@ -4878,25 +4878,25 @@
                   <a:tcPr anchor="ctr" marL="73152" marR="73152">
                     <a:lnL w="9525" cap="flat" cmpd="sng" algn="ctr">
                       <a:solidFill>
-                        <a:srgbClr val="D0F1E6"/>
+                        <a:srgbClr val="D1FAEC"/>
                       </a:solidFill>
                       <a:prstDash val="solid"/>
                     </a:lnL>
                     <a:lnR w="9525" cap="flat" cmpd="sng" algn="ctr">
                       <a:solidFill>
-                        <a:srgbClr val="D0F1E6"/>
+                        <a:srgbClr val="D1FAEC"/>
                       </a:solidFill>
                       <a:prstDash val="solid"/>
                     </a:lnR>
                     <a:lnT w="9525" cap="flat" cmpd="sng" algn="ctr">
                       <a:solidFill>
-                        <a:srgbClr val="D0F1E6"/>
+                        <a:srgbClr val="D1FAEC"/>
                       </a:solidFill>
                       <a:prstDash val="solid"/>
                     </a:lnT>
                     <a:lnB w="9525" cap="flat" cmpd="sng" algn="ctr">
                       <a:solidFill>
-                        <a:srgbClr val="D0F1E6"/>
+                        <a:srgbClr val="D1FAEC"/>
                       </a:solidFill>
                       <a:prstDash val="solid"/>
                     </a:lnB>
@@ -4926,30 +4926,30 @@
                   <a:tcPr anchor="ctr" marL="73152" marR="73152">
                     <a:lnL w="9525" cap="flat" cmpd="sng" algn="ctr">
                       <a:solidFill>
-                        <a:srgbClr val="D0F1E6"/>
+                        <a:srgbClr val="D1FAEC"/>
                       </a:solidFill>
                       <a:prstDash val="solid"/>
                     </a:lnL>
                     <a:lnR w="9525" cap="flat" cmpd="sng" algn="ctr">
                       <a:solidFill>
-                        <a:srgbClr val="D0F1E6"/>
+                        <a:srgbClr val="D1FAEC"/>
                       </a:solidFill>
                       <a:prstDash val="solid"/>
                     </a:lnR>
                     <a:lnT w="9525" cap="flat" cmpd="sng" algn="ctr">
                       <a:solidFill>
-                        <a:srgbClr val="D0F1E6"/>
+                        <a:srgbClr val="D1FAEC"/>
                       </a:solidFill>
                       <a:prstDash val="solid"/>
                     </a:lnT>
                     <a:lnB w="9525" cap="flat" cmpd="sng" algn="ctr">
                       <a:solidFill>
-                        <a:srgbClr val="D0F1E6"/>
+                        <a:srgbClr val="D1FAEC"/>
                       </a:solidFill>
                       <a:prstDash val="solid"/>
                     </a:lnB>
                     <a:solidFill>
-                      <a:srgbClr val="F0FAF6"/>
+                      <a:srgbClr val="EEFCF7"/>
                     </a:solidFill>
                   </a:tcPr>
                 </a:tc>
@@ -4972,30 +4972,30 @@
                   <a:tcPr anchor="ctr" marL="73152" marR="73152">
                     <a:lnL w="9525" cap="flat" cmpd="sng" algn="ctr">
                       <a:solidFill>
-                        <a:srgbClr val="D0F1E6"/>
+                        <a:srgbClr val="D1FAEC"/>
                       </a:solidFill>
                       <a:prstDash val="solid"/>
                     </a:lnL>
                     <a:lnR w="9525" cap="flat" cmpd="sng" algn="ctr">
                       <a:solidFill>
-                        <a:srgbClr val="D0F1E6"/>
+                        <a:srgbClr val="D1FAEC"/>
                       </a:solidFill>
                       <a:prstDash val="solid"/>
                     </a:lnR>
                     <a:lnT w="9525" cap="flat" cmpd="sng" algn="ctr">
                       <a:solidFill>
-                        <a:srgbClr val="D0F1E6"/>
+                        <a:srgbClr val="D1FAEC"/>
                       </a:solidFill>
                       <a:prstDash val="solid"/>
                     </a:lnT>
                     <a:lnB w="9525" cap="flat" cmpd="sng" algn="ctr">
                       <a:solidFill>
-                        <a:srgbClr val="D0F1E6"/>
+                        <a:srgbClr val="D1FAEC"/>
                       </a:solidFill>
                       <a:prstDash val="solid"/>
                     </a:lnB>
                     <a:solidFill>
-                      <a:srgbClr val="F0FAF6"/>
+                      <a:srgbClr val="EEFCF7"/>
                     </a:solidFill>
                   </a:tcPr>
                 </a:tc>
@@ -5018,30 +5018,30 @@
                   <a:tcPr anchor="ctr" marL="73152" marR="73152">
                     <a:lnL w="9525" cap="flat" cmpd="sng" algn="ctr">
                       <a:solidFill>
-                        <a:srgbClr val="D0F1E6"/>
+                        <a:srgbClr val="D1FAEC"/>
                       </a:solidFill>
                       <a:prstDash val="solid"/>
                     </a:lnL>
                     <a:lnR w="9525" cap="flat" cmpd="sng" algn="ctr">
                       <a:solidFill>
-                        <a:srgbClr val="D0F1E6"/>
+                        <a:srgbClr val="D1FAEC"/>
                       </a:solidFill>
                       <a:prstDash val="solid"/>
                     </a:lnR>
                     <a:lnT w="9525" cap="flat" cmpd="sng" algn="ctr">
                       <a:solidFill>
-                        <a:srgbClr val="D0F1E6"/>
+                        <a:srgbClr val="D1FAEC"/>
                       </a:solidFill>
                       <a:prstDash val="solid"/>
                     </a:lnT>
                     <a:lnB w="9525" cap="flat" cmpd="sng" algn="ctr">
                       <a:solidFill>
-                        <a:srgbClr val="D0F1E6"/>
+                        <a:srgbClr val="D1FAEC"/>
                       </a:solidFill>
                       <a:prstDash val="solid"/>
                     </a:lnB>
                     <a:solidFill>
-                      <a:srgbClr val="F0FAF6"/>
+                      <a:srgbClr val="EEFCF7"/>
                     </a:solidFill>
                   </a:tcPr>
                 </a:tc>
@@ -5064,30 +5064,30 @@
                   <a:tcPr anchor="ctr" marL="73152" marR="73152">
                     <a:lnL w="9525" cap="flat" cmpd="sng" algn="ctr">
                       <a:solidFill>
-                        <a:srgbClr val="D0F1E6"/>
+                        <a:srgbClr val="D1FAEC"/>
                       </a:solidFill>
                       <a:prstDash val="solid"/>
                     </a:lnL>
                     <a:lnR w="9525" cap="flat" cmpd="sng" algn="ctr">
                       <a:solidFill>
-                        <a:srgbClr val="D0F1E6"/>
+                        <a:srgbClr val="D1FAEC"/>
                       </a:solidFill>
                       <a:prstDash val="solid"/>
                     </a:lnR>
                     <a:lnT w="9525" cap="flat" cmpd="sng" algn="ctr">
                       <a:solidFill>
-                        <a:srgbClr val="D0F1E6"/>
+                        <a:srgbClr val="D1FAEC"/>
                       </a:solidFill>
                       <a:prstDash val="solid"/>
                     </a:lnT>
                     <a:lnB w="9525" cap="flat" cmpd="sng" algn="ctr">
                       <a:solidFill>
-                        <a:srgbClr val="D0F1E6"/>
+                        <a:srgbClr val="D1FAEC"/>
                       </a:solidFill>
                       <a:prstDash val="solid"/>
                     </a:lnB>
                     <a:solidFill>
-                      <a:srgbClr val="F0FAF6"/>
+                      <a:srgbClr val="EEFCF7"/>
                     </a:solidFill>
                   </a:tcPr>
                 </a:tc>
@@ -5110,30 +5110,30 @@
                   <a:tcPr anchor="ctr" marL="73152" marR="73152">
                     <a:lnL w="9525" cap="flat" cmpd="sng" algn="ctr">
                       <a:solidFill>
-                        <a:srgbClr val="D0F1E6"/>
+                        <a:srgbClr val="D1FAEC"/>
                       </a:solidFill>
                       <a:prstDash val="solid"/>
                     </a:lnL>
                     <a:lnR w="9525" cap="flat" cmpd="sng" algn="ctr">
                       <a:solidFill>
-                        <a:srgbClr val="D0F1E6"/>
+                        <a:srgbClr val="D1FAEC"/>
                       </a:solidFill>
                       <a:prstDash val="solid"/>
                     </a:lnR>
                     <a:lnT w="9525" cap="flat" cmpd="sng" algn="ctr">
                       <a:solidFill>
-                        <a:srgbClr val="D0F1E6"/>
+                        <a:srgbClr val="D1FAEC"/>
                       </a:solidFill>
                       <a:prstDash val="solid"/>
                     </a:lnT>
                     <a:lnB w="9525" cap="flat" cmpd="sng" algn="ctr">
                       <a:solidFill>
-                        <a:srgbClr val="D0F1E6"/>
+                        <a:srgbClr val="D1FAEC"/>
                       </a:solidFill>
                       <a:prstDash val="solid"/>
                     </a:lnB>
                     <a:solidFill>
-                      <a:srgbClr val="F0FAF6"/>
+                      <a:srgbClr val="EEFCF7"/>
                     </a:solidFill>
                   </a:tcPr>
                 </a:tc>
@@ -5158,25 +5158,25 @@
                   <a:tcPr anchor="ctr" marL="73152" marR="73152">
                     <a:lnL w="9525" cap="flat" cmpd="sng" algn="ctr">
                       <a:solidFill>
-                        <a:srgbClr val="D0F1E6"/>
+                        <a:srgbClr val="D1FAEC"/>
                       </a:solidFill>
                       <a:prstDash val="solid"/>
                     </a:lnL>
                     <a:lnR w="9525" cap="flat" cmpd="sng" algn="ctr">
                       <a:solidFill>
-                        <a:srgbClr val="D0F1E6"/>
+                        <a:srgbClr val="D1FAEC"/>
                       </a:solidFill>
                       <a:prstDash val="solid"/>
                     </a:lnR>
                     <a:lnT w="9525" cap="flat" cmpd="sng" algn="ctr">
                       <a:solidFill>
-                        <a:srgbClr val="D0F1E6"/>
+                        <a:srgbClr val="D1FAEC"/>
                       </a:solidFill>
                       <a:prstDash val="solid"/>
                     </a:lnT>
                     <a:lnB w="9525" cap="flat" cmpd="sng" algn="ctr">
                       <a:solidFill>
-                        <a:srgbClr val="D0F1E6"/>
+                        <a:srgbClr val="D1FAEC"/>
                       </a:solidFill>
                       <a:prstDash val="solid"/>
                     </a:lnB>
@@ -5204,25 +5204,25 @@
                   <a:tcPr anchor="ctr" marL="73152" marR="73152">
                     <a:lnL w="9525" cap="flat" cmpd="sng" algn="ctr">
                       <a:solidFill>
-                        <a:srgbClr val="D0F1E6"/>
+                        <a:srgbClr val="D1FAEC"/>
                       </a:solidFill>
                       <a:prstDash val="solid"/>
                     </a:lnL>
                     <a:lnR w="9525" cap="flat" cmpd="sng" algn="ctr">
                       <a:solidFill>
-                        <a:srgbClr val="D0F1E6"/>
+                        <a:srgbClr val="D1FAEC"/>
                       </a:solidFill>
                       <a:prstDash val="solid"/>
                     </a:lnR>
                     <a:lnT w="9525" cap="flat" cmpd="sng" algn="ctr">
                       <a:solidFill>
-                        <a:srgbClr val="D0F1E6"/>
+                        <a:srgbClr val="D1FAEC"/>
                       </a:solidFill>
                       <a:prstDash val="solid"/>
                     </a:lnT>
                     <a:lnB w="9525" cap="flat" cmpd="sng" algn="ctr">
                       <a:solidFill>
-                        <a:srgbClr val="D0F1E6"/>
+                        <a:srgbClr val="D1FAEC"/>
                       </a:solidFill>
                       <a:prstDash val="solid"/>
                     </a:lnB>
@@ -5250,25 +5250,25 @@
                   <a:tcPr anchor="ctr" marL="73152" marR="73152">
                     <a:lnL w="9525" cap="flat" cmpd="sng" algn="ctr">
                       <a:solidFill>
-                        <a:srgbClr val="D0F1E6"/>
+                        <a:srgbClr val="D1FAEC"/>
                       </a:solidFill>
                       <a:prstDash val="solid"/>
                     </a:lnL>
                     <a:lnR w="9525" cap="flat" cmpd="sng" algn="ctr">
                       <a:solidFill>
-                        <a:srgbClr val="D0F1E6"/>
+                        <a:srgbClr val="D1FAEC"/>
                       </a:solidFill>
                       <a:prstDash val="solid"/>
                     </a:lnR>
                     <a:lnT w="9525" cap="flat" cmpd="sng" algn="ctr">
                       <a:solidFill>
-                        <a:srgbClr val="D0F1E6"/>
+                        <a:srgbClr val="D1FAEC"/>
                       </a:solidFill>
                       <a:prstDash val="solid"/>
                     </a:lnT>
                     <a:lnB w="9525" cap="flat" cmpd="sng" algn="ctr">
                       <a:solidFill>
-                        <a:srgbClr val="D0F1E6"/>
+                        <a:srgbClr val="D1FAEC"/>
                       </a:solidFill>
                       <a:prstDash val="solid"/>
                     </a:lnB>
@@ -5296,25 +5296,25 @@
                   <a:tcPr anchor="ctr" marL="73152" marR="73152">
                     <a:lnL w="9525" cap="flat" cmpd="sng" algn="ctr">
                       <a:solidFill>
-                        <a:srgbClr val="D0F1E6"/>
+                        <a:srgbClr val="D1FAEC"/>
                       </a:solidFill>
                       <a:prstDash val="solid"/>
                     </a:lnL>
                     <a:lnR w="9525" cap="flat" cmpd="sng" algn="ctr">
                       <a:solidFill>
-                        <a:srgbClr val="D0F1E6"/>
+                        <a:srgbClr val="D1FAEC"/>
                       </a:solidFill>
                       <a:prstDash val="solid"/>
                     </a:lnR>
                     <a:lnT w="9525" cap="flat" cmpd="sng" algn="ctr">
                       <a:solidFill>
-                        <a:srgbClr val="D0F1E6"/>
+                        <a:srgbClr val="D1FAEC"/>
                       </a:solidFill>
                       <a:prstDash val="solid"/>
                     </a:lnT>
                     <a:lnB w="9525" cap="flat" cmpd="sng" algn="ctr">
                       <a:solidFill>
-                        <a:srgbClr val="D0F1E6"/>
+                        <a:srgbClr val="D1FAEC"/>
                       </a:solidFill>
                       <a:prstDash val="solid"/>
                     </a:lnB>
@@ -5342,25 +5342,25 @@
                   <a:tcPr anchor="ctr" marL="73152" marR="73152">
                     <a:lnL w="9525" cap="flat" cmpd="sng" algn="ctr">
                       <a:solidFill>
-                        <a:srgbClr val="D0F1E6"/>
+                        <a:srgbClr val="D1FAEC"/>
                       </a:solidFill>
                       <a:prstDash val="solid"/>
                     </a:lnL>
                     <a:lnR w="9525" cap="flat" cmpd="sng" algn="ctr">
                       <a:solidFill>
-                        <a:srgbClr val="D0F1E6"/>
+                        <a:srgbClr val="D1FAEC"/>
                       </a:solidFill>
                       <a:prstDash val="solid"/>
                     </a:lnR>
                     <a:lnT w="9525" cap="flat" cmpd="sng" algn="ctr">
                       <a:solidFill>
-                        <a:srgbClr val="D0F1E6"/>
+                        <a:srgbClr val="D1FAEC"/>
                       </a:solidFill>
                       <a:prstDash val="solid"/>
                     </a:lnT>
                     <a:lnB w="9525" cap="flat" cmpd="sng" algn="ctr">
                       <a:solidFill>
-                        <a:srgbClr val="D0F1E6"/>
+                        <a:srgbClr val="D1FAEC"/>
                       </a:solidFill>
                       <a:prstDash val="solid"/>
                     </a:lnB>
@@ -5390,30 +5390,30 @@
                   <a:tcPr anchor="ctr" marL="73152" marR="73152">
                     <a:lnL w="9525" cap="flat" cmpd="sng" algn="ctr">
                       <a:solidFill>
-                        <a:srgbClr val="D0F1E6"/>
+                        <a:srgbClr val="D1FAEC"/>
                       </a:solidFill>
                       <a:prstDash val="solid"/>
                     </a:lnL>
                     <a:lnR w="9525" cap="flat" cmpd="sng" algn="ctr">
                       <a:solidFill>
-                        <a:srgbClr val="D0F1E6"/>
+                        <a:srgbClr val="D1FAEC"/>
                       </a:solidFill>
                       <a:prstDash val="solid"/>
                     </a:lnR>
                     <a:lnT w="9525" cap="flat" cmpd="sng" algn="ctr">
                       <a:solidFill>
-                        <a:srgbClr val="D0F1E6"/>
+                        <a:srgbClr val="D1FAEC"/>
                       </a:solidFill>
                       <a:prstDash val="solid"/>
                     </a:lnT>
                     <a:lnB w="9525" cap="flat" cmpd="sng" algn="ctr">
                       <a:solidFill>
-                        <a:srgbClr val="D0F1E6"/>
+                        <a:srgbClr val="D1FAEC"/>
                       </a:solidFill>
                       <a:prstDash val="solid"/>
                     </a:lnB>
                     <a:solidFill>
-                      <a:srgbClr val="F0FAF6"/>
+                      <a:srgbClr val="EEFCF7"/>
                     </a:solidFill>
                   </a:tcPr>
                 </a:tc>
@@ -5436,30 +5436,30 @@
                   <a:tcPr anchor="ctr" marL="73152" marR="73152">
                     <a:lnL w="9525" cap="flat" cmpd="sng" algn="ctr">
                       <a:solidFill>
-                        <a:srgbClr val="D0F1E6"/>
+                        <a:srgbClr val="D1FAEC"/>
                       </a:solidFill>
                       <a:prstDash val="solid"/>
                     </a:lnL>
                     <a:lnR w="9525" cap="flat" cmpd="sng" algn="ctr">
                       <a:solidFill>
-                        <a:srgbClr val="D0F1E6"/>
+                        <a:srgbClr val="D1FAEC"/>
                       </a:solidFill>
                       <a:prstDash val="solid"/>
                     </a:lnR>
                     <a:lnT w="9525" cap="flat" cmpd="sng" algn="ctr">
                       <a:solidFill>
-                        <a:srgbClr val="D0F1E6"/>
+                        <a:srgbClr val="D1FAEC"/>
                       </a:solidFill>
                       <a:prstDash val="solid"/>
                     </a:lnT>
                     <a:lnB w="9525" cap="flat" cmpd="sng" algn="ctr">
                       <a:solidFill>
-                        <a:srgbClr val="D0F1E6"/>
+                        <a:srgbClr val="D1FAEC"/>
                       </a:solidFill>
                       <a:prstDash val="solid"/>
                     </a:lnB>
                     <a:solidFill>
-                      <a:srgbClr val="F0FAF6"/>
+                      <a:srgbClr val="EEFCF7"/>
                     </a:solidFill>
                   </a:tcPr>
                 </a:tc>
@@ -5482,30 +5482,30 @@
                   <a:tcPr anchor="ctr" marL="73152" marR="73152">
                     <a:lnL w="9525" cap="flat" cmpd="sng" algn="ctr">
                       <a:solidFill>
-                        <a:srgbClr val="D0F1E6"/>
+                        <a:srgbClr val="D1FAEC"/>
                       </a:solidFill>
                       <a:prstDash val="solid"/>
                     </a:lnL>
                     <a:lnR w="9525" cap="flat" cmpd="sng" algn="ctr">
                       <a:solidFill>
-                        <a:srgbClr val="D0F1E6"/>
+                        <a:srgbClr val="D1FAEC"/>
                       </a:solidFill>
                       <a:prstDash val="solid"/>
                     </a:lnR>
                     <a:lnT w="9525" cap="flat" cmpd="sng" algn="ctr">
                       <a:solidFill>
-                        <a:srgbClr val="D0F1E6"/>
+                        <a:srgbClr val="D1FAEC"/>
                       </a:solidFill>
                       <a:prstDash val="solid"/>
                     </a:lnT>
                     <a:lnB w="9525" cap="flat" cmpd="sng" algn="ctr">
                       <a:solidFill>
-                        <a:srgbClr val="D0F1E6"/>
+                        <a:srgbClr val="D1FAEC"/>
                       </a:solidFill>
                       <a:prstDash val="solid"/>
                     </a:lnB>
                     <a:solidFill>
-                      <a:srgbClr val="F0FAF6"/>
+                      <a:srgbClr val="EEFCF7"/>
                     </a:solidFill>
                   </a:tcPr>
                 </a:tc>
@@ -5528,30 +5528,30 @@
                   <a:tcPr anchor="ctr" marL="73152" marR="73152">
                     <a:lnL w="9525" cap="flat" cmpd="sng" algn="ctr">
                       <a:solidFill>
-                        <a:srgbClr val="D0F1E6"/>
+                        <a:srgbClr val="D1FAEC"/>
                       </a:solidFill>
                       <a:prstDash val="solid"/>
                     </a:lnL>
                     <a:lnR w="9525" cap="flat" cmpd="sng" algn="ctr">
                       <a:solidFill>
-                        <a:srgbClr val="D0F1E6"/>
+                        <a:srgbClr val="D1FAEC"/>
                       </a:solidFill>
                       <a:prstDash val="solid"/>
                     </a:lnR>
                     <a:lnT w="9525" cap="flat" cmpd="sng" algn="ctr">
                       <a:solidFill>
-                        <a:srgbClr val="D0F1E6"/>
+                        <a:srgbClr val="D1FAEC"/>
                       </a:solidFill>
                       <a:prstDash val="solid"/>
                     </a:lnT>
                     <a:lnB w="9525" cap="flat" cmpd="sng" algn="ctr">
                       <a:solidFill>
-                        <a:srgbClr val="D0F1E6"/>
+                        <a:srgbClr val="D1FAEC"/>
                       </a:solidFill>
                       <a:prstDash val="solid"/>
                     </a:lnB>
                     <a:solidFill>
-                      <a:srgbClr val="F0FAF6"/>
+                      <a:srgbClr val="EEFCF7"/>
                     </a:solidFill>
                   </a:tcPr>
                 </a:tc>
@@ -5574,30 +5574,30 @@
                   <a:tcPr anchor="ctr" marL="73152" marR="73152">
                     <a:lnL w="9525" cap="flat" cmpd="sng" algn="ctr">
                       <a:solidFill>
-                        <a:srgbClr val="D0F1E6"/>
+                        <a:srgbClr val="D1FAEC"/>
                       </a:solidFill>
                       <a:prstDash val="solid"/>
                     </a:lnL>
                     <a:lnR w="9525" cap="flat" cmpd="sng" algn="ctr">
                       <a:solidFill>
-                        <a:srgbClr val="D0F1E6"/>
+                        <a:srgbClr val="D1FAEC"/>
                       </a:solidFill>
                       <a:prstDash val="solid"/>
                     </a:lnR>
                     <a:lnT w="9525" cap="flat" cmpd="sng" algn="ctr">
                       <a:solidFill>
-                        <a:srgbClr val="D0F1E6"/>
+                        <a:srgbClr val="D1FAEC"/>
                       </a:solidFill>
                       <a:prstDash val="solid"/>
                     </a:lnT>
                     <a:lnB w="9525" cap="flat" cmpd="sng" algn="ctr">
                       <a:solidFill>
-                        <a:srgbClr val="D0F1E6"/>
+                        <a:srgbClr val="D1FAEC"/>
                       </a:solidFill>
                       <a:prstDash val="solid"/>
                     </a:lnB>
                     <a:solidFill>
-                      <a:srgbClr val="F0FAF6"/>
+                      <a:srgbClr val="EEFCF7"/>
                     </a:solidFill>
                   </a:tcPr>
                 </a:tc>
@@ -5622,25 +5622,25 @@
                   <a:tcPr anchor="ctr" marL="73152" marR="73152">
                     <a:lnL w="9525" cap="flat" cmpd="sng" algn="ctr">
                       <a:solidFill>
-                        <a:srgbClr val="D0F1E6"/>
+                        <a:srgbClr val="D1FAEC"/>
                       </a:solidFill>
                       <a:prstDash val="solid"/>
                     </a:lnL>
                     <a:lnR w="9525" cap="flat" cmpd="sng" algn="ctr">
                       <a:solidFill>
-                        <a:srgbClr val="D0F1E6"/>
+                        <a:srgbClr val="D1FAEC"/>
                       </a:solidFill>
                       <a:prstDash val="solid"/>
                     </a:lnR>
                     <a:lnT w="9525" cap="flat" cmpd="sng" algn="ctr">
                       <a:solidFill>
-                        <a:srgbClr val="D0F1E6"/>
+                        <a:srgbClr val="D1FAEC"/>
                       </a:solidFill>
                       <a:prstDash val="solid"/>
                     </a:lnT>
                     <a:lnB w="9525" cap="flat" cmpd="sng" algn="ctr">
                       <a:solidFill>
-                        <a:srgbClr val="D0F1E6"/>
+                        <a:srgbClr val="D1FAEC"/>
                       </a:solidFill>
                       <a:prstDash val="solid"/>
                     </a:lnB>
@@ -5668,25 +5668,25 @@
                   <a:tcPr anchor="ctr" marL="73152" marR="73152">
                     <a:lnL w="9525" cap="flat" cmpd="sng" algn="ctr">
                       <a:solidFill>
-                        <a:srgbClr val="D0F1E6"/>
+                        <a:srgbClr val="D1FAEC"/>
                       </a:solidFill>
                       <a:prstDash val="solid"/>
                     </a:lnL>
                     <a:lnR w="9525" cap="flat" cmpd="sng" algn="ctr">
                       <a:solidFill>
-                        <a:srgbClr val="D0F1E6"/>
+                        <a:srgbClr val="D1FAEC"/>
                       </a:solidFill>
                       <a:prstDash val="solid"/>
                     </a:lnR>
                     <a:lnT w="9525" cap="flat" cmpd="sng" algn="ctr">
                       <a:solidFill>
-                        <a:srgbClr val="D0F1E6"/>
+                        <a:srgbClr val="D1FAEC"/>
                       </a:solidFill>
                       <a:prstDash val="solid"/>
                     </a:lnT>
                     <a:lnB w="9525" cap="flat" cmpd="sng" algn="ctr">
                       <a:solidFill>
-                        <a:srgbClr val="D0F1E6"/>
+                        <a:srgbClr val="D1FAEC"/>
                       </a:solidFill>
                       <a:prstDash val="solid"/>
                     </a:lnB>
@@ -5714,25 +5714,25 @@
                   <a:tcPr anchor="ctr" marL="73152" marR="73152">
                     <a:lnL w="9525" cap="flat" cmpd="sng" algn="ctr">
                       <a:solidFill>
-                        <a:srgbClr val="D0F1E6"/>
+                        <a:srgbClr val="D1FAEC"/>
                       </a:solidFill>
                       <a:prstDash val="solid"/>
                     </a:lnL>
                     <a:lnR w="9525" cap="flat" cmpd="sng" algn="ctr">
                       <a:solidFill>
-                        <a:srgbClr val="D0F1E6"/>
+                        <a:srgbClr val="D1FAEC"/>
                       </a:solidFill>
                       <a:prstDash val="solid"/>
                     </a:lnR>
                     <a:lnT w="9525" cap="flat" cmpd="sng" algn="ctr">
                       <a:solidFill>
-                        <a:srgbClr val="D0F1E6"/>
+                        <a:srgbClr val="D1FAEC"/>
                       </a:solidFill>
                       <a:prstDash val="solid"/>
                     </a:lnT>
                     <a:lnB w="9525" cap="flat" cmpd="sng" algn="ctr">
                       <a:solidFill>
-                        <a:srgbClr val="D0F1E6"/>
+                        <a:srgbClr val="D1FAEC"/>
                       </a:solidFill>
                       <a:prstDash val="solid"/>
                     </a:lnB>
@@ -5760,25 +5760,25 @@
                   <a:tcPr anchor="ctr" marL="73152" marR="73152">
                     <a:lnL w="9525" cap="flat" cmpd="sng" algn="ctr">
                       <a:solidFill>
-                        <a:srgbClr val="D0F1E6"/>
+                        <a:srgbClr val="D1FAEC"/>
                       </a:solidFill>
                       <a:prstDash val="solid"/>
                     </a:lnL>
                     <a:lnR w="9525" cap="flat" cmpd="sng" algn="ctr">
                       <a:solidFill>
-                        <a:srgbClr val="D0F1E6"/>
+                        <a:srgbClr val="D1FAEC"/>
                       </a:solidFill>
                       <a:prstDash val="solid"/>
                     </a:lnR>
                     <a:lnT w="9525" cap="flat" cmpd="sng" algn="ctr">
                       <a:solidFill>
-                        <a:srgbClr val="D0F1E6"/>
+                        <a:srgbClr val="D1FAEC"/>
                       </a:solidFill>
                       <a:prstDash val="solid"/>
                     </a:lnT>
                     <a:lnB w="9525" cap="flat" cmpd="sng" algn="ctr">
                       <a:solidFill>
-                        <a:srgbClr val="D0F1E6"/>
+                        <a:srgbClr val="D1FAEC"/>
                       </a:solidFill>
                       <a:prstDash val="solid"/>
                     </a:lnB>
@@ -5806,25 +5806,25 @@
                   <a:tcPr anchor="ctr" marL="73152" marR="73152">
                     <a:lnL w="9525" cap="flat" cmpd="sng" algn="ctr">
                       <a:solidFill>
-                        <a:srgbClr val="D0F1E6"/>
+                        <a:srgbClr val="D1FAEC"/>
                       </a:solidFill>
                       <a:prstDash val="solid"/>
                     </a:lnL>
                     <a:lnR w="9525" cap="flat" cmpd="sng" algn="ctr">
                       <a:solidFill>
-                        <a:srgbClr val="D0F1E6"/>
+                        <a:srgbClr val="D1FAEC"/>
                       </a:solidFill>
                       <a:prstDash val="solid"/>
                     </a:lnR>
                     <a:lnT w="9525" cap="flat" cmpd="sng" algn="ctr">
                       <a:solidFill>
-                        <a:srgbClr val="D0F1E6"/>
+                        <a:srgbClr val="D1FAEC"/>
                       </a:solidFill>
                       <a:prstDash val="solid"/>
                     </a:lnT>
                     <a:lnB w="9525" cap="flat" cmpd="sng" algn="ctr">
                       <a:solidFill>
-                        <a:srgbClr val="D0F1E6"/>
+                        <a:srgbClr val="D1FAEC"/>
                       </a:solidFill>
                       <a:prstDash val="solid"/>
                     </a:lnB>
@@ -5854,30 +5854,30 @@
                   <a:tcPr anchor="ctr" marL="73152" marR="73152">
                     <a:lnL w="9525" cap="flat" cmpd="sng" algn="ctr">
                       <a:solidFill>
-                        <a:srgbClr val="D0F1E6"/>
+                        <a:srgbClr val="D1FAEC"/>
                       </a:solidFill>
                       <a:prstDash val="solid"/>
                     </a:lnL>
                     <a:lnR w="9525" cap="flat" cmpd="sng" algn="ctr">
                       <a:solidFill>
-                        <a:srgbClr val="D0F1E6"/>
+                        <a:srgbClr val="D1FAEC"/>
                       </a:solidFill>
                       <a:prstDash val="solid"/>
                     </a:lnR>
                     <a:lnT w="9525" cap="flat" cmpd="sng" algn="ctr">
                       <a:solidFill>
-                        <a:srgbClr val="D0F1E6"/>
+                        <a:srgbClr val="D1FAEC"/>
                       </a:solidFill>
                       <a:prstDash val="solid"/>
                     </a:lnT>
                     <a:lnB w="9525" cap="flat" cmpd="sng" algn="ctr">
                       <a:solidFill>
-                        <a:srgbClr val="D0F1E6"/>
+                        <a:srgbClr val="D1FAEC"/>
                       </a:solidFill>
                       <a:prstDash val="solid"/>
                     </a:lnB>
                     <a:solidFill>
-                      <a:srgbClr val="F0FAF6"/>
+                      <a:srgbClr val="EEFCF7"/>
                     </a:solidFill>
                   </a:tcPr>
                 </a:tc>
@@ -5900,30 +5900,30 @@
                   <a:tcPr anchor="ctr" marL="73152" marR="73152">
                     <a:lnL w="9525" cap="flat" cmpd="sng" algn="ctr">
                       <a:solidFill>
-                        <a:srgbClr val="D0F1E6"/>
+                        <a:srgbClr val="D1FAEC"/>
                       </a:solidFill>
                       <a:prstDash val="solid"/>
                     </a:lnL>
                     <a:lnR w="9525" cap="flat" cmpd="sng" algn="ctr">
                       <a:solidFill>
-                        <a:srgbClr val="D0F1E6"/>
+                        <a:srgbClr val="D1FAEC"/>
                       </a:solidFill>
                       <a:prstDash val="solid"/>
                     </a:lnR>
                     <a:lnT w="9525" cap="flat" cmpd="sng" algn="ctr">
                       <a:solidFill>
-                        <a:srgbClr val="D0F1E6"/>
+                        <a:srgbClr val="D1FAEC"/>
                       </a:solidFill>
                       <a:prstDash val="solid"/>
                     </a:lnT>
                     <a:lnB w="9525" cap="flat" cmpd="sng" algn="ctr">
                       <a:solidFill>
-                        <a:srgbClr val="D0F1E6"/>
+                        <a:srgbClr val="D1FAEC"/>
                       </a:solidFill>
                       <a:prstDash val="solid"/>
                     </a:lnB>
                     <a:solidFill>
-                      <a:srgbClr val="F0FAF6"/>
+                      <a:srgbClr val="EEFCF7"/>
                     </a:solidFill>
                   </a:tcPr>
                 </a:tc>
@@ -5946,30 +5946,30 @@
                   <a:tcPr anchor="ctr" marL="73152" marR="73152">
                     <a:lnL w="9525" cap="flat" cmpd="sng" algn="ctr">
                       <a:solidFill>
-                        <a:srgbClr val="D0F1E6"/>
+                        <a:srgbClr val="D1FAEC"/>
                       </a:solidFill>
                       <a:prstDash val="solid"/>
                     </a:lnL>
                     <a:lnR w="9525" cap="flat" cmpd="sng" algn="ctr">
                       <a:solidFill>
-                        <a:srgbClr val="D0F1E6"/>
+                        <a:srgbClr val="D1FAEC"/>
                       </a:solidFill>
                       <a:prstDash val="solid"/>
                     </a:lnR>
                     <a:lnT w="9525" cap="flat" cmpd="sng" algn="ctr">
                       <a:solidFill>
-                        <a:srgbClr val="D0F1E6"/>
+                        <a:srgbClr val="D1FAEC"/>
                       </a:solidFill>
                       <a:prstDash val="solid"/>
                     </a:lnT>
                     <a:lnB w="9525" cap="flat" cmpd="sng" algn="ctr">
                       <a:solidFill>
-                        <a:srgbClr val="D0F1E6"/>
+                        <a:srgbClr val="D1FAEC"/>
                       </a:solidFill>
                       <a:prstDash val="solid"/>
                     </a:lnB>
                     <a:solidFill>
-                      <a:srgbClr val="F0FAF6"/>
+                      <a:srgbClr val="EEFCF7"/>
                     </a:solidFill>
                   </a:tcPr>
                 </a:tc>
@@ -5992,30 +5992,30 @@
                   <a:tcPr anchor="ctr" marL="73152" marR="73152">
                     <a:lnL w="9525" cap="flat" cmpd="sng" algn="ctr">
                       <a:solidFill>
-                        <a:srgbClr val="D0F1E6"/>
+                        <a:srgbClr val="D1FAEC"/>
                       </a:solidFill>
                       <a:prstDash val="solid"/>
                     </a:lnL>
                     <a:lnR w="9525" cap="flat" cmpd="sng" algn="ctr">
                       <a:solidFill>
-                        <a:srgbClr val="D0F1E6"/>
+                        <a:srgbClr val="D1FAEC"/>
                       </a:solidFill>
                       <a:prstDash val="solid"/>
                     </a:lnR>
                     <a:lnT w="9525" cap="flat" cmpd="sng" algn="ctr">
                       <a:solidFill>
-                        <a:srgbClr val="D0F1E6"/>
+                        <a:srgbClr val="D1FAEC"/>
                       </a:solidFill>
                       <a:prstDash val="solid"/>
                     </a:lnT>
                     <a:lnB w="9525" cap="flat" cmpd="sng" algn="ctr">
                       <a:solidFill>
-                        <a:srgbClr val="D0F1E6"/>
+                        <a:srgbClr val="D1FAEC"/>
                       </a:solidFill>
                       <a:prstDash val="solid"/>
                     </a:lnB>
                     <a:solidFill>
-                      <a:srgbClr val="F0FAF6"/>
+                      <a:srgbClr val="EEFCF7"/>
                     </a:solidFill>
                   </a:tcPr>
                 </a:tc>
@@ -6038,30 +6038,30 @@
                   <a:tcPr anchor="ctr" marL="73152" marR="73152">
                     <a:lnL w="9525" cap="flat" cmpd="sng" algn="ctr">
                       <a:solidFill>
-                        <a:srgbClr val="D0F1E6"/>
+                        <a:srgbClr val="D1FAEC"/>
                       </a:solidFill>
                       <a:prstDash val="solid"/>
                     </a:lnL>
                     <a:lnR w="9525" cap="flat" cmpd="sng" algn="ctr">
                       <a:solidFill>
-                        <a:srgbClr val="D0F1E6"/>
+                        <a:srgbClr val="D1FAEC"/>
                       </a:solidFill>
                       <a:prstDash val="solid"/>
                     </a:lnR>
                     <a:lnT w="9525" cap="flat" cmpd="sng" algn="ctr">
                       <a:solidFill>
-                        <a:srgbClr val="D0F1E6"/>
+                        <a:srgbClr val="D1FAEC"/>
                       </a:solidFill>
                       <a:prstDash val="solid"/>
                     </a:lnT>
                     <a:lnB w="9525" cap="flat" cmpd="sng" algn="ctr">
                       <a:solidFill>
-                        <a:srgbClr val="D0F1E6"/>
+                        <a:srgbClr val="D1FAEC"/>
                       </a:solidFill>
                       <a:prstDash val="solid"/>
                     </a:lnB>
                     <a:solidFill>
-                      <a:srgbClr val="F0FAF6"/>
+                      <a:srgbClr val="EEFCF7"/>
                     </a:solidFill>
                   </a:tcPr>
                 </a:tc>
@@ -6111,7 +6111,7 @@
             <a:avLst/>
           </a:prstGeom>
           <a:solidFill>
-            <a:srgbClr val="D0F1E6"/>
+            <a:srgbClr val="D1FAEC"/>
           </a:solidFill>
           <a:ln>
             <a:noFill/>
@@ -6140,7 +6140,7 @@
             <a:avLst/>
           </a:prstGeom>
           <a:solidFill>
-            <a:srgbClr val="246B53"/>
+            <a:srgbClr val="26C590"/>
           </a:solidFill>
           <a:ln>
             <a:noFill/>
@@ -6184,7 +6184,7 @@
             <a:r>
               <a:rPr sz="3000" b="1" i="0">
                 <a:solidFill>
-                  <a:srgbClr val="143D30"/>
+                  <a:srgbClr val="115F45"/>
                 </a:solidFill>
               </a:rPr>
               <a:t>보장 항목 체크</a:t>
@@ -6236,30 +6236,30 @@
                   <a:tcPr anchor="ctr" marL="73152" marR="73152">
                     <a:lnL w="9525" cap="flat" cmpd="sng" algn="ctr">
                       <a:solidFill>
-                        <a:srgbClr val="246B53"/>
+                        <a:srgbClr val="26C590"/>
                       </a:solidFill>
                       <a:prstDash val="solid"/>
                     </a:lnL>
                     <a:lnR w="9525" cap="flat" cmpd="sng" algn="ctr">
                       <a:solidFill>
-                        <a:srgbClr val="246B53"/>
+                        <a:srgbClr val="26C590"/>
                       </a:solidFill>
                       <a:prstDash val="solid"/>
                     </a:lnR>
                     <a:lnT w="9525" cap="flat" cmpd="sng" algn="ctr">
                       <a:solidFill>
-                        <a:srgbClr val="246B53"/>
+                        <a:srgbClr val="26C590"/>
                       </a:solidFill>
                       <a:prstDash val="solid"/>
                     </a:lnT>
                     <a:lnB w="9525" cap="flat" cmpd="sng" algn="ctr">
                       <a:solidFill>
-                        <a:srgbClr val="246B53"/>
+                        <a:srgbClr val="26C590"/>
                       </a:solidFill>
                       <a:prstDash val="solid"/>
                     </a:lnB>
                     <a:solidFill>
-                      <a:srgbClr val="246B53"/>
+                      <a:srgbClr val="26C590"/>
                     </a:solidFill>
                   </a:tcPr>
                 </a:tc>
@@ -6282,30 +6282,30 @@
                   <a:tcPr anchor="ctr" marL="73152" marR="73152">
                     <a:lnL w="9525" cap="flat" cmpd="sng" algn="ctr">
                       <a:solidFill>
-                        <a:srgbClr val="246B53"/>
+                        <a:srgbClr val="26C590"/>
                       </a:solidFill>
                       <a:prstDash val="solid"/>
                     </a:lnL>
                     <a:lnR w="9525" cap="flat" cmpd="sng" algn="ctr">
                       <a:solidFill>
-                        <a:srgbClr val="246B53"/>
+                        <a:srgbClr val="26C590"/>
                       </a:solidFill>
                       <a:prstDash val="solid"/>
                     </a:lnR>
                     <a:lnT w="9525" cap="flat" cmpd="sng" algn="ctr">
                       <a:solidFill>
-                        <a:srgbClr val="246B53"/>
+                        <a:srgbClr val="26C590"/>
                       </a:solidFill>
                       <a:prstDash val="solid"/>
                     </a:lnT>
                     <a:lnB w="9525" cap="flat" cmpd="sng" algn="ctr">
                       <a:solidFill>
-                        <a:srgbClr val="246B53"/>
+                        <a:srgbClr val="26C590"/>
                       </a:solidFill>
                       <a:prstDash val="solid"/>
                     </a:lnB>
                     <a:solidFill>
-                      <a:srgbClr val="246B53"/>
+                      <a:srgbClr val="26C590"/>
                     </a:solidFill>
                   </a:tcPr>
                 </a:tc>
@@ -6328,30 +6328,30 @@
                   <a:tcPr anchor="ctr" marL="73152" marR="73152">
                     <a:lnL w="9525" cap="flat" cmpd="sng" algn="ctr">
                       <a:solidFill>
-                        <a:srgbClr val="246B53"/>
+                        <a:srgbClr val="26C590"/>
                       </a:solidFill>
                       <a:prstDash val="solid"/>
                     </a:lnL>
                     <a:lnR w="9525" cap="flat" cmpd="sng" algn="ctr">
                       <a:solidFill>
-                        <a:srgbClr val="246B53"/>
+                        <a:srgbClr val="26C590"/>
                       </a:solidFill>
                       <a:prstDash val="solid"/>
                     </a:lnR>
                     <a:lnT w="9525" cap="flat" cmpd="sng" algn="ctr">
                       <a:solidFill>
-                        <a:srgbClr val="246B53"/>
+                        <a:srgbClr val="26C590"/>
                       </a:solidFill>
                       <a:prstDash val="solid"/>
                     </a:lnT>
                     <a:lnB w="9525" cap="flat" cmpd="sng" algn="ctr">
                       <a:solidFill>
-                        <a:srgbClr val="246B53"/>
+                        <a:srgbClr val="26C590"/>
                       </a:solidFill>
                       <a:prstDash val="solid"/>
                     </a:lnB>
                     <a:solidFill>
-                      <a:srgbClr val="246B53"/>
+                      <a:srgbClr val="26C590"/>
                     </a:solidFill>
                   </a:tcPr>
                 </a:tc>
@@ -6374,30 +6374,30 @@
                   <a:tcPr anchor="ctr" marL="73152" marR="73152">
                     <a:lnL w="9525" cap="flat" cmpd="sng" algn="ctr">
                       <a:solidFill>
-                        <a:srgbClr val="246B53"/>
+                        <a:srgbClr val="26C590"/>
                       </a:solidFill>
                       <a:prstDash val="solid"/>
                     </a:lnL>
                     <a:lnR w="9525" cap="flat" cmpd="sng" algn="ctr">
                       <a:solidFill>
-                        <a:srgbClr val="246B53"/>
+                        <a:srgbClr val="26C590"/>
                       </a:solidFill>
                       <a:prstDash val="solid"/>
                     </a:lnR>
                     <a:lnT w="9525" cap="flat" cmpd="sng" algn="ctr">
                       <a:solidFill>
-                        <a:srgbClr val="246B53"/>
+                        <a:srgbClr val="26C590"/>
                       </a:solidFill>
                       <a:prstDash val="solid"/>
                     </a:lnT>
                     <a:lnB w="9525" cap="flat" cmpd="sng" algn="ctr">
                       <a:solidFill>
-                        <a:srgbClr val="246B53"/>
+                        <a:srgbClr val="26C590"/>
                       </a:solidFill>
                       <a:prstDash val="solid"/>
                     </a:lnB>
                     <a:solidFill>
-                      <a:srgbClr val="246B53"/>
+                      <a:srgbClr val="26C590"/>
                     </a:solidFill>
                   </a:tcPr>
                 </a:tc>
@@ -6412,7 +6412,7 @@
                       <a:r>
                         <a:rPr sz="1400" b="1">
                           <a:solidFill>
-                            <a:srgbClr val="143D30"/>
+                            <a:srgbClr val="115F45"/>
                           </a:solidFill>
                         </a:rPr>
                         <a:t>사망·재해</a:t>
@@ -6422,30 +6422,30 @@
                   <a:tcPr anchor="ctr" marL="73152" marR="73152">
                     <a:lnL w="9525" cap="flat" cmpd="sng" algn="ctr">
                       <a:solidFill>
-                        <a:srgbClr val="D0F1E6"/>
+                        <a:srgbClr val="D1FAEC"/>
                       </a:solidFill>
                       <a:prstDash val="solid"/>
                     </a:lnL>
                     <a:lnR w="9525" cap="flat" cmpd="sng" algn="ctr">
                       <a:solidFill>
-                        <a:srgbClr val="D0F1E6"/>
+                        <a:srgbClr val="D1FAEC"/>
                       </a:solidFill>
                       <a:prstDash val="solid"/>
                     </a:lnR>
                     <a:lnT w="9525" cap="flat" cmpd="sng" algn="ctr">
                       <a:solidFill>
-                        <a:srgbClr val="D0F1E6"/>
+                        <a:srgbClr val="D1FAEC"/>
                       </a:solidFill>
                       <a:prstDash val="solid"/>
                     </a:lnT>
                     <a:lnB w="9525" cap="flat" cmpd="sng" algn="ctr">
                       <a:solidFill>
-                        <a:srgbClr val="D0F1E6"/>
+                        <a:srgbClr val="D1FAEC"/>
                       </a:solidFill>
                       <a:prstDash val="solid"/>
                     </a:lnB>
                     <a:solidFill>
-                      <a:srgbClr val="D0F1E6"/>
+                      <a:srgbClr val="D1FAEC"/>
                     </a:solidFill>
                   </a:tcPr>
                 </a:tc>
@@ -6468,25 +6468,25 @@
                   <a:tcPr anchor="ctr" marL="73152" marR="73152">
                     <a:lnL w="9525" cap="flat" cmpd="sng" algn="ctr">
                       <a:solidFill>
-                        <a:srgbClr val="D0F1E6"/>
+                        <a:srgbClr val="D1FAEC"/>
                       </a:solidFill>
                       <a:prstDash val="solid"/>
                     </a:lnL>
                     <a:lnR w="9525" cap="flat" cmpd="sng" algn="ctr">
                       <a:solidFill>
-                        <a:srgbClr val="D0F1E6"/>
+                        <a:srgbClr val="D1FAEC"/>
                       </a:solidFill>
                       <a:prstDash val="solid"/>
                     </a:lnR>
                     <a:lnT w="9525" cap="flat" cmpd="sng" algn="ctr">
                       <a:solidFill>
-                        <a:srgbClr val="D0F1E6"/>
+                        <a:srgbClr val="D1FAEC"/>
                       </a:solidFill>
                       <a:prstDash val="solid"/>
                     </a:lnT>
                     <a:lnB w="9525" cap="flat" cmpd="sng" algn="ctr">
                       <a:solidFill>
-                        <a:srgbClr val="D0F1E6"/>
+                        <a:srgbClr val="D1FAEC"/>
                       </a:solidFill>
                       <a:prstDash val="solid"/>
                     </a:lnB>
@@ -6514,25 +6514,25 @@
                   <a:tcPr anchor="ctr" marL="73152" marR="73152">
                     <a:lnL w="9525" cap="flat" cmpd="sng" algn="ctr">
                       <a:solidFill>
-                        <a:srgbClr val="D0F1E6"/>
+                        <a:srgbClr val="D1FAEC"/>
                       </a:solidFill>
                       <a:prstDash val="solid"/>
                     </a:lnL>
                     <a:lnR w="9525" cap="flat" cmpd="sng" algn="ctr">
                       <a:solidFill>
-                        <a:srgbClr val="D0F1E6"/>
+                        <a:srgbClr val="D1FAEC"/>
                       </a:solidFill>
                       <a:prstDash val="solid"/>
                     </a:lnR>
                     <a:lnT w="9525" cap="flat" cmpd="sng" algn="ctr">
                       <a:solidFill>
-                        <a:srgbClr val="D0F1E6"/>
+                        <a:srgbClr val="D1FAEC"/>
                       </a:solidFill>
                       <a:prstDash val="solid"/>
                     </a:lnT>
                     <a:lnB w="9525" cap="flat" cmpd="sng" algn="ctr">
                       <a:solidFill>
-                        <a:srgbClr val="D0F1E6"/>
+                        <a:srgbClr val="D1FAEC"/>
                       </a:solidFill>
                       <a:prstDash val="solid"/>
                     </a:lnB>
@@ -6560,25 +6560,25 @@
                   <a:tcPr anchor="ctr" marL="73152" marR="73152">
                     <a:lnL w="9525" cap="flat" cmpd="sng" algn="ctr">
                       <a:solidFill>
-                        <a:srgbClr val="D0F1E6"/>
+                        <a:srgbClr val="D1FAEC"/>
                       </a:solidFill>
                       <a:prstDash val="solid"/>
                     </a:lnL>
                     <a:lnR w="9525" cap="flat" cmpd="sng" algn="ctr">
                       <a:solidFill>
-                        <a:srgbClr val="D0F1E6"/>
+                        <a:srgbClr val="D1FAEC"/>
                       </a:solidFill>
                       <a:prstDash val="solid"/>
                     </a:lnR>
                     <a:lnT w="9525" cap="flat" cmpd="sng" algn="ctr">
                       <a:solidFill>
-                        <a:srgbClr val="D0F1E6"/>
+                        <a:srgbClr val="D1FAEC"/>
                       </a:solidFill>
                       <a:prstDash val="solid"/>
                     </a:lnT>
                     <a:lnB w="9525" cap="flat" cmpd="sng" algn="ctr">
                       <a:solidFill>
-                        <a:srgbClr val="D0F1E6"/>
+                        <a:srgbClr val="D1FAEC"/>
                       </a:solidFill>
                       <a:prstDash val="solid"/>
                     </a:lnB>
@@ -6598,7 +6598,7 @@
                       <a:r>
                         <a:rPr sz="1400" b="1">
                           <a:solidFill>
-                            <a:srgbClr val="143D30"/>
+                            <a:srgbClr val="115F45"/>
                           </a:solidFill>
                         </a:rPr>
                         <a:t>질병 진단</a:t>
@@ -6608,30 +6608,30 @@
                   <a:tcPr anchor="ctr" marL="73152" marR="73152">
                     <a:lnL w="9525" cap="flat" cmpd="sng" algn="ctr">
                       <a:solidFill>
-                        <a:srgbClr val="D0F1E6"/>
+                        <a:srgbClr val="D1FAEC"/>
                       </a:solidFill>
                       <a:prstDash val="solid"/>
                     </a:lnL>
                     <a:lnR w="9525" cap="flat" cmpd="sng" algn="ctr">
                       <a:solidFill>
-                        <a:srgbClr val="D0F1E6"/>
+                        <a:srgbClr val="D1FAEC"/>
                       </a:solidFill>
                       <a:prstDash val="solid"/>
                     </a:lnR>
                     <a:lnT w="9525" cap="flat" cmpd="sng" algn="ctr">
                       <a:solidFill>
-                        <a:srgbClr val="D0F1E6"/>
+                        <a:srgbClr val="D1FAEC"/>
                       </a:solidFill>
                       <a:prstDash val="solid"/>
                     </a:lnT>
                     <a:lnB w="9525" cap="flat" cmpd="sng" algn="ctr">
                       <a:solidFill>
-                        <a:srgbClr val="D0F1E6"/>
+                        <a:srgbClr val="D1FAEC"/>
                       </a:solidFill>
                       <a:prstDash val="solid"/>
                     </a:lnB>
                     <a:solidFill>
-                      <a:srgbClr val="D0F1E6"/>
+                      <a:srgbClr val="D1FAEC"/>
                     </a:solidFill>
                   </a:tcPr>
                 </a:tc>
@@ -6654,30 +6654,30 @@
                   <a:tcPr anchor="ctr" marL="73152" marR="73152">
                     <a:lnL w="9525" cap="flat" cmpd="sng" algn="ctr">
                       <a:solidFill>
-                        <a:srgbClr val="D0F1E6"/>
+                        <a:srgbClr val="D1FAEC"/>
                       </a:solidFill>
                       <a:prstDash val="solid"/>
                     </a:lnL>
                     <a:lnR w="9525" cap="flat" cmpd="sng" algn="ctr">
                       <a:solidFill>
-                        <a:srgbClr val="D0F1E6"/>
+                        <a:srgbClr val="D1FAEC"/>
                       </a:solidFill>
                       <a:prstDash val="solid"/>
                     </a:lnR>
                     <a:lnT w="9525" cap="flat" cmpd="sng" algn="ctr">
                       <a:solidFill>
-                        <a:srgbClr val="D0F1E6"/>
+                        <a:srgbClr val="D1FAEC"/>
                       </a:solidFill>
                       <a:prstDash val="solid"/>
                     </a:lnT>
                     <a:lnB w="9525" cap="flat" cmpd="sng" algn="ctr">
                       <a:solidFill>
-                        <a:srgbClr val="D0F1E6"/>
+                        <a:srgbClr val="D1FAEC"/>
                       </a:solidFill>
                       <a:prstDash val="solid"/>
                     </a:lnB>
                     <a:solidFill>
-                      <a:srgbClr val="F0FAF6"/>
+                      <a:srgbClr val="EEFCF7"/>
                     </a:solidFill>
                   </a:tcPr>
                 </a:tc>
@@ -6700,30 +6700,30 @@
                   <a:tcPr anchor="ctr" marL="73152" marR="73152">
                     <a:lnL w="9525" cap="flat" cmpd="sng" algn="ctr">
                       <a:solidFill>
-                        <a:srgbClr val="D0F1E6"/>
+                        <a:srgbClr val="D1FAEC"/>
                       </a:solidFill>
                       <a:prstDash val="solid"/>
                     </a:lnL>
                     <a:lnR w="9525" cap="flat" cmpd="sng" algn="ctr">
                       <a:solidFill>
-                        <a:srgbClr val="D0F1E6"/>
+                        <a:srgbClr val="D1FAEC"/>
                       </a:solidFill>
                       <a:prstDash val="solid"/>
                     </a:lnR>
                     <a:lnT w="9525" cap="flat" cmpd="sng" algn="ctr">
                       <a:solidFill>
-                        <a:srgbClr val="D0F1E6"/>
+                        <a:srgbClr val="D1FAEC"/>
                       </a:solidFill>
                       <a:prstDash val="solid"/>
                     </a:lnT>
                     <a:lnB w="9525" cap="flat" cmpd="sng" algn="ctr">
                       <a:solidFill>
-                        <a:srgbClr val="D0F1E6"/>
+                        <a:srgbClr val="D1FAEC"/>
                       </a:solidFill>
                       <a:prstDash val="solid"/>
                     </a:lnB>
                     <a:solidFill>
-                      <a:srgbClr val="F0FAF6"/>
+                      <a:srgbClr val="EEFCF7"/>
                     </a:solidFill>
                   </a:tcPr>
                 </a:tc>
@@ -6746,30 +6746,30 @@
                   <a:tcPr anchor="ctr" marL="73152" marR="73152">
                     <a:lnL w="9525" cap="flat" cmpd="sng" algn="ctr">
                       <a:solidFill>
-                        <a:srgbClr val="D0F1E6"/>
+                        <a:srgbClr val="D1FAEC"/>
                       </a:solidFill>
                       <a:prstDash val="solid"/>
                     </a:lnL>
                     <a:lnR w="9525" cap="flat" cmpd="sng" algn="ctr">
                       <a:solidFill>
-                        <a:srgbClr val="D0F1E6"/>
+                        <a:srgbClr val="D1FAEC"/>
                       </a:solidFill>
                       <a:prstDash val="solid"/>
                     </a:lnR>
                     <a:lnT w="9525" cap="flat" cmpd="sng" algn="ctr">
                       <a:solidFill>
-                        <a:srgbClr val="D0F1E6"/>
+                        <a:srgbClr val="D1FAEC"/>
                       </a:solidFill>
                       <a:prstDash val="solid"/>
                     </a:lnT>
                     <a:lnB w="9525" cap="flat" cmpd="sng" algn="ctr">
                       <a:solidFill>
-                        <a:srgbClr val="D0F1E6"/>
+                        <a:srgbClr val="D1FAEC"/>
                       </a:solidFill>
                       <a:prstDash val="solid"/>
                     </a:lnB>
                     <a:solidFill>
-                      <a:srgbClr val="F0FAF6"/>
+                      <a:srgbClr val="EEFCF7"/>
                     </a:solidFill>
                   </a:tcPr>
                 </a:tc>
@@ -6784,7 +6784,7 @@
                       <a:r>
                         <a:rPr sz="1400" b="1">
                           <a:solidFill>
-                            <a:srgbClr val="143D30"/>
+                            <a:srgbClr val="115F45"/>
                           </a:solidFill>
                         </a:rPr>
                         <a:t>암</a:t>
@@ -6794,30 +6794,30 @@
                   <a:tcPr anchor="ctr" marL="73152" marR="73152">
                     <a:lnL w="9525" cap="flat" cmpd="sng" algn="ctr">
                       <a:solidFill>
-                        <a:srgbClr val="D0F1E6"/>
+                        <a:srgbClr val="D1FAEC"/>
                       </a:solidFill>
                       <a:prstDash val="solid"/>
                     </a:lnL>
                     <a:lnR w="9525" cap="flat" cmpd="sng" algn="ctr">
                       <a:solidFill>
-                        <a:srgbClr val="D0F1E6"/>
+                        <a:srgbClr val="D1FAEC"/>
                       </a:solidFill>
                       <a:prstDash val="solid"/>
                     </a:lnR>
                     <a:lnT w="9525" cap="flat" cmpd="sng" algn="ctr">
                       <a:solidFill>
-                        <a:srgbClr val="D0F1E6"/>
+                        <a:srgbClr val="D1FAEC"/>
                       </a:solidFill>
                       <a:prstDash val="solid"/>
                     </a:lnT>
                     <a:lnB w="9525" cap="flat" cmpd="sng" algn="ctr">
                       <a:solidFill>
-                        <a:srgbClr val="D0F1E6"/>
+                        <a:srgbClr val="D1FAEC"/>
                       </a:solidFill>
                       <a:prstDash val="solid"/>
                     </a:lnB>
                     <a:solidFill>
-                      <a:srgbClr val="D0F1E6"/>
+                      <a:srgbClr val="D1FAEC"/>
                     </a:solidFill>
                   </a:tcPr>
                 </a:tc>
@@ -6840,25 +6840,25 @@
                   <a:tcPr anchor="ctr" marL="73152" marR="73152">
                     <a:lnL w="9525" cap="flat" cmpd="sng" algn="ctr">
                       <a:solidFill>
-                        <a:srgbClr val="D0F1E6"/>
+                        <a:srgbClr val="D1FAEC"/>
                       </a:solidFill>
                       <a:prstDash val="solid"/>
                     </a:lnL>
                     <a:lnR w="9525" cap="flat" cmpd="sng" algn="ctr">
                       <a:solidFill>
-                        <a:srgbClr val="D0F1E6"/>
+                        <a:srgbClr val="D1FAEC"/>
                       </a:solidFill>
                       <a:prstDash val="solid"/>
                     </a:lnR>
                     <a:lnT w="9525" cap="flat" cmpd="sng" algn="ctr">
                       <a:solidFill>
-                        <a:srgbClr val="D0F1E6"/>
+                        <a:srgbClr val="D1FAEC"/>
                       </a:solidFill>
                       <a:prstDash val="solid"/>
                     </a:lnT>
                     <a:lnB w="9525" cap="flat" cmpd="sng" algn="ctr">
                       <a:solidFill>
-                        <a:srgbClr val="D0F1E6"/>
+                        <a:srgbClr val="D1FAEC"/>
                       </a:solidFill>
                       <a:prstDash val="solid"/>
                     </a:lnB>
@@ -6886,25 +6886,25 @@
                   <a:tcPr anchor="ctr" marL="73152" marR="73152">
                     <a:lnL w="9525" cap="flat" cmpd="sng" algn="ctr">
                       <a:solidFill>
-                        <a:srgbClr val="D0F1E6"/>
+                        <a:srgbClr val="D1FAEC"/>
                       </a:solidFill>
                       <a:prstDash val="solid"/>
                     </a:lnL>
                     <a:lnR w="9525" cap="flat" cmpd="sng" algn="ctr">
                       <a:solidFill>
-                        <a:srgbClr val="D0F1E6"/>
+                        <a:srgbClr val="D1FAEC"/>
                       </a:solidFill>
                       <a:prstDash val="solid"/>
                     </a:lnR>
                     <a:lnT w="9525" cap="flat" cmpd="sng" algn="ctr">
                       <a:solidFill>
-                        <a:srgbClr val="D0F1E6"/>
+                        <a:srgbClr val="D1FAEC"/>
                       </a:solidFill>
                       <a:prstDash val="solid"/>
                     </a:lnT>
                     <a:lnB w="9525" cap="flat" cmpd="sng" algn="ctr">
                       <a:solidFill>
-                        <a:srgbClr val="D0F1E6"/>
+                        <a:srgbClr val="D1FAEC"/>
                       </a:solidFill>
                       <a:prstDash val="solid"/>
                     </a:lnB>
@@ -6932,25 +6932,25 @@
                   <a:tcPr anchor="ctr" marL="73152" marR="73152">
                     <a:lnL w="9525" cap="flat" cmpd="sng" algn="ctr">
                       <a:solidFill>
-                        <a:srgbClr val="D0F1E6"/>
+                        <a:srgbClr val="D1FAEC"/>
                       </a:solidFill>
                       <a:prstDash val="solid"/>
                     </a:lnL>
                     <a:lnR w="9525" cap="flat" cmpd="sng" algn="ctr">
                       <a:solidFill>
-                        <a:srgbClr val="D0F1E6"/>
+                        <a:srgbClr val="D1FAEC"/>
                       </a:solidFill>
                       <a:prstDash val="solid"/>
                     </a:lnR>
                     <a:lnT w="9525" cap="flat" cmpd="sng" algn="ctr">
                       <a:solidFill>
-                        <a:srgbClr val="D0F1E6"/>
+                        <a:srgbClr val="D1FAEC"/>
                       </a:solidFill>
                       <a:prstDash val="solid"/>
                     </a:lnT>
                     <a:lnB w="9525" cap="flat" cmpd="sng" algn="ctr">
                       <a:solidFill>
-                        <a:srgbClr val="D0F1E6"/>
+                        <a:srgbClr val="D1FAEC"/>
                       </a:solidFill>
                       <a:prstDash val="solid"/>
                     </a:lnB>
@@ -6970,7 +6970,7 @@
                       <a:r>
                         <a:rPr sz="1400" b="1">
                           <a:solidFill>
-                            <a:srgbClr val="143D30"/>
+                            <a:srgbClr val="115F45"/>
                           </a:solidFill>
                         </a:rPr>
                         <a:t>뇌·심장</a:t>
@@ -6980,30 +6980,30 @@
                   <a:tcPr anchor="ctr" marL="73152" marR="73152">
                     <a:lnL w="9525" cap="flat" cmpd="sng" algn="ctr">
                       <a:solidFill>
-                        <a:srgbClr val="D0F1E6"/>
+                        <a:srgbClr val="D1FAEC"/>
                       </a:solidFill>
                       <a:prstDash val="solid"/>
                     </a:lnL>
                     <a:lnR w="9525" cap="flat" cmpd="sng" algn="ctr">
                       <a:solidFill>
-                        <a:srgbClr val="D0F1E6"/>
+                        <a:srgbClr val="D1FAEC"/>
                       </a:solidFill>
                       <a:prstDash val="solid"/>
                     </a:lnR>
                     <a:lnT w="9525" cap="flat" cmpd="sng" algn="ctr">
                       <a:solidFill>
-                        <a:srgbClr val="D0F1E6"/>
+                        <a:srgbClr val="D1FAEC"/>
                       </a:solidFill>
                       <a:prstDash val="solid"/>
                     </a:lnT>
                     <a:lnB w="9525" cap="flat" cmpd="sng" algn="ctr">
                       <a:solidFill>
-                        <a:srgbClr val="D0F1E6"/>
+                        <a:srgbClr val="D1FAEC"/>
                       </a:solidFill>
                       <a:prstDash val="solid"/>
                     </a:lnB>
                     <a:solidFill>
-                      <a:srgbClr val="D0F1E6"/>
+                      <a:srgbClr val="D1FAEC"/>
                     </a:solidFill>
                   </a:tcPr>
                 </a:tc>
@@ -7026,30 +7026,30 @@
                   <a:tcPr anchor="ctr" marL="73152" marR="73152">
                     <a:lnL w="9525" cap="flat" cmpd="sng" algn="ctr">
                       <a:solidFill>
-                        <a:srgbClr val="D0F1E6"/>
+                        <a:srgbClr val="D1FAEC"/>
                       </a:solidFill>
                       <a:prstDash val="solid"/>
                     </a:lnL>
                     <a:lnR w="9525" cap="flat" cmpd="sng" algn="ctr">
                       <a:solidFill>
-                        <a:srgbClr val="D0F1E6"/>
+                        <a:srgbClr val="D1FAEC"/>
                       </a:solidFill>
                       <a:prstDash val="solid"/>
                     </a:lnR>
                     <a:lnT w="9525" cap="flat" cmpd="sng" algn="ctr">
                       <a:solidFill>
-                        <a:srgbClr val="D0F1E6"/>
+                        <a:srgbClr val="D1FAEC"/>
                       </a:solidFill>
                       <a:prstDash val="solid"/>
                     </a:lnT>
                     <a:lnB w="9525" cap="flat" cmpd="sng" algn="ctr">
                       <a:solidFill>
-                        <a:srgbClr val="D0F1E6"/>
+                        <a:srgbClr val="D1FAEC"/>
                       </a:solidFill>
                       <a:prstDash val="solid"/>
                     </a:lnB>
                     <a:solidFill>
-                      <a:srgbClr val="F0FAF6"/>
+                      <a:srgbClr val="EEFCF7"/>
                     </a:solidFill>
                   </a:tcPr>
                 </a:tc>
@@ -7072,30 +7072,30 @@
                   <a:tcPr anchor="ctr" marL="73152" marR="73152">
                     <a:lnL w="9525" cap="flat" cmpd="sng" algn="ctr">
                       <a:solidFill>
-                        <a:srgbClr val="D0F1E6"/>
+                        <a:srgbClr val="D1FAEC"/>
                       </a:solidFill>
                       <a:prstDash val="solid"/>
                     </a:lnL>
                     <a:lnR w="9525" cap="flat" cmpd="sng" algn="ctr">
                       <a:solidFill>
-                        <a:srgbClr val="D0F1E6"/>
+                        <a:srgbClr val="D1FAEC"/>
                       </a:solidFill>
                       <a:prstDash val="solid"/>
                     </a:lnR>
                     <a:lnT w="9525" cap="flat" cmpd="sng" algn="ctr">
                       <a:solidFill>
-                        <a:srgbClr val="D0F1E6"/>
+                        <a:srgbClr val="D1FAEC"/>
                       </a:solidFill>
                       <a:prstDash val="solid"/>
                     </a:lnT>
                     <a:lnB w="9525" cap="flat" cmpd="sng" algn="ctr">
                       <a:solidFill>
-                        <a:srgbClr val="D0F1E6"/>
+                        <a:srgbClr val="D1FAEC"/>
                       </a:solidFill>
                       <a:prstDash val="solid"/>
                     </a:lnB>
                     <a:solidFill>
-                      <a:srgbClr val="F0FAF6"/>
+                      <a:srgbClr val="EEFCF7"/>
                     </a:solidFill>
                   </a:tcPr>
                 </a:tc>
@@ -7118,30 +7118,30 @@
                   <a:tcPr anchor="ctr" marL="73152" marR="73152">
                     <a:lnL w="9525" cap="flat" cmpd="sng" algn="ctr">
                       <a:solidFill>
-                        <a:srgbClr val="D0F1E6"/>
+                        <a:srgbClr val="D1FAEC"/>
                       </a:solidFill>
                       <a:prstDash val="solid"/>
                     </a:lnL>
                     <a:lnR w="9525" cap="flat" cmpd="sng" algn="ctr">
                       <a:solidFill>
-                        <a:srgbClr val="D0F1E6"/>
+                        <a:srgbClr val="D1FAEC"/>
                       </a:solidFill>
                       <a:prstDash val="solid"/>
                     </a:lnR>
                     <a:lnT w="9525" cap="flat" cmpd="sng" algn="ctr">
                       <a:solidFill>
-                        <a:srgbClr val="D0F1E6"/>
+                        <a:srgbClr val="D1FAEC"/>
                       </a:solidFill>
                       <a:prstDash val="solid"/>
                     </a:lnT>
                     <a:lnB w="9525" cap="flat" cmpd="sng" algn="ctr">
                       <a:solidFill>
-                        <a:srgbClr val="D0F1E6"/>
+                        <a:srgbClr val="D1FAEC"/>
                       </a:solidFill>
                       <a:prstDash val="solid"/>
                     </a:lnB>
                     <a:solidFill>
-                      <a:srgbClr val="F0FAF6"/>
+                      <a:srgbClr val="EEFCF7"/>
                     </a:solidFill>
                   </a:tcPr>
                 </a:tc>
@@ -7156,7 +7156,7 @@
                       <a:r>
                         <a:rPr sz="1400" b="1">
                           <a:solidFill>
-                            <a:srgbClr val="143D30"/>
+                            <a:srgbClr val="115F45"/>
                           </a:solidFill>
                         </a:rPr>
                         <a:t>입원·수술</a:t>
@@ -7166,30 +7166,30 @@
                   <a:tcPr anchor="ctr" marL="73152" marR="73152">
                     <a:lnL w="9525" cap="flat" cmpd="sng" algn="ctr">
                       <a:solidFill>
-                        <a:srgbClr val="D0F1E6"/>
+                        <a:srgbClr val="D1FAEC"/>
                       </a:solidFill>
                       <a:prstDash val="solid"/>
                     </a:lnL>
                     <a:lnR w="9525" cap="flat" cmpd="sng" algn="ctr">
                       <a:solidFill>
-                        <a:srgbClr val="D0F1E6"/>
+                        <a:srgbClr val="D1FAEC"/>
                       </a:solidFill>
                       <a:prstDash val="solid"/>
                     </a:lnR>
                     <a:lnT w="9525" cap="flat" cmpd="sng" algn="ctr">
                       <a:solidFill>
-                        <a:srgbClr val="D0F1E6"/>
+                        <a:srgbClr val="D1FAEC"/>
                       </a:solidFill>
                       <a:prstDash val="solid"/>
                     </a:lnT>
                     <a:lnB w="9525" cap="flat" cmpd="sng" algn="ctr">
                       <a:solidFill>
-                        <a:srgbClr val="D0F1E6"/>
+                        <a:srgbClr val="D1FAEC"/>
                       </a:solidFill>
                       <a:prstDash val="solid"/>
                     </a:lnB>
                     <a:solidFill>
-                      <a:srgbClr val="D0F1E6"/>
+                      <a:srgbClr val="D1FAEC"/>
                     </a:solidFill>
                   </a:tcPr>
                 </a:tc>
@@ -7212,25 +7212,25 @@
                   <a:tcPr anchor="ctr" marL="73152" marR="73152">
                     <a:lnL w="9525" cap="flat" cmpd="sng" algn="ctr">
                       <a:solidFill>
-                        <a:srgbClr val="D0F1E6"/>
+                        <a:srgbClr val="D1FAEC"/>
                       </a:solidFill>
                       <a:prstDash val="solid"/>
                     </a:lnL>
                     <a:lnR w="9525" cap="flat" cmpd="sng" algn="ctr">
                       <a:solidFill>
-                        <a:srgbClr val="D0F1E6"/>
+                        <a:srgbClr val="D1FAEC"/>
                       </a:solidFill>
                       <a:prstDash val="solid"/>
                     </a:lnR>
                     <a:lnT w="9525" cap="flat" cmpd="sng" algn="ctr">
                       <a:solidFill>
-                        <a:srgbClr val="D0F1E6"/>
+                        <a:srgbClr val="D1FAEC"/>
                       </a:solidFill>
                       <a:prstDash val="solid"/>
                     </a:lnT>
                     <a:lnB w="9525" cap="flat" cmpd="sng" algn="ctr">
                       <a:solidFill>
-                        <a:srgbClr val="D0F1E6"/>
+                        <a:srgbClr val="D1FAEC"/>
                       </a:solidFill>
                       <a:prstDash val="solid"/>
                     </a:lnB>
@@ -7258,25 +7258,25 @@
                   <a:tcPr anchor="ctr" marL="73152" marR="73152">
                     <a:lnL w="9525" cap="flat" cmpd="sng" algn="ctr">
                       <a:solidFill>
-                        <a:srgbClr val="D0F1E6"/>
+                        <a:srgbClr val="D1FAEC"/>
                       </a:solidFill>
                       <a:prstDash val="solid"/>
                     </a:lnL>
                     <a:lnR w="9525" cap="flat" cmpd="sng" algn="ctr">
                       <a:solidFill>
-                        <a:srgbClr val="D0F1E6"/>
+                        <a:srgbClr val="D1FAEC"/>
                       </a:solidFill>
                       <a:prstDash val="solid"/>
                     </a:lnR>
                     <a:lnT w="9525" cap="flat" cmpd="sng" algn="ctr">
                       <a:solidFill>
-                        <a:srgbClr val="D0F1E6"/>
+                        <a:srgbClr val="D1FAEC"/>
                       </a:solidFill>
                       <a:prstDash val="solid"/>
                     </a:lnT>
                     <a:lnB w="9525" cap="flat" cmpd="sng" algn="ctr">
                       <a:solidFill>
-                        <a:srgbClr val="D0F1E6"/>
+                        <a:srgbClr val="D1FAEC"/>
                       </a:solidFill>
                       <a:prstDash val="solid"/>
                     </a:lnB>
@@ -7304,25 +7304,25 @@
                   <a:tcPr anchor="ctr" marL="73152" marR="73152">
                     <a:lnL w="9525" cap="flat" cmpd="sng" algn="ctr">
                       <a:solidFill>
-                        <a:srgbClr val="D0F1E6"/>
+                        <a:srgbClr val="D1FAEC"/>
                       </a:solidFill>
                       <a:prstDash val="solid"/>
                     </a:lnL>
                     <a:lnR w="9525" cap="flat" cmpd="sng" algn="ctr">
                       <a:solidFill>
-                        <a:srgbClr val="D0F1E6"/>
+                        <a:srgbClr val="D1FAEC"/>
                       </a:solidFill>
                       <a:prstDash val="solid"/>
                     </a:lnR>
                     <a:lnT w="9525" cap="flat" cmpd="sng" algn="ctr">
                       <a:solidFill>
-                        <a:srgbClr val="D0F1E6"/>
+                        <a:srgbClr val="D1FAEC"/>
                       </a:solidFill>
                       <a:prstDash val="solid"/>
                     </a:lnT>
                     <a:lnB w="9525" cap="flat" cmpd="sng" algn="ctr">
                       <a:solidFill>
-                        <a:srgbClr val="D0F1E6"/>
+                        <a:srgbClr val="D1FAEC"/>
                       </a:solidFill>
                       <a:prstDash val="solid"/>
                     </a:lnB>
@@ -7342,7 +7342,7 @@
                       <a:r>
                         <a:rPr sz="1400" b="1">
                           <a:solidFill>
-                            <a:srgbClr val="143D30"/>
+                            <a:srgbClr val="115F45"/>
                           </a:solidFill>
                         </a:rPr>
                         <a:t>상해</a:t>
@@ -7352,30 +7352,30 @@
                   <a:tcPr anchor="ctr" marL="73152" marR="73152">
                     <a:lnL w="9525" cap="flat" cmpd="sng" algn="ctr">
                       <a:solidFill>
-                        <a:srgbClr val="D0F1E6"/>
+                        <a:srgbClr val="D1FAEC"/>
                       </a:solidFill>
                       <a:prstDash val="solid"/>
                     </a:lnL>
                     <a:lnR w="9525" cap="flat" cmpd="sng" algn="ctr">
                       <a:solidFill>
-                        <a:srgbClr val="D0F1E6"/>
+                        <a:srgbClr val="D1FAEC"/>
                       </a:solidFill>
                       <a:prstDash val="solid"/>
                     </a:lnR>
                     <a:lnT w="9525" cap="flat" cmpd="sng" algn="ctr">
                       <a:solidFill>
-                        <a:srgbClr val="D0F1E6"/>
+                        <a:srgbClr val="D1FAEC"/>
                       </a:solidFill>
                       <a:prstDash val="solid"/>
                     </a:lnT>
                     <a:lnB w="9525" cap="flat" cmpd="sng" algn="ctr">
                       <a:solidFill>
-                        <a:srgbClr val="D0F1E6"/>
+                        <a:srgbClr val="D1FAEC"/>
                       </a:solidFill>
                       <a:prstDash val="solid"/>
                     </a:lnB>
                     <a:solidFill>
-                      <a:srgbClr val="D0F1E6"/>
+                      <a:srgbClr val="D1FAEC"/>
                     </a:solidFill>
                   </a:tcPr>
                 </a:tc>
@@ -7398,30 +7398,30 @@
                   <a:tcPr anchor="ctr" marL="73152" marR="73152">
                     <a:lnL w="9525" cap="flat" cmpd="sng" algn="ctr">
                       <a:solidFill>
-                        <a:srgbClr val="D0F1E6"/>
+                        <a:srgbClr val="D1FAEC"/>
                       </a:solidFill>
                       <a:prstDash val="solid"/>
                     </a:lnL>
                     <a:lnR w="9525" cap="flat" cmpd="sng" algn="ctr">
                       <a:solidFill>
-                        <a:srgbClr val="D0F1E6"/>
+                        <a:srgbClr val="D1FAEC"/>
                       </a:solidFill>
                       <a:prstDash val="solid"/>
                     </a:lnR>
                     <a:lnT w="9525" cap="flat" cmpd="sng" algn="ctr">
                       <a:solidFill>
-                        <a:srgbClr val="D0F1E6"/>
+                        <a:srgbClr val="D1FAEC"/>
                       </a:solidFill>
                       <a:prstDash val="solid"/>
                     </a:lnT>
                     <a:lnB w="9525" cap="flat" cmpd="sng" algn="ctr">
                       <a:solidFill>
-                        <a:srgbClr val="D0F1E6"/>
+                        <a:srgbClr val="D1FAEC"/>
                       </a:solidFill>
                       <a:prstDash val="solid"/>
                     </a:lnB>
                     <a:solidFill>
-                      <a:srgbClr val="F0FAF6"/>
+                      <a:srgbClr val="EEFCF7"/>
                     </a:solidFill>
                   </a:tcPr>
                 </a:tc>
@@ -7444,30 +7444,30 @@
                   <a:tcPr anchor="ctr" marL="73152" marR="73152">
                     <a:lnL w="9525" cap="flat" cmpd="sng" algn="ctr">
                       <a:solidFill>
-                        <a:srgbClr val="D0F1E6"/>
+                        <a:srgbClr val="D1FAEC"/>
                       </a:solidFill>
                       <a:prstDash val="solid"/>
                     </a:lnL>
                     <a:lnR w="9525" cap="flat" cmpd="sng" algn="ctr">
                       <a:solidFill>
-                        <a:srgbClr val="D0F1E6"/>
+                        <a:srgbClr val="D1FAEC"/>
                       </a:solidFill>
                       <a:prstDash val="solid"/>
                     </a:lnR>
                     <a:lnT w="9525" cap="flat" cmpd="sng" algn="ctr">
                       <a:solidFill>
-                        <a:srgbClr val="D0F1E6"/>
+                        <a:srgbClr val="D1FAEC"/>
                       </a:solidFill>
                       <a:prstDash val="solid"/>
                     </a:lnT>
                     <a:lnB w="9525" cap="flat" cmpd="sng" algn="ctr">
                       <a:solidFill>
-                        <a:srgbClr val="D0F1E6"/>
+                        <a:srgbClr val="D1FAEC"/>
                       </a:solidFill>
                       <a:prstDash val="solid"/>
                     </a:lnB>
                     <a:solidFill>
-                      <a:srgbClr val="F0FAF6"/>
+                      <a:srgbClr val="EEFCF7"/>
                     </a:solidFill>
                   </a:tcPr>
                 </a:tc>
@@ -7490,30 +7490,30 @@
                   <a:tcPr anchor="ctr" marL="73152" marR="73152">
                     <a:lnL w="9525" cap="flat" cmpd="sng" algn="ctr">
                       <a:solidFill>
-                        <a:srgbClr val="D0F1E6"/>
+                        <a:srgbClr val="D1FAEC"/>
                       </a:solidFill>
                       <a:prstDash val="solid"/>
                     </a:lnL>
                     <a:lnR w="9525" cap="flat" cmpd="sng" algn="ctr">
                       <a:solidFill>
-                        <a:srgbClr val="D0F1E6"/>
+                        <a:srgbClr val="D1FAEC"/>
                       </a:solidFill>
                       <a:prstDash val="solid"/>
                     </a:lnR>
                     <a:lnT w="9525" cap="flat" cmpd="sng" algn="ctr">
                       <a:solidFill>
-                        <a:srgbClr val="D0F1E6"/>
+                        <a:srgbClr val="D1FAEC"/>
                       </a:solidFill>
                       <a:prstDash val="solid"/>
                     </a:lnT>
                     <a:lnB w="9525" cap="flat" cmpd="sng" algn="ctr">
                       <a:solidFill>
-                        <a:srgbClr val="D0F1E6"/>
+                        <a:srgbClr val="D1FAEC"/>
                       </a:solidFill>
                       <a:prstDash val="solid"/>
                     </a:lnB>
                     <a:solidFill>
-                      <a:srgbClr val="F0FAF6"/>
+                      <a:srgbClr val="EEFCF7"/>
                     </a:solidFill>
                   </a:tcPr>
                 </a:tc>
@@ -7528,7 +7528,7 @@
                       <a:r>
                         <a:rPr sz="1400" b="1">
                           <a:solidFill>
-                            <a:srgbClr val="143D30"/>
+                            <a:srgbClr val="115F45"/>
                           </a:solidFill>
                         </a:rPr>
                         <a:t>실손의료</a:t>
@@ -7538,30 +7538,30 @@
                   <a:tcPr anchor="ctr" marL="73152" marR="73152">
                     <a:lnL w="9525" cap="flat" cmpd="sng" algn="ctr">
                       <a:solidFill>
-                        <a:srgbClr val="D0F1E6"/>
+                        <a:srgbClr val="D1FAEC"/>
                       </a:solidFill>
                       <a:prstDash val="solid"/>
                     </a:lnL>
                     <a:lnR w="9525" cap="flat" cmpd="sng" algn="ctr">
                       <a:solidFill>
-                        <a:srgbClr val="D0F1E6"/>
+                        <a:srgbClr val="D1FAEC"/>
                       </a:solidFill>
                       <a:prstDash val="solid"/>
                     </a:lnR>
                     <a:lnT w="9525" cap="flat" cmpd="sng" algn="ctr">
                       <a:solidFill>
-                        <a:srgbClr val="D0F1E6"/>
+                        <a:srgbClr val="D1FAEC"/>
                       </a:solidFill>
                       <a:prstDash val="solid"/>
                     </a:lnT>
                     <a:lnB w="9525" cap="flat" cmpd="sng" algn="ctr">
                       <a:solidFill>
-                        <a:srgbClr val="D0F1E6"/>
+                        <a:srgbClr val="D1FAEC"/>
                       </a:solidFill>
                       <a:prstDash val="solid"/>
                     </a:lnB>
                     <a:solidFill>
-                      <a:srgbClr val="D0F1E6"/>
+                      <a:srgbClr val="D1FAEC"/>
                     </a:solidFill>
                   </a:tcPr>
                 </a:tc>
@@ -7584,25 +7584,25 @@
                   <a:tcPr anchor="ctr" marL="73152" marR="73152">
                     <a:lnL w="9525" cap="flat" cmpd="sng" algn="ctr">
                       <a:solidFill>
-                        <a:srgbClr val="D0F1E6"/>
+                        <a:srgbClr val="D1FAEC"/>
                       </a:solidFill>
                       <a:prstDash val="solid"/>
                     </a:lnL>
                     <a:lnR w="9525" cap="flat" cmpd="sng" algn="ctr">
                       <a:solidFill>
-                        <a:srgbClr val="D0F1E6"/>
+                        <a:srgbClr val="D1FAEC"/>
                       </a:solidFill>
                       <a:prstDash val="solid"/>
                     </a:lnR>
                     <a:lnT w="9525" cap="flat" cmpd="sng" algn="ctr">
                       <a:solidFill>
-                        <a:srgbClr val="D0F1E6"/>
+                        <a:srgbClr val="D1FAEC"/>
                       </a:solidFill>
                       <a:prstDash val="solid"/>
                     </a:lnT>
                     <a:lnB w="9525" cap="flat" cmpd="sng" algn="ctr">
                       <a:solidFill>
-                        <a:srgbClr val="D0F1E6"/>
+                        <a:srgbClr val="D1FAEC"/>
                       </a:solidFill>
                       <a:prstDash val="solid"/>
                     </a:lnB>
@@ -7630,25 +7630,25 @@
                   <a:tcPr anchor="ctr" marL="73152" marR="73152">
                     <a:lnL w="9525" cap="flat" cmpd="sng" algn="ctr">
                       <a:solidFill>
-                        <a:srgbClr val="D0F1E6"/>
+                        <a:srgbClr val="D1FAEC"/>
                       </a:solidFill>
                       <a:prstDash val="solid"/>
                     </a:lnL>
                     <a:lnR w="9525" cap="flat" cmpd="sng" algn="ctr">
                       <a:solidFill>
-                        <a:srgbClr val="D0F1E6"/>
+                        <a:srgbClr val="D1FAEC"/>
                       </a:solidFill>
                       <a:prstDash val="solid"/>
                     </a:lnR>
                     <a:lnT w="9525" cap="flat" cmpd="sng" algn="ctr">
                       <a:solidFill>
-                        <a:srgbClr val="D0F1E6"/>
+                        <a:srgbClr val="D1FAEC"/>
                       </a:solidFill>
                       <a:prstDash val="solid"/>
                     </a:lnT>
                     <a:lnB w="9525" cap="flat" cmpd="sng" algn="ctr">
                       <a:solidFill>
-                        <a:srgbClr val="D0F1E6"/>
+                        <a:srgbClr val="D1FAEC"/>
                       </a:solidFill>
                       <a:prstDash val="solid"/>
                     </a:lnB>
@@ -7676,25 +7676,25 @@
                   <a:tcPr anchor="ctr" marL="73152" marR="73152">
                     <a:lnL w="9525" cap="flat" cmpd="sng" algn="ctr">
                       <a:solidFill>
-                        <a:srgbClr val="D0F1E6"/>
+                        <a:srgbClr val="D1FAEC"/>
                       </a:solidFill>
                       <a:prstDash val="solid"/>
                     </a:lnL>
                     <a:lnR w="9525" cap="flat" cmpd="sng" algn="ctr">
                       <a:solidFill>
-                        <a:srgbClr val="D0F1E6"/>
+                        <a:srgbClr val="D1FAEC"/>
                       </a:solidFill>
                       <a:prstDash val="solid"/>
                     </a:lnR>
                     <a:lnT w="9525" cap="flat" cmpd="sng" algn="ctr">
                       <a:solidFill>
-                        <a:srgbClr val="D0F1E6"/>
+                        <a:srgbClr val="D1FAEC"/>
                       </a:solidFill>
                       <a:prstDash val="solid"/>
                     </a:lnT>
                     <a:lnB w="9525" cap="flat" cmpd="sng" algn="ctr">
                       <a:solidFill>
-                        <a:srgbClr val="D0F1E6"/>
+                        <a:srgbClr val="D1FAEC"/>
                       </a:solidFill>
                       <a:prstDash val="solid"/>
                     </a:lnB>
@@ -7714,7 +7714,7 @@
                       <a:r>
                         <a:rPr sz="1400" b="1">
                           <a:solidFill>
-                            <a:srgbClr val="143D30"/>
+                            <a:srgbClr val="115F45"/>
                           </a:solidFill>
                         </a:rPr>
                         <a:t>연금·노후자금</a:t>
@@ -7724,30 +7724,30 @@
                   <a:tcPr anchor="ctr" marL="73152" marR="73152">
                     <a:lnL w="9525" cap="flat" cmpd="sng" algn="ctr">
                       <a:solidFill>
-                        <a:srgbClr val="D0F1E6"/>
+                        <a:srgbClr val="D1FAEC"/>
                       </a:solidFill>
                       <a:prstDash val="solid"/>
                     </a:lnL>
                     <a:lnR w="9525" cap="flat" cmpd="sng" algn="ctr">
                       <a:solidFill>
-                        <a:srgbClr val="D0F1E6"/>
+                        <a:srgbClr val="D1FAEC"/>
                       </a:solidFill>
                       <a:prstDash val="solid"/>
                     </a:lnR>
                     <a:lnT w="9525" cap="flat" cmpd="sng" algn="ctr">
                       <a:solidFill>
-                        <a:srgbClr val="D0F1E6"/>
+                        <a:srgbClr val="D1FAEC"/>
                       </a:solidFill>
                       <a:prstDash val="solid"/>
                     </a:lnT>
                     <a:lnB w="9525" cap="flat" cmpd="sng" algn="ctr">
                       <a:solidFill>
-                        <a:srgbClr val="D0F1E6"/>
+                        <a:srgbClr val="D1FAEC"/>
                       </a:solidFill>
                       <a:prstDash val="solid"/>
                     </a:lnB>
                     <a:solidFill>
-                      <a:srgbClr val="D0F1E6"/>
+                      <a:srgbClr val="D1FAEC"/>
                     </a:solidFill>
                   </a:tcPr>
                 </a:tc>
@@ -7770,30 +7770,30 @@
                   <a:tcPr anchor="ctr" marL="73152" marR="73152">
                     <a:lnL w="9525" cap="flat" cmpd="sng" algn="ctr">
                       <a:solidFill>
-                        <a:srgbClr val="D0F1E6"/>
+                        <a:srgbClr val="D1FAEC"/>
                       </a:solidFill>
                       <a:prstDash val="solid"/>
                     </a:lnL>
                     <a:lnR w="9525" cap="flat" cmpd="sng" algn="ctr">
                       <a:solidFill>
-                        <a:srgbClr val="D0F1E6"/>
+                        <a:srgbClr val="D1FAEC"/>
                       </a:solidFill>
                       <a:prstDash val="solid"/>
                     </a:lnR>
                     <a:lnT w="9525" cap="flat" cmpd="sng" algn="ctr">
                       <a:solidFill>
-                        <a:srgbClr val="D0F1E6"/>
+                        <a:srgbClr val="D1FAEC"/>
                       </a:solidFill>
                       <a:prstDash val="solid"/>
                     </a:lnT>
                     <a:lnB w="9525" cap="flat" cmpd="sng" algn="ctr">
                       <a:solidFill>
-                        <a:srgbClr val="D0F1E6"/>
+                        <a:srgbClr val="D1FAEC"/>
                       </a:solidFill>
                       <a:prstDash val="solid"/>
                     </a:lnB>
                     <a:solidFill>
-                      <a:srgbClr val="F0FAF6"/>
+                      <a:srgbClr val="EEFCF7"/>
                     </a:solidFill>
                   </a:tcPr>
                 </a:tc>
@@ -7816,30 +7816,30 @@
                   <a:tcPr anchor="ctr" marL="73152" marR="73152">
                     <a:lnL w="9525" cap="flat" cmpd="sng" algn="ctr">
                       <a:solidFill>
-                        <a:srgbClr val="D0F1E6"/>
+                        <a:srgbClr val="D1FAEC"/>
                       </a:solidFill>
                       <a:prstDash val="solid"/>
                     </a:lnL>
                     <a:lnR w="9525" cap="flat" cmpd="sng" algn="ctr">
                       <a:solidFill>
-                        <a:srgbClr val="D0F1E6"/>
+                        <a:srgbClr val="D1FAEC"/>
                       </a:solidFill>
                       <a:prstDash val="solid"/>
                     </a:lnR>
                     <a:lnT w="9525" cap="flat" cmpd="sng" algn="ctr">
                       <a:solidFill>
-                        <a:srgbClr val="D0F1E6"/>
+                        <a:srgbClr val="D1FAEC"/>
                       </a:solidFill>
                       <a:prstDash val="solid"/>
                     </a:lnT>
                     <a:lnB w="9525" cap="flat" cmpd="sng" algn="ctr">
                       <a:solidFill>
-                        <a:srgbClr val="D0F1E6"/>
+                        <a:srgbClr val="D1FAEC"/>
                       </a:solidFill>
                       <a:prstDash val="solid"/>
                     </a:lnB>
                     <a:solidFill>
-                      <a:srgbClr val="F0FAF6"/>
+                      <a:srgbClr val="EEFCF7"/>
                     </a:solidFill>
                   </a:tcPr>
                 </a:tc>
@@ -7862,30 +7862,30 @@
                   <a:tcPr anchor="ctr" marL="73152" marR="73152">
                     <a:lnL w="9525" cap="flat" cmpd="sng" algn="ctr">
                       <a:solidFill>
-                        <a:srgbClr val="D0F1E6"/>
+                        <a:srgbClr val="D1FAEC"/>
                       </a:solidFill>
                       <a:prstDash val="solid"/>
                     </a:lnL>
                     <a:lnR w="9525" cap="flat" cmpd="sng" algn="ctr">
                       <a:solidFill>
-                        <a:srgbClr val="D0F1E6"/>
+                        <a:srgbClr val="D1FAEC"/>
                       </a:solidFill>
                       <a:prstDash val="solid"/>
                     </a:lnR>
                     <a:lnT w="9525" cap="flat" cmpd="sng" algn="ctr">
                       <a:solidFill>
-                        <a:srgbClr val="D0F1E6"/>
+                        <a:srgbClr val="D1FAEC"/>
                       </a:solidFill>
                       <a:prstDash val="solid"/>
                     </a:lnT>
                     <a:lnB w="9525" cap="flat" cmpd="sng" algn="ctr">
                       <a:solidFill>
-                        <a:srgbClr val="D0F1E6"/>
+                        <a:srgbClr val="D1FAEC"/>
                       </a:solidFill>
                       <a:prstDash val="solid"/>
                     </a:lnB>
                     <a:solidFill>
-                      <a:srgbClr val="F0FAF6"/>
+                      <a:srgbClr val="EEFCF7"/>
                     </a:solidFill>
                   </a:tcPr>
                 </a:tc>
@@ -7935,7 +7935,7 @@
             <a:avLst/>
           </a:prstGeom>
           <a:solidFill>
-            <a:srgbClr val="D0F1E6"/>
+            <a:srgbClr val="D1FAEC"/>
           </a:solidFill>
           <a:ln>
             <a:noFill/>
@@ -7964,7 +7964,7 @@
             <a:avLst/>
           </a:prstGeom>
           <a:solidFill>
-            <a:srgbClr val="246B53"/>
+            <a:srgbClr val="26C590"/>
           </a:solidFill>
           <a:ln>
             <a:noFill/>
@@ -8008,7 +8008,7 @@
             <a:r>
               <a:rPr sz="3000" b="1" i="0">
                 <a:solidFill>
-                  <a:srgbClr val="143D30"/>
+                  <a:srgbClr val="115F45"/>
                 </a:solidFill>
               </a:rPr>
               <a:t>월 보험료 한눈에</a:t>
@@ -8033,11 +8033,11 @@
             </a:avLst>
           </a:prstGeom>
           <a:solidFill>
-            <a:srgbClr val="F0FAF6"/>
+            <a:srgbClr val="EEFCF7"/>
           </a:solidFill>
           <a:ln w="15875">
             <a:solidFill>
-              <a:srgbClr val="D0F1E6"/>
+              <a:srgbClr val="D1FAEC"/>
             </a:solidFill>
           </a:ln>
         </p:spPr>
@@ -8064,7 +8064,7 @@
             <a:avLst/>
           </a:prstGeom>
           <a:solidFill>
-            <a:srgbClr val="246B53"/>
+            <a:srgbClr val="26C590"/>
           </a:solidFill>
           <a:ln>
             <a:noFill/>
@@ -8122,7 +8122,7 @@
             <a:r>
               <a:rPr sz="1700" b="1" i="0">
                 <a:solidFill>
-                  <a:srgbClr val="143D30"/>
+                  <a:srgbClr val="115F45"/>
                 </a:solidFill>
               </a:rPr>
               <a:t>월 보험료 합계</a:t>
@@ -8185,11 +8185,11 @@
             </a:avLst>
           </a:prstGeom>
           <a:solidFill>
-            <a:srgbClr val="F0FAF6"/>
+            <a:srgbClr val="EEFCF7"/>
           </a:solidFill>
           <a:ln w="15875">
             <a:solidFill>
-              <a:srgbClr val="D0F1E6"/>
+              <a:srgbClr val="D1FAEC"/>
             </a:solidFill>
           </a:ln>
         </p:spPr>
@@ -8216,7 +8216,7 @@
             <a:avLst/>
           </a:prstGeom>
           <a:solidFill>
-            <a:srgbClr val="246B53"/>
+            <a:srgbClr val="26C590"/>
           </a:solidFill>
           <a:ln>
             <a:noFill/>
@@ -8274,7 +8274,7 @@
             <a:r>
               <a:rPr sz="1700" b="1" i="0">
                 <a:solidFill>
-                  <a:srgbClr val="143D30"/>
+                  <a:srgbClr val="115F45"/>
                 </a:solidFill>
               </a:rPr>
               <a:t>연 보험료 합계</a:t>
@@ -8337,11 +8337,11 @@
             </a:avLst>
           </a:prstGeom>
           <a:solidFill>
-            <a:srgbClr val="F0FAF6"/>
+            <a:srgbClr val="EEFCF7"/>
           </a:solidFill>
           <a:ln w="15875">
             <a:solidFill>
-              <a:srgbClr val="D0F1E6"/>
+              <a:srgbClr val="D1FAEC"/>
             </a:solidFill>
           </a:ln>
         </p:spPr>
@@ -8368,7 +8368,7 @@
             <a:avLst/>
           </a:prstGeom>
           <a:solidFill>
-            <a:srgbClr val="246B53"/>
+            <a:srgbClr val="26C590"/>
           </a:solidFill>
           <a:ln>
             <a:noFill/>
@@ -8426,7 +8426,7 @@
             <a:r>
               <a:rPr sz="1700" b="1" i="0">
                 <a:solidFill>
-                  <a:srgbClr val="143D30"/>
+                  <a:srgbClr val="115F45"/>
                 </a:solidFill>
               </a:rPr>
               <a:t>월 소득 대비</a:t>
@@ -8551,7 +8551,7 @@
             <a:avLst/>
           </a:prstGeom>
           <a:solidFill>
-            <a:srgbClr val="D0F1E6"/>
+            <a:srgbClr val="D1FAEC"/>
           </a:solidFill>
           <a:ln>
             <a:noFill/>
@@ -8580,7 +8580,7 @@
             <a:avLst/>
           </a:prstGeom>
           <a:solidFill>
-            <a:srgbClr val="246B53"/>
+            <a:srgbClr val="26C590"/>
           </a:solidFill>
           <a:ln>
             <a:noFill/>
@@ -8624,7 +8624,7 @@
             <a:r>
               <a:rPr sz="3000" b="1" i="0">
                 <a:solidFill>
-                  <a:srgbClr val="143D30"/>
+                  <a:srgbClr val="115F45"/>
                 </a:solidFill>
               </a:rPr>
               <a:t>점검 메모와 다음 할 일</a:t>
@@ -8649,11 +8649,11 @@
             </a:avLst>
           </a:prstGeom>
           <a:solidFill>
-            <a:srgbClr val="F0FAF6"/>
+            <a:srgbClr val="EEFCF7"/>
           </a:solidFill>
           <a:ln w="15875">
             <a:solidFill>
-              <a:srgbClr val="D0F1E6"/>
+              <a:srgbClr val="D1FAEC"/>
             </a:solidFill>
           </a:ln>
         </p:spPr>
@@ -8680,7 +8680,7 @@
             <a:avLst/>
           </a:prstGeom>
           <a:solidFill>
-            <a:srgbClr val="246B53"/>
+            <a:srgbClr val="26C590"/>
           </a:solidFill>
           <a:ln>
             <a:noFill/>
@@ -8738,7 +8738,7 @@
             <a:r>
               <a:rPr sz="1800" b="1" i="0">
                 <a:solidFill>
-                  <a:srgbClr val="143D30"/>
+                  <a:srgbClr val="115F45"/>
                 </a:solidFill>
               </a:rPr>
               <a:t>확인할 것</a:t>
@@ -8801,11 +8801,11 @@
             </a:avLst>
           </a:prstGeom>
           <a:solidFill>
-            <a:srgbClr val="F0FAF6"/>
+            <a:srgbClr val="EEFCF7"/>
           </a:solidFill>
           <a:ln w="15875">
             <a:solidFill>
-              <a:srgbClr val="D0F1E6"/>
+              <a:srgbClr val="D1FAEC"/>
             </a:solidFill>
           </a:ln>
         </p:spPr>
@@ -8832,7 +8832,7 @@
             <a:avLst/>
           </a:prstGeom>
           <a:solidFill>
-            <a:srgbClr val="246B53"/>
+            <a:srgbClr val="26C590"/>
           </a:solidFill>
           <a:ln>
             <a:noFill/>
@@ -8890,7 +8890,7 @@
             <a:r>
               <a:rPr sz="1800" b="1" i="0">
                 <a:solidFill>
-                  <a:srgbClr val="143D30"/>
+                  <a:srgbClr val="115F45"/>
                 </a:solidFill>
               </a:rPr>
               <a:t>문의할 것</a:t>
@@ -8953,11 +8953,11 @@
             </a:avLst>
           </a:prstGeom>
           <a:solidFill>
-            <a:srgbClr val="F0FAF6"/>
+            <a:srgbClr val="EEFCF7"/>
           </a:solidFill>
           <a:ln w="15875">
             <a:solidFill>
-              <a:srgbClr val="D0F1E6"/>
+              <a:srgbClr val="D1FAEC"/>
             </a:solidFill>
           </a:ln>
         </p:spPr>
@@ -8984,7 +8984,7 @@
             <a:avLst/>
           </a:prstGeom>
           <a:solidFill>
-            <a:srgbClr val="246B53"/>
+            <a:srgbClr val="26C590"/>
           </a:solidFill>
           <a:ln>
             <a:noFill/>
@@ -9042,7 +9042,7 @@
             <a:r>
               <a:rPr sz="1800" b="1" i="0">
                 <a:solidFill>
-                  <a:srgbClr val="143D30"/>
+                  <a:srgbClr val="115F45"/>
                 </a:solidFill>
               </a:rPr>
               <a:t>정리할 날짜</a:t>
@@ -9145,34 +9145,34 @@
         <a:sysClr val="window" lastClr="FFFFFF"/>
       </a:lt1>
       <a:dk2>
-        <a:srgbClr val="143D30"/>
+        <a:srgbClr val="115F45"/>
       </a:dk2>
       <a:lt2>
-        <a:srgbClr val="F0FAF6"/>
+        <a:srgbClr val="EEFCF7"/>
       </a:lt2>
       <a:accent1>
-        <a:srgbClr val="246B53"/>
+        <a:srgbClr val="26C590"/>
       </a:accent1>
       <a:accent2>
-        <a:srgbClr val="913B83"/>
+        <a:srgbClr val="209DB6"/>
       </a:accent2>
       <a:accent3>
-        <a:srgbClr val="143D30"/>
+        <a:srgbClr val="115F45"/>
       </a:accent3>
       <a:accent4>
-        <a:srgbClr val="D0F1E6"/>
+        <a:srgbClr val="D1FAEC"/>
       </a:accent4>
       <a:accent5>
-        <a:srgbClr val="5A536B"/>
+        <a:srgbClr val="23B1A3"/>
       </a:accent5>
       <a:accent6>
-        <a:srgbClr val="728B83"/>
+        <a:srgbClr val="709F8F"/>
       </a:accent6>
       <a:hlink>
-        <a:srgbClr val="246B53"/>
+        <a:srgbClr val="26C590"/>
       </a:hlink>
       <a:folHlink>
-        <a:srgbClr val="143D30"/>
+        <a:srgbClr val="115F45"/>
       </a:folHlink>
     </a:clrScheme>
     <a:fontScheme name="Office">

--- a/public/fun/pack/pptx/review/보장점검양식_19_부모님점검_반딧불마을.pptx
+++ b/public/fun/pack/pptx/review/보장점검양식_19_부모님점검_반딧불마을.pptx
@@ -3286,6 +3286,14 @@
 <file path=ppt/slides/slide1.xml><?xml version="1.0" encoding="utf-8"?>
 <p:sld xmlns:a="http://schemas.openxmlformats.org/drawingml/2006/main" xmlns:p="http://schemas.openxmlformats.org/presentationml/2006/main" xmlns:r="http://schemas.openxmlformats.org/officeDocument/2006/relationships">
   <p:cSld>
+    <p:bg>
+      <p:bgPr>
+        <a:solidFill>
+          <a:srgbClr val="27493E"/>
+        </a:solidFill>
+        <a:effectLst/>
+      </p:bgPr>
+    </p:bg>
     <p:spTree>
       <p:nvGrpSpPr>
         <p:cNvPr id="1" name=""/>
@@ -3293,30 +3301,106 @@
         <p:nvPr/>
       </p:nvGrpSpPr>
       <p:grpSpPr/>
-      <p:pic>
-        <p:nvPicPr>
-          <p:cNvPr id="3" name="표지 그림" descr="review-19.jpg"/>
-          <p:cNvPicPr>
-            <a:picLocks noChangeAspect="1"/>
-          </p:cNvPicPr>
+      <p:sp>
+        <p:nvSpPr>
+          <p:cNvPr id="3" name="장식"/>
+          <p:cNvSpPr/>
           <p:nvPr/>
-        </p:nvPicPr>
-        <p:blipFill>
-          <a:blip r:embed="rId2"/>
-          <a:stretch>
-            <a:fillRect/>
-          </a:stretch>
-        </p:blipFill>
-        <p:spPr>
-          <a:xfrm>
-            <a:off x="0" y="0"/>
-            <a:ext cx="12191695" cy="6858000"/>
+        </p:nvSpPr>
+        <p:spPr>
+          <a:xfrm>
+            <a:off x="7071183" y="960120"/>
+            <a:ext cx="3657508" cy="4526280"/>
+          </a:xfrm>
+          <a:prstGeom prst="roundRect">
+            <a:avLst>
+              <a:gd name="adj" fmla="val 4000"/>
+            </a:avLst>
+          </a:prstGeom>
+          <a:solidFill>
+            <a:srgbClr val="7BEAC5"/>
+          </a:solidFill>
+          <a:ln>
+            <a:noFill/>
+          </a:ln>
+        </p:spPr>
+        <p:txBody>
+          <a:bodyPr rtlCol="0" anchor="ctr"/>
+          <a:lstStyle/>
+          <a:p>
+            <a:pPr algn="ctr"/>
+          </a:p>
+        </p:txBody>
+      </p:sp>
+      <p:sp>
+        <p:nvSpPr>
+          <p:cNvPr id="4" name="장식"/>
+          <p:cNvSpPr/>
+          <p:nvPr/>
+        </p:nvSpPr>
+        <p:spPr>
+          <a:xfrm>
+            <a:off x="7558851" y="1234439"/>
+            <a:ext cx="3657508" cy="4526280"/>
+          </a:xfrm>
+          <a:prstGeom prst="roundRect">
+            <a:avLst>
+              <a:gd name="adj" fmla="val 4000"/>
+            </a:avLst>
+          </a:prstGeom>
+          <a:noFill/>
+          <a:ln w="9525">
+            <a:solidFill>
+              <a:srgbClr val="FFFFFF"/>
+            </a:solidFill>
+          </a:ln>
+        </p:spPr>
+        <p:txBody>
+          <a:bodyPr rtlCol="0" anchor="ctr"/>
+          <a:lstStyle/>
+          <a:p>
+            <a:pPr algn="ctr"/>
+          </a:p>
+        </p:txBody>
+      </p:sp>
+      <p:sp>
+        <p:nvSpPr>
+          <p:cNvPr id="5" name="라벨"/>
+          <p:cNvSpPr txBox="1"/>
+          <p:nvPr/>
+        </p:nvSpPr>
+        <p:spPr>
+          <a:xfrm>
+            <a:off x="822960" y="2148840"/>
+            <a:ext cx="5608179" cy="274320"/>
           </a:xfrm>
           <a:prstGeom prst="rect">
             <a:avLst/>
           </a:prstGeom>
-        </p:spPr>
-      </p:pic>
+          <a:noFill/>
+        </p:spPr>
+        <p:txBody>
+          <a:bodyPr wrap="square" lIns="54864" rIns="54864" tIns="27432" bIns="27432" anchor="t">
+            <a:noAutofit/>
+          </a:bodyPr>
+          <a:lstStyle/>
+          <a:p>
+            <a:pPr algn="l">
+              <a:lnSpc>
+                <a:spcPct val="115000"/>
+              </a:lnSpc>
+            </a:pPr>
+            <a:r>
+              <a:rPr sz="1000" b="1" i="0" spc="250">
+                <a:solidFill>
+                  <a:srgbClr val="FFFFFF"/>
+                </a:solidFill>
+              </a:rPr>
+              <a:t>INSURANCE CHECK</a:t>
+            </a:r>
+          </a:p>
+        </p:txBody>
+      </p:sp>
       <p:sp>
         <p:nvSpPr>
           <p:cNvPr id="2" name="Title 1"/>
@@ -3329,8 +3413,8 @@
         </p:nvSpPr>
         <p:spPr>
           <a:xfrm>
-            <a:off x="853418" y="2057400"/>
-            <a:ext cx="6095847" cy="1554480"/>
+            <a:off x="822960" y="2606040"/>
+            <a:ext cx="5608179" cy="1188720"/>
           </a:xfrm>
         </p:spPr>
         <p:txBody>
@@ -3347,7 +3431,7 @@
             <a:r>
               <a:rPr sz="3600" b="1" i="0">
                 <a:solidFill>
-                  <a:srgbClr val="115F45"/>
+                  <a:srgbClr val="FFFFFF"/>
                 </a:solidFill>
               </a:rPr>
               <a:t>우리 보험 점검 시간</a:t>
@@ -3357,14 +3441,14 @@
       </p:sp>
       <p:sp>
         <p:nvSpPr>
-          <p:cNvPr id="4" name="한 줄 문구"/>
+          <p:cNvPr id="6" name="한 줄 문구"/>
           <p:cNvSpPr txBox="1"/>
           <p:nvPr/>
         </p:nvSpPr>
         <p:spPr>
           <a:xfrm>
-            <a:off x="853418" y="3749039"/>
-            <a:ext cx="6095847" cy="822960"/>
+            <a:off x="822960" y="3886200"/>
+            <a:ext cx="5608179" cy="822960"/>
           </a:xfrm>
           <a:prstGeom prst="rect">
             <a:avLst/>
@@ -3383,9 +3467,9 @@
               </a:lnSpc>
             </a:pPr>
             <a:r>
-              <a:rPr sz="1700" b="0" i="1">
+              <a:rPr sz="1700" b="0" i="0">
                 <a:solidFill>
-                  <a:srgbClr val="115F45"/>
+                  <a:srgbClr val="FFFFFF"/>
                 </a:solidFill>
               </a:rPr>
               <a:t>연세와 건강 상태를 메모해 둡니다</a:t>
@@ -3395,14 +3479,14 @@
       </p:sp>
       <p:sp>
         <p:nvSpPr>
-          <p:cNvPr id="5" name="안내 문구"/>
+          <p:cNvPr id="7" name="안내 문구"/>
           <p:cNvSpPr txBox="1"/>
           <p:nvPr/>
         </p:nvSpPr>
         <p:spPr>
           <a:xfrm>
-            <a:off x="853418" y="4617720"/>
-            <a:ext cx="6095847" cy="914400"/>
+            <a:off x="822960" y="4754880"/>
+            <a:ext cx="5608179" cy="914400"/>
           </a:xfrm>
           <a:prstGeom prst="rect">
             <a:avLst/>
@@ -3423,10 +3507,10 @@
             <a:r>
               <a:rPr sz="1400" b="0" i="0">
                 <a:solidFill>
-                  <a:srgbClr val="666666"/>
+                  <a:srgbClr val="FFFFFF"/>
                 </a:solidFill>
               </a:rPr>
-              <a:t>부모님 점검 · 2027. 00. 00</a:t>
+              <a:t>부모님 점검 · 날짜 입력</a:t>
             </a:r>
           </a:p>
           <a:p>
@@ -3438,7 +3522,7 @@
             <a:r>
               <a:rPr sz="1400" b="0" i="0">
                 <a:solidFill>
-                  <a:srgbClr val="666666"/>
+                  <a:srgbClr val="FFFFFF"/>
                 </a:solidFill>
               </a:rPr>
               <a:t>가입 내용을 정리하고 함께 확인하는 양식</a:t>
@@ -3460,7 +3544,7 @@
     <p:bg>
       <p:bgPr>
         <a:solidFill>
-          <a:srgbClr val="FFFFFF"/>
+          <a:srgbClr val="EAFDF7"/>
         </a:solidFill>
         <a:effectLst/>
       </p:bgPr>
@@ -3480,14 +3564,14 @@
         </p:nvSpPr>
         <p:spPr>
           <a:xfrm>
-            <a:off x="9905695" y="-1463040"/>
-            <a:ext cx="3840480" cy="3840480"/>
+            <a:off x="10180015" y="-1645920"/>
+            <a:ext cx="3474720" cy="3474720"/>
           </a:xfrm>
           <a:prstGeom prst="ellipse">
             <a:avLst/>
           </a:prstGeom>
           <a:solidFill>
-            <a:srgbClr val="D1FAEC"/>
+            <a:srgbClr val="A5F3D9"/>
           </a:solidFill>
           <a:ln>
             <a:noFill/>
@@ -3503,20 +3587,58 @@
       </p:sp>
       <p:sp>
         <p:nvSpPr>
-          <p:cNvPr id="4" name="장식"/>
+          <p:cNvPr id="4" name="상단 라벨"/>
+          <p:cNvSpPr txBox="1"/>
+          <p:nvPr/>
+        </p:nvSpPr>
+        <p:spPr>
+          <a:xfrm>
+            <a:off x="640080" y="274320"/>
+            <a:ext cx="5486400" cy="274320"/>
+          </a:xfrm>
+          <a:prstGeom prst="rect">
+            <a:avLst/>
+          </a:prstGeom>
+          <a:noFill/>
+        </p:spPr>
+        <p:txBody>
+          <a:bodyPr wrap="square" lIns="54864" rIns="54864" tIns="27432" bIns="27432" anchor="ctr">
+            <a:noAutofit/>
+          </a:bodyPr>
+          <a:lstStyle/>
+          <a:p>
+            <a:pPr algn="l">
+              <a:lnSpc>
+                <a:spcPct val="115000"/>
+              </a:lnSpc>
+            </a:pPr>
+            <a:r>
+              <a:rPr sz="900" b="1" i="0" spc="250">
+                <a:solidFill>
+                  <a:srgbClr val="26231F"/>
+                </a:solidFill>
+              </a:rPr>
+              <a:t>INSURANCE CHECK</a:t>
+            </a:r>
+          </a:p>
+        </p:txBody>
+      </p:sp>
+      <p:sp>
+        <p:nvSpPr>
+          <p:cNvPr id="5" name="포인트"/>
           <p:cNvSpPr/>
           <p:nvPr/>
         </p:nvSpPr>
         <p:spPr>
           <a:xfrm>
-            <a:off x="11094415" y="274320"/>
-            <a:ext cx="411480" cy="411480"/>
-          </a:xfrm>
-          <a:prstGeom prst="ellipse">
+            <a:off x="11048695" y="502919"/>
+            <a:ext cx="274320" cy="109728"/>
+          </a:xfrm>
+          <a:prstGeom prst="wave">
             <a:avLst/>
           </a:prstGeom>
           <a:solidFill>
-            <a:srgbClr val="26C590"/>
+            <a:srgbClr val="FFFFFF"/>
           </a:solidFill>
           <a:ln>
             <a:noFill/>
@@ -3542,8 +3664,8 @@
         </p:nvSpPr>
         <p:spPr>
           <a:xfrm>
-            <a:off x="640080" y="457200"/>
-            <a:ext cx="9722815" cy="868680"/>
+            <a:off x="640080" y="658368"/>
+            <a:ext cx="9082735" cy="868680"/>
           </a:xfrm>
         </p:spPr>
         <p:txBody>
@@ -3560,7 +3682,7 @@
             <a:r>
               <a:rPr sz="3000" b="1" i="0">
                 <a:solidFill>
-                  <a:srgbClr val="115F45"/>
+                  <a:srgbClr val="26231F"/>
                 </a:solidFill>
               </a:rPr>
               <a:t>점검 대상 현황</a:t>
@@ -3570,14 +3692,14 @@
       </p:sp>
       <p:graphicFrame>
         <p:nvGraphicFramePr>
-          <p:cNvPr id="5" name="표"/>
+          <p:cNvPr id="6" name="표"/>
           <p:cNvGraphicFramePr>
             <a:graphicFrameLocks noGrp="1"/>
           </p:cNvGraphicFramePr>
           <p:nvPr/>
         </p:nvGraphicFramePr>
         <p:xfrm>
-          <a:off x="640080" y="1600200"/>
+          <a:off x="640080" y="1783080"/>
           <a:ext cx="10911534" cy="3657600"/>
         </p:xfrm>
         <a:graphic>
@@ -3601,7 +3723,7 @@
                       <a:r>
                         <a:rPr sz="1600" b="1">
                           <a:solidFill>
-                            <a:srgbClr val="FFFFFF"/>
+                            <a:srgbClr val="26231F"/>
                           </a:solidFill>
                         </a:rPr>
                         <a:t>구분</a:t>
@@ -3611,30 +3733,30 @@
                   <a:tcPr anchor="ctr" marL="73152" marR="73152">
                     <a:lnL w="9525" cap="flat" cmpd="sng" algn="ctr">
                       <a:solidFill>
-                        <a:srgbClr val="26C590"/>
+                        <a:srgbClr val="7BEAC5"/>
                       </a:solidFill>
                       <a:prstDash val="solid"/>
                     </a:lnL>
                     <a:lnR w="9525" cap="flat" cmpd="sng" algn="ctr">
                       <a:solidFill>
-                        <a:srgbClr val="26C590"/>
+                        <a:srgbClr val="7BEAC5"/>
                       </a:solidFill>
                       <a:prstDash val="solid"/>
                     </a:lnR>
                     <a:lnT w="9525" cap="flat" cmpd="sng" algn="ctr">
                       <a:solidFill>
-                        <a:srgbClr val="26C590"/>
+                        <a:srgbClr val="7BEAC5"/>
                       </a:solidFill>
                       <a:prstDash val="solid"/>
                     </a:lnT>
                     <a:lnB w="9525" cap="flat" cmpd="sng" algn="ctr">
                       <a:solidFill>
-                        <a:srgbClr val="26C590"/>
+                        <a:srgbClr val="7BEAC5"/>
                       </a:solidFill>
                       <a:prstDash val="solid"/>
                     </a:lnB>
                     <a:solidFill>
-                      <a:srgbClr val="26C590"/>
+                      <a:srgbClr val="7BEAC5"/>
                     </a:solidFill>
                   </a:tcPr>
                 </a:tc>
@@ -3647,7 +3769,7 @@
                       <a:r>
                         <a:rPr sz="1600" b="1">
                           <a:solidFill>
-                            <a:srgbClr val="FFFFFF"/>
+                            <a:srgbClr val="26231F"/>
                           </a:solidFill>
                         </a:rPr>
                         <a:t>아버지</a:t>
@@ -3657,30 +3779,30 @@
                   <a:tcPr anchor="ctr" marL="73152" marR="73152">
                     <a:lnL w="9525" cap="flat" cmpd="sng" algn="ctr">
                       <a:solidFill>
-                        <a:srgbClr val="26C590"/>
+                        <a:srgbClr val="7BEAC5"/>
                       </a:solidFill>
                       <a:prstDash val="solid"/>
                     </a:lnL>
                     <a:lnR w="9525" cap="flat" cmpd="sng" algn="ctr">
                       <a:solidFill>
-                        <a:srgbClr val="26C590"/>
+                        <a:srgbClr val="7BEAC5"/>
                       </a:solidFill>
                       <a:prstDash val="solid"/>
                     </a:lnR>
                     <a:lnT w="9525" cap="flat" cmpd="sng" algn="ctr">
                       <a:solidFill>
-                        <a:srgbClr val="26C590"/>
+                        <a:srgbClr val="7BEAC5"/>
                       </a:solidFill>
                       <a:prstDash val="solid"/>
                     </a:lnT>
                     <a:lnB w="9525" cap="flat" cmpd="sng" algn="ctr">
                       <a:solidFill>
-                        <a:srgbClr val="26C590"/>
+                        <a:srgbClr val="7BEAC5"/>
                       </a:solidFill>
                       <a:prstDash val="solid"/>
                     </a:lnB>
                     <a:solidFill>
-                      <a:srgbClr val="26C590"/>
+                      <a:srgbClr val="7BEAC5"/>
                     </a:solidFill>
                   </a:tcPr>
                 </a:tc>
@@ -3693,7 +3815,7 @@
                       <a:r>
                         <a:rPr sz="1600" b="1">
                           <a:solidFill>
-                            <a:srgbClr val="FFFFFF"/>
+                            <a:srgbClr val="26231F"/>
                           </a:solidFill>
                         </a:rPr>
                         <a:t>어머니</a:t>
@@ -3703,30 +3825,30 @@
                   <a:tcPr anchor="ctr" marL="73152" marR="73152">
                     <a:lnL w="9525" cap="flat" cmpd="sng" algn="ctr">
                       <a:solidFill>
-                        <a:srgbClr val="26C590"/>
+                        <a:srgbClr val="7BEAC5"/>
                       </a:solidFill>
                       <a:prstDash val="solid"/>
                     </a:lnL>
                     <a:lnR w="9525" cap="flat" cmpd="sng" algn="ctr">
                       <a:solidFill>
-                        <a:srgbClr val="26C590"/>
+                        <a:srgbClr val="7BEAC5"/>
                       </a:solidFill>
                       <a:prstDash val="solid"/>
                     </a:lnR>
                     <a:lnT w="9525" cap="flat" cmpd="sng" algn="ctr">
                       <a:solidFill>
-                        <a:srgbClr val="26C590"/>
+                        <a:srgbClr val="7BEAC5"/>
                       </a:solidFill>
                       <a:prstDash val="solid"/>
                     </a:lnT>
                     <a:lnB w="9525" cap="flat" cmpd="sng" algn="ctr">
                       <a:solidFill>
-                        <a:srgbClr val="26C590"/>
+                        <a:srgbClr val="7BEAC5"/>
                       </a:solidFill>
                       <a:prstDash val="solid"/>
                     </a:lnB>
                     <a:solidFill>
-                      <a:srgbClr val="26C590"/>
+                      <a:srgbClr val="7BEAC5"/>
                     </a:solidFill>
                   </a:tcPr>
                 </a:tc>
@@ -3741,7 +3863,7 @@
                       <a:r>
                         <a:rPr sz="1600" b="1">
                           <a:solidFill>
-                            <a:srgbClr val="115F45"/>
+                            <a:srgbClr val="27493E"/>
                           </a:solidFill>
                         </a:rPr>
                         <a:t>성함</a:t>
@@ -3787,7 +3909,7 @@
                       <a:r>
                         <a:rPr sz="1600" b="0">
                           <a:solidFill>
-                            <a:srgbClr val="2B2B2B"/>
+                            <a:srgbClr val="26231F"/>
                           </a:solidFill>
                         </a:rPr>
                         <a:t/>
@@ -3833,7 +3955,7 @@
                       <a:r>
                         <a:rPr sz="1600" b="0">
                           <a:solidFill>
-                            <a:srgbClr val="2B2B2B"/>
+                            <a:srgbClr val="26231F"/>
                           </a:solidFill>
                         </a:rPr>
                         <a:t/>
@@ -3881,7 +4003,7 @@
                       <a:r>
                         <a:rPr sz="1600" b="1">
                           <a:solidFill>
-                            <a:srgbClr val="115F45"/>
+                            <a:srgbClr val="27493E"/>
                           </a:solidFill>
                         </a:rPr>
                         <a:t>연세</a:t>
@@ -3927,7 +4049,7 @@
                       <a:r>
                         <a:rPr sz="1600" b="0">
                           <a:solidFill>
-                            <a:srgbClr val="2B2B2B"/>
+                            <a:srgbClr val="26231F"/>
                           </a:solidFill>
                         </a:rPr>
                         <a:t/>
@@ -3960,7 +4082,7 @@
                       <a:prstDash val="solid"/>
                     </a:lnB>
                     <a:solidFill>
-                      <a:srgbClr val="EEFCF7"/>
+                      <a:srgbClr val="EAFDF7"/>
                     </a:solidFill>
                   </a:tcPr>
                 </a:tc>
@@ -3973,7 +4095,7 @@
                       <a:r>
                         <a:rPr sz="1600" b="0">
                           <a:solidFill>
-                            <a:srgbClr val="2B2B2B"/>
+                            <a:srgbClr val="26231F"/>
                           </a:solidFill>
                         </a:rPr>
                         <a:t/>
@@ -4006,7 +4128,7 @@
                       <a:prstDash val="solid"/>
                     </a:lnB>
                     <a:solidFill>
-                      <a:srgbClr val="EEFCF7"/>
+                      <a:srgbClr val="EAFDF7"/>
                     </a:solidFill>
                   </a:tcPr>
                 </a:tc>
@@ -4021,7 +4143,7 @@
                       <a:r>
                         <a:rPr sz="1600" b="1">
                           <a:solidFill>
-                            <a:srgbClr val="115F45"/>
+                            <a:srgbClr val="27493E"/>
                           </a:solidFill>
                         </a:rPr>
                         <a:t>건강 상태 메모</a:t>
@@ -4067,7 +4189,7 @@
                       <a:r>
                         <a:rPr sz="1600" b="0">
                           <a:solidFill>
-                            <a:srgbClr val="2B2B2B"/>
+                            <a:srgbClr val="26231F"/>
                           </a:solidFill>
                         </a:rPr>
                         <a:t/>
@@ -4113,7 +4235,7 @@
                       <a:r>
                         <a:rPr sz="1600" b="0">
                           <a:solidFill>
-                            <a:srgbClr val="2B2B2B"/>
+                            <a:srgbClr val="26231F"/>
                           </a:solidFill>
                         </a:rPr>
                         <a:t/>
@@ -4161,7 +4283,7 @@
                       <a:r>
                         <a:rPr sz="1600" b="1">
                           <a:solidFill>
-                            <a:srgbClr val="115F45"/>
+                            <a:srgbClr val="27493E"/>
                           </a:solidFill>
                         </a:rPr>
                         <a:t>함께 확인할 것</a:t>
@@ -4207,7 +4329,7 @@
                       <a:r>
                         <a:rPr sz="1600" b="0">
                           <a:solidFill>
-                            <a:srgbClr val="2B2B2B"/>
+                            <a:srgbClr val="26231F"/>
                           </a:solidFill>
                         </a:rPr>
                         <a:t/>
@@ -4240,7 +4362,7 @@
                       <a:prstDash val="solid"/>
                     </a:lnB>
                     <a:solidFill>
-                      <a:srgbClr val="EEFCF7"/>
+                      <a:srgbClr val="EAFDF7"/>
                     </a:solidFill>
                   </a:tcPr>
                 </a:tc>
@@ -4253,7 +4375,7 @@
                       <a:r>
                         <a:rPr sz="1600" b="0">
                           <a:solidFill>
-                            <a:srgbClr val="2B2B2B"/>
+                            <a:srgbClr val="26231F"/>
                           </a:solidFill>
                         </a:rPr>
                         <a:t/>
@@ -4286,7 +4408,7 @@
                       <a:prstDash val="solid"/>
                     </a:lnB>
                     <a:solidFill>
-                      <a:srgbClr val="EEFCF7"/>
+                      <a:srgbClr val="EAFDF7"/>
                     </a:solidFill>
                   </a:tcPr>
                 </a:tc>
@@ -4309,7 +4431,7 @@
     <p:bg>
       <p:bgPr>
         <a:solidFill>
-          <a:srgbClr val="FFFFFF"/>
+          <a:srgbClr val="EAFDF7"/>
         </a:solidFill>
         <a:effectLst/>
       </p:bgPr>
@@ -4329,14 +4451,14 @@
         </p:nvSpPr>
         <p:spPr>
           <a:xfrm>
-            <a:off x="9905695" y="-1463040"/>
-            <a:ext cx="3840480" cy="3840480"/>
+            <a:off x="10180015" y="-1645920"/>
+            <a:ext cx="3474720" cy="3474720"/>
           </a:xfrm>
           <a:prstGeom prst="ellipse">
             <a:avLst/>
           </a:prstGeom>
           <a:solidFill>
-            <a:srgbClr val="D1FAEC"/>
+            <a:srgbClr val="A5F3D9"/>
           </a:solidFill>
           <a:ln>
             <a:noFill/>
@@ -4352,20 +4474,58 @@
       </p:sp>
       <p:sp>
         <p:nvSpPr>
-          <p:cNvPr id="4" name="장식"/>
+          <p:cNvPr id="4" name="상단 라벨"/>
+          <p:cNvSpPr txBox="1"/>
+          <p:nvPr/>
+        </p:nvSpPr>
+        <p:spPr>
+          <a:xfrm>
+            <a:off x="640080" y="274320"/>
+            <a:ext cx="5486400" cy="274320"/>
+          </a:xfrm>
+          <a:prstGeom prst="rect">
+            <a:avLst/>
+          </a:prstGeom>
+          <a:noFill/>
+        </p:spPr>
+        <p:txBody>
+          <a:bodyPr wrap="square" lIns="54864" rIns="54864" tIns="27432" bIns="27432" anchor="ctr">
+            <a:noAutofit/>
+          </a:bodyPr>
+          <a:lstStyle/>
+          <a:p>
+            <a:pPr algn="l">
+              <a:lnSpc>
+                <a:spcPct val="115000"/>
+              </a:lnSpc>
+            </a:pPr>
+            <a:r>
+              <a:rPr sz="900" b="1" i="0" spc="250">
+                <a:solidFill>
+                  <a:srgbClr val="26231F"/>
+                </a:solidFill>
+              </a:rPr>
+              <a:t>INSURANCE CHECK</a:t>
+            </a:r>
+          </a:p>
+        </p:txBody>
+      </p:sp>
+      <p:sp>
+        <p:nvSpPr>
+          <p:cNvPr id="5" name="포인트"/>
           <p:cNvSpPr/>
           <p:nvPr/>
         </p:nvSpPr>
         <p:spPr>
           <a:xfrm>
-            <a:off x="11094415" y="274320"/>
-            <a:ext cx="411480" cy="411480"/>
-          </a:xfrm>
-          <a:prstGeom prst="ellipse">
+            <a:off x="11048695" y="502919"/>
+            <a:ext cx="274320" cy="109728"/>
+          </a:xfrm>
+          <a:prstGeom prst="wave">
             <a:avLst/>
           </a:prstGeom>
           <a:solidFill>
-            <a:srgbClr val="26C590"/>
+            <a:srgbClr val="FFFFFF"/>
           </a:solidFill>
           <a:ln>
             <a:noFill/>
@@ -4391,8 +4551,8 @@
         </p:nvSpPr>
         <p:spPr>
           <a:xfrm>
-            <a:off x="640080" y="457200"/>
-            <a:ext cx="9722815" cy="868680"/>
+            <a:off x="640080" y="658368"/>
+            <a:ext cx="9082735" cy="868680"/>
           </a:xfrm>
         </p:spPr>
         <p:txBody>
@@ -4409,7 +4569,7 @@
             <a:r>
               <a:rPr sz="3000" b="1" i="0">
                 <a:solidFill>
-                  <a:srgbClr val="115F45"/>
+                  <a:srgbClr val="26231F"/>
                 </a:solidFill>
               </a:rPr>
               <a:t>가입한 보험 목록</a:t>
@@ -4419,14 +4579,14 @@
       </p:sp>
       <p:graphicFrame>
         <p:nvGraphicFramePr>
-          <p:cNvPr id="5" name="표"/>
+          <p:cNvPr id="6" name="표"/>
           <p:cNvGraphicFramePr>
             <a:graphicFrameLocks noGrp="1"/>
           </p:cNvGraphicFramePr>
           <p:nvPr/>
         </p:nvGraphicFramePr>
         <p:xfrm>
-          <a:off x="640080" y="1600200"/>
+          <a:off x="640080" y="1783080"/>
           <a:ext cx="10911535" cy="4224528"/>
         </p:xfrm>
         <a:graphic>
@@ -4452,7 +4612,7 @@
                       <a:r>
                         <a:rPr sz="1400" b="1">
                           <a:solidFill>
-                            <a:srgbClr val="FFFFFF"/>
+                            <a:srgbClr val="26231F"/>
                           </a:solidFill>
                         </a:rPr>
                         <a:t>보험회사</a:t>
@@ -4462,30 +4622,30 @@
                   <a:tcPr anchor="ctr" marL="73152" marR="73152">
                     <a:lnL w="9525" cap="flat" cmpd="sng" algn="ctr">
                       <a:solidFill>
-                        <a:srgbClr val="26C590"/>
+                        <a:srgbClr val="7BEAC5"/>
                       </a:solidFill>
                       <a:prstDash val="solid"/>
                     </a:lnL>
                     <a:lnR w="9525" cap="flat" cmpd="sng" algn="ctr">
                       <a:solidFill>
-                        <a:srgbClr val="26C590"/>
+                        <a:srgbClr val="7BEAC5"/>
                       </a:solidFill>
                       <a:prstDash val="solid"/>
                     </a:lnR>
                     <a:lnT w="9525" cap="flat" cmpd="sng" algn="ctr">
                       <a:solidFill>
-                        <a:srgbClr val="26C590"/>
+                        <a:srgbClr val="7BEAC5"/>
                       </a:solidFill>
                       <a:prstDash val="solid"/>
                     </a:lnT>
                     <a:lnB w="9525" cap="flat" cmpd="sng" algn="ctr">
                       <a:solidFill>
-                        <a:srgbClr val="26C590"/>
+                        <a:srgbClr val="7BEAC5"/>
                       </a:solidFill>
                       <a:prstDash val="solid"/>
                     </a:lnB>
                     <a:solidFill>
-                      <a:srgbClr val="26C590"/>
+                      <a:srgbClr val="7BEAC5"/>
                     </a:solidFill>
                   </a:tcPr>
                 </a:tc>
@@ -4498,7 +4658,7 @@
                       <a:r>
                         <a:rPr sz="1400" b="1">
                           <a:solidFill>
-                            <a:srgbClr val="FFFFFF"/>
+                            <a:srgbClr val="26231F"/>
                           </a:solidFill>
                         </a:rPr>
                         <a:t>상품명</a:t>
@@ -4508,30 +4668,30 @@
                   <a:tcPr anchor="ctr" marL="73152" marR="73152">
                     <a:lnL w="9525" cap="flat" cmpd="sng" algn="ctr">
                       <a:solidFill>
-                        <a:srgbClr val="26C590"/>
+                        <a:srgbClr val="7BEAC5"/>
                       </a:solidFill>
                       <a:prstDash val="solid"/>
                     </a:lnL>
                     <a:lnR w="9525" cap="flat" cmpd="sng" algn="ctr">
                       <a:solidFill>
-                        <a:srgbClr val="26C590"/>
+                        <a:srgbClr val="7BEAC5"/>
                       </a:solidFill>
                       <a:prstDash val="solid"/>
                     </a:lnR>
                     <a:lnT w="9525" cap="flat" cmpd="sng" algn="ctr">
                       <a:solidFill>
-                        <a:srgbClr val="26C590"/>
+                        <a:srgbClr val="7BEAC5"/>
                       </a:solidFill>
                       <a:prstDash val="solid"/>
                     </a:lnT>
                     <a:lnB w="9525" cap="flat" cmpd="sng" algn="ctr">
                       <a:solidFill>
-                        <a:srgbClr val="26C590"/>
+                        <a:srgbClr val="7BEAC5"/>
                       </a:solidFill>
                       <a:prstDash val="solid"/>
                     </a:lnB>
                     <a:solidFill>
-                      <a:srgbClr val="26C590"/>
+                      <a:srgbClr val="7BEAC5"/>
                     </a:solidFill>
                   </a:tcPr>
                 </a:tc>
@@ -4544,7 +4704,7 @@
                       <a:r>
                         <a:rPr sz="1400" b="1">
                           <a:solidFill>
-                            <a:srgbClr val="FFFFFF"/>
+                            <a:srgbClr val="26231F"/>
                           </a:solidFill>
                         </a:rPr>
                         <a:t>종류</a:t>
@@ -4554,30 +4714,30 @@
                   <a:tcPr anchor="ctr" marL="73152" marR="73152">
                     <a:lnL w="9525" cap="flat" cmpd="sng" algn="ctr">
                       <a:solidFill>
-                        <a:srgbClr val="26C590"/>
+                        <a:srgbClr val="7BEAC5"/>
                       </a:solidFill>
                       <a:prstDash val="solid"/>
                     </a:lnL>
                     <a:lnR w="9525" cap="flat" cmpd="sng" algn="ctr">
                       <a:solidFill>
-                        <a:srgbClr val="26C590"/>
+                        <a:srgbClr val="7BEAC5"/>
                       </a:solidFill>
                       <a:prstDash val="solid"/>
                     </a:lnR>
                     <a:lnT w="9525" cap="flat" cmpd="sng" algn="ctr">
                       <a:solidFill>
-                        <a:srgbClr val="26C590"/>
+                        <a:srgbClr val="7BEAC5"/>
                       </a:solidFill>
                       <a:prstDash val="solid"/>
                     </a:lnT>
                     <a:lnB w="9525" cap="flat" cmpd="sng" algn="ctr">
                       <a:solidFill>
-                        <a:srgbClr val="26C590"/>
+                        <a:srgbClr val="7BEAC5"/>
                       </a:solidFill>
                       <a:prstDash val="solid"/>
                     </a:lnB>
                     <a:solidFill>
-                      <a:srgbClr val="26C590"/>
+                      <a:srgbClr val="7BEAC5"/>
                     </a:solidFill>
                   </a:tcPr>
                 </a:tc>
@@ -4590,7 +4750,7 @@
                       <a:r>
                         <a:rPr sz="1400" b="1">
                           <a:solidFill>
-                            <a:srgbClr val="FFFFFF"/>
+                            <a:srgbClr val="26231F"/>
                           </a:solidFill>
                         </a:rPr>
                         <a:t>만기일</a:t>
@@ -4600,30 +4760,30 @@
                   <a:tcPr anchor="ctr" marL="73152" marR="73152">
                     <a:lnL w="9525" cap="flat" cmpd="sng" algn="ctr">
                       <a:solidFill>
-                        <a:srgbClr val="26C590"/>
+                        <a:srgbClr val="7BEAC5"/>
                       </a:solidFill>
                       <a:prstDash val="solid"/>
                     </a:lnL>
                     <a:lnR w="9525" cap="flat" cmpd="sng" algn="ctr">
                       <a:solidFill>
-                        <a:srgbClr val="26C590"/>
+                        <a:srgbClr val="7BEAC5"/>
                       </a:solidFill>
                       <a:prstDash val="solid"/>
                     </a:lnR>
                     <a:lnT w="9525" cap="flat" cmpd="sng" algn="ctr">
                       <a:solidFill>
-                        <a:srgbClr val="26C590"/>
+                        <a:srgbClr val="7BEAC5"/>
                       </a:solidFill>
                       <a:prstDash val="solid"/>
                     </a:lnT>
                     <a:lnB w="9525" cap="flat" cmpd="sng" algn="ctr">
                       <a:solidFill>
-                        <a:srgbClr val="26C590"/>
+                        <a:srgbClr val="7BEAC5"/>
                       </a:solidFill>
                       <a:prstDash val="solid"/>
                     </a:lnB>
                     <a:solidFill>
-                      <a:srgbClr val="26C590"/>
+                      <a:srgbClr val="7BEAC5"/>
                     </a:solidFill>
                   </a:tcPr>
                 </a:tc>
@@ -4636,7 +4796,7 @@
                       <a:r>
                         <a:rPr sz="1400" b="1">
                           <a:solidFill>
-                            <a:srgbClr val="FFFFFF"/>
+                            <a:srgbClr val="26231F"/>
                           </a:solidFill>
                         </a:rPr>
                         <a:t>월 보험료</a:t>
@@ -4646,30 +4806,30 @@
                   <a:tcPr anchor="ctr" marL="73152" marR="73152">
                     <a:lnL w="9525" cap="flat" cmpd="sng" algn="ctr">
                       <a:solidFill>
-                        <a:srgbClr val="26C590"/>
+                        <a:srgbClr val="7BEAC5"/>
                       </a:solidFill>
                       <a:prstDash val="solid"/>
                     </a:lnL>
                     <a:lnR w="9525" cap="flat" cmpd="sng" algn="ctr">
                       <a:solidFill>
-                        <a:srgbClr val="26C590"/>
+                        <a:srgbClr val="7BEAC5"/>
                       </a:solidFill>
                       <a:prstDash val="solid"/>
                     </a:lnR>
                     <a:lnT w="9525" cap="flat" cmpd="sng" algn="ctr">
                       <a:solidFill>
-                        <a:srgbClr val="26C590"/>
+                        <a:srgbClr val="7BEAC5"/>
                       </a:solidFill>
                       <a:prstDash val="solid"/>
                     </a:lnT>
                     <a:lnB w="9525" cap="flat" cmpd="sng" algn="ctr">
                       <a:solidFill>
-                        <a:srgbClr val="26C590"/>
+                        <a:srgbClr val="7BEAC5"/>
                       </a:solidFill>
                       <a:prstDash val="solid"/>
                     </a:lnB>
                     <a:solidFill>
-                      <a:srgbClr val="26C590"/>
+                      <a:srgbClr val="7BEAC5"/>
                     </a:solidFill>
                   </a:tcPr>
                 </a:tc>
@@ -4684,7 +4844,7 @@
                       <a:r>
                         <a:rPr sz="1400" b="0">
                           <a:solidFill>
-                            <a:srgbClr val="2B2B2B"/>
+                            <a:srgbClr val="26231F"/>
                           </a:solidFill>
                         </a:rPr>
                         <a:t/>
@@ -4730,7 +4890,7 @@
                       <a:r>
                         <a:rPr sz="1400" b="0">
                           <a:solidFill>
-                            <a:srgbClr val="2B2B2B"/>
+                            <a:srgbClr val="26231F"/>
                           </a:solidFill>
                         </a:rPr>
                         <a:t/>
@@ -4776,7 +4936,7 @@
                       <a:r>
                         <a:rPr sz="1400" b="0">
                           <a:solidFill>
-                            <a:srgbClr val="2B2B2B"/>
+                            <a:srgbClr val="26231F"/>
                           </a:solidFill>
                         </a:rPr>
                         <a:t/>
@@ -4822,7 +4982,7 @@
                       <a:r>
                         <a:rPr sz="1400" b="0">
                           <a:solidFill>
-                            <a:srgbClr val="2B2B2B"/>
+                            <a:srgbClr val="26231F"/>
                           </a:solidFill>
                         </a:rPr>
                         <a:t/>
@@ -4868,7 +5028,7 @@
                       <a:r>
                         <a:rPr sz="1400" b="0">
                           <a:solidFill>
-                            <a:srgbClr val="2B2B2B"/>
+                            <a:srgbClr val="26231F"/>
                           </a:solidFill>
                         </a:rPr>
                         <a:t/>
@@ -4916,7 +5076,7 @@
                       <a:r>
                         <a:rPr sz="1400" b="0">
                           <a:solidFill>
-                            <a:srgbClr val="2B2B2B"/>
+                            <a:srgbClr val="26231F"/>
                           </a:solidFill>
                         </a:rPr>
                         <a:t/>
@@ -4949,7 +5109,7 @@
                       <a:prstDash val="solid"/>
                     </a:lnB>
                     <a:solidFill>
-                      <a:srgbClr val="EEFCF7"/>
+                      <a:srgbClr val="EAFDF7"/>
                     </a:solidFill>
                   </a:tcPr>
                 </a:tc>
@@ -4962,7 +5122,7 @@
                       <a:r>
                         <a:rPr sz="1400" b="0">
                           <a:solidFill>
-                            <a:srgbClr val="2B2B2B"/>
+                            <a:srgbClr val="26231F"/>
                           </a:solidFill>
                         </a:rPr>
                         <a:t/>
@@ -4995,7 +5155,7 @@
                       <a:prstDash val="solid"/>
                     </a:lnB>
                     <a:solidFill>
-                      <a:srgbClr val="EEFCF7"/>
+                      <a:srgbClr val="EAFDF7"/>
                     </a:solidFill>
                   </a:tcPr>
                 </a:tc>
@@ -5008,7 +5168,7 @@
                       <a:r>
                         <a:rPr sz="1400" b="0">
                           <a:solidFill>
-                            <a:srgbClr val="2B2B2B"/>
+                            <a:srgbClr val="26231F"/>
                           </a:solidFill>
                         </a:rPr>
                         <a:t/>
@@ -5041,7 +5201,7 @@
                       <a:prstDash val="solid"/>
                     </a:lnB>
                     <a:solidFill>
-                      <a:srgbClr val="EEFCF7"/>
+                      <a:srgbClr val="EAFDF7"/>
                     </a:solidFill>
                   </a:tcPr>
                 </a:tc>
@@ -5054,7 +5214,7 @@
                       <a:r>
                         <a:rPr sz="1400" b="0">
                           <a:solidFill>
-                            <a:srgbClr val="2B2B2B"/>
+                            <a:srgbClr val="26231F"/>
                           </a:solidFill>
                         </a:rPr>
                         <a:t/>
@@ -5087,7 +5247,7 @@
                       <a:prstDash val="solid"/>
                     </a:lnB>
                     <a:solidFill>
-                      <a:srgbClr val="EEFCF7"/>
+                      <a:srgbClr val="EAFDF7"/>
                     </a:solidFill>
                   </a:tcPr>
                 </a:tc>
@@ -5100,7 +5260,7 @@
                       <a:r>
                         <a:rPr sz="1400" b="0">
                           <a:solidFill>
-                            <a:srgbClr val="2B2B2B"/>
+                            <a:srgbClr val="26231F"/>
                           </a:solidFill>
                         </a:rPr>
                         <a:t/>
@@ -5133,7 +5293,7 @@
                       <a:prstDash val="solid"/>
                     </a:lnB>
                     <a:solidFill>
-                      <a:srgbClr val="EEFCF7"/>
+                      <a:srgbClr val="EAFDF7"/>
                     </a:solidFill>
                   </a:tcPr>
                 </a:tc>
@@ -5148,7 +5308,7 @@
                       <a:r>
                         <a:rPr sz="1400" b="0">
                           <a:solidFill>
-                            <a:srgbClr val="2B2B2B"/>
+                            <a:srgbClr val="26231F"/>
                           </a:solidFill>
                         </a:rPr>
                         <a:t/>
@@ -5194,7 +5354,7 @@
                       <a:r>
                         <a:rPr sz="1400" b="0">
                           <a:solidFill>
-                            <a:srgbClr val="2B2B2B"/>
+                            <a:srgbClr val="26231F"/>
                           </a:solidFill>
                         </a:rPr>
                         <a:t/>
@@ -5240,7 +5400,7 @@
                       <a:r>
                         <a:rPr sz="1400" b="0">
                           <a:solidFill>
-                            <a:srgbClr val="2B2B2B"/>
+                            <a:srgbClr val="26231F"/>
                           </a:solidFill>
                         </a:rPr>
                         <a:t/>
@@ -5286,7 +5446,7 @@
                       <a:r>
                         <a:rPr sz="1400" b="0">
                           <a:solidFill>
-                            <a:srgbClr val="2B2B2B"/>
+                            <a:srgbClr val="26231F"/>
                           </a:solidFill>
                         </a:rPr>
                         <a:t/>
@@ -5332,7 +5492,7 @@
                       <a:r>
                         <a:rPr sz="1400" b="0">
                           <a:solidFill>
-                            <a:srgbClr val="2B2B2B"/>
+                            <a:srgbClr val="26231F"/>
                           </a:solidFill>
                         </a:rPr>
                         <a:t/>
@@ -5380,7 +5540,7 @@
                       <a:r>
                         <a:rPr sz="1400" b="0">
                           <a:solidFill>
-                            <a:srgbClr val="2B2B2B"/>
+                            <a:srgbClr val="26231F"/>
                           </a:solidFill>
                         </a:rPr>
                         <a:t/>
@@ -5413,7 +5573,7 @@
                       <a:prstDash val="solid"/>
                     </a:lnB>
                     <a:solidFill>
-                      <a:srgbClr val="EEFCF7"/>
+                      <a:srgbClr val="EAFDF7"/>
                     </a:solidFill>
                   </a:tcPr>
                 </a:tc>
@@ -5426,7 +5586,7 @@
                       <a:r>
                         <a:rPr sz="1400" b="0">
                           <a:solidFill>
-                            <a:srgbClr val="2B2B2B"/>
+                            <a:srgbClr val="26231F"/>
                           </a:solidFill>
                         </a:rPr>
                         <a:t/>
@@ -5459,7 +5619,7 @@
                       <a:prstDash val="solid"/>
                     </a:lnB>
                     <a:solidFill>
-                      <a:srgbClr val="EEFCF7"/>
+                      <a:srgbClr val="EAFDF7"/>
                     </a:solidFill>
                   </a:tcPr>
                 </a:tc>
@@ -5472,7 +5632,7 @@
                       <a:r>
                         <a:rPr sz="1400" b="0">
                           <a:solidFill>
-                            <a:srgbClr val="2B2B2B"/>
+                            <a:srgbClr val="26231F"/>
                           </a:solidFill>
                         </a:rPr>
                         <a:t/>
@@ -5505,7 +5665,7 @@
                       <a:prstDash val="solid"/>
                     </a:lnB>
                     <a:solidFill>
-                      <a:srgbClr val="EEFCF7"/>
+                      <a:srgbClr val="EAFDF7"/>
                     </a:solidFill>
                   </a:tcPr>
                 </a:tc>
@@ -5518,7 +5678,7 @@
                       <a:r>
                         <a:rPr sz="1400" b="0">
                           <a:solidFill>
-                            <a:srgbClr val="2B2B2B"/>
+                            <a:srgbClr val="26231F"/>
                           </a:solidFill>
                         </a:rPr>
                         <a:t/>
@@ -5551,7 +5711,7 @@
                       <a:prstDash val="solid"/>
                     </a:lnB>
                     <a:solidFill>
-                      <a:srgbClr val="EEFCF7"/>
+                      <a:srgbClr val="EAFDF7"/>
                     </a:solidFill>
                   </a:tcPr>
                 </a:tc>
@@ -5564,7 +5724,7 @@
                       <a:r>
                         <a:rPr sz="1400" b="0">
                           <a:solidFill>
-                            <a:srgbClr val="2B2B2B"/>
+                            <a:srgbClr val="26231F"/>
                           </a:solidFill>
                         </a:rPr>
                         <a:t/>
@@ -5597,7 +5757,7 @@
                       <a:prstDash val="solid"/>
                     </a:lnB>
                     <a:solidFill>
-                      <a:srgbClr val="EEFCF7"/>
+                      <a:srgbClr val="EAFDF7"/>
                     </a:solidFill>
                   </a:tcPr>
                 </a:tc>
@@ -5612,7 +5772,7 @@
                       <a:r>
                         <a:rPr sz="1400" b="0">
                           <a:solidFill>
-                            <a:srgbClr val="2B2B2B"/>
+                            <a:srgbClr val="26231F"/>
                           </a:solidFill>
                         </a:rPr>
                         <a:t/>
@@ -5658,7 +5818,7 @@
                       <a:r>
                         <a:rPr sz="1400" b="0">
                           <a:solidFill>
-                            <a:srgbClr val="2B2B2B"/>
+                            <a:srgbClr val="26231F"/>
                           </a:solidFill>
                         </a:rPr>
                         <a:t/>
@@ -5704,7 +5864,7 @@
                       <a:r>
                         <a:rPr sz="1400" b="0">
                           <a:solidFill>
-                            <a:srgbClr val="2B2B2B"/>
+                            <a:srgbClr val="26231F"/>
                           </a:solidFill>
                         </a:rPr>
                         <a:t/>
@@ -5750,7 +5910,7 @@
                       <a:r>
                         <a:rPr sz="1400" b="0">
                           <a:solidFill>
-                            <a:srgbClr val="2B2B2B"/>
+                            <a:srgbClr val="26231F"/>
                           </a:solidFill>
                         </a:rPr>
                         <a:t/>
@@ -5796,7 +5956,7 @@
                       <a:r>
                         <a:rPr sz="1400" b="0">
                           <a:solidFill>
-                            <a:srgbClr val="2B2B2B"/>
+                            <a:srgbClr val="26231F"/>
                           </a:solidFill>
                         </a:rPr>
                         <a:t/>
@@ -5844,7 +6004,7 @@
                       <a:r>
                         <a:rPr sz="1400" b="0">
                           <a:solidFill>
-                            <a:srgbClr val="2B2B2B"/>
+                            <a:srgbClr val="26231F"/>
                           </a:solidFill>
                         </a:rPr>
                         <a:t/>
@@ -5877,7 +6037,7 @@
                       <a:prstDash val="solid"/>
                     </a:lnB>
                     <a:solidFill>
-                      <a:srgbClr val="EEFCF7"/>
+                      <a:srgbClr val="EAFDF7"/>
                     </a:solidFill>
                   </a:tcPr>
                 </a:tc>
@@ -5890,7 +6050,7 @@
                       <a:r>
                         <a:rPr sz="1400" b="0">
                           <a:solidFill>
-                            <a:srgbClr val="2B2B2B"/>
+                            <a:srgbClr val="26231F"/>
                           </a:solidFill>
                         </a:rPr>
                         <a:t/>
@@ -5923,7 +6083,7 @@
                       <a:prstDash val="solid"/>
                     </a:lnB>
                     <a:solidFill>
-                      <a:srgbClr val="EEFCF7"/>
+                      <a:srgbClr val="EAFDF7"/>
                     </a:solidFill>
                   </a:tcPr>
                 </a:tc>
@@ -5936,7 +6096,7 @@
                       <a:r>
                         <a:rPr sz="1400" b="0">
                           <a:solidFill>
-                            <a:srgbClr val="2B2B2B"/>
+                            <a:srgbClr val="26231F"/>
                           </a:solidFill>
                         </a:rPr>
                         <a:t/>
@@ -5969,7 +6129,7 @@
                       <a:prstDash val="solid"/>
                     </a:lnB>
                     <a:solidFill>
-                      <a:srgbClr val="EEFCF7"/>
+                      <a:srgbClr val="EAFDF7"/>
                     </a:solidFill>
                   </a:tcPr>
                 </a:tc>
@@ -5982,7 +6142,7 @@
                       <a:r>
                         <a:rPr sz="1400" b="0">
                           <a:solidFill>
-                            <a:srgbClr val="2B2B2B"/>
+                            <a:srgbClr val="26231F"/>
                           </a:solidFill>
                         </a:rPr>
                         <a:t/>
@@ -6015,7 +6175,7 @@
                       <a:prstDash val="solid"/>
                     </a:lnB>
                     <a:solidFill>
-                      <a:srgbClr val="EEFCF7"/>
+                      <a:srgbClr val="EAFDF7"/>
                     </a:solidFill>
                   </a:tcPr>
                 </a:tc>
@@ -6028,7 +6188,7 @@
                       <a:r>
                         <a:rPr sz="1400" b="0">
                           <a:solidFill>
-                            <a:srgbClr val="2B2B2B"/>
+                            <a:srgbClr val="26231F"/>
                           </a:solidFill>
                         </a:rPr>
                         <a:t/>
@@ -6061,7 +6221,7 @@
                       <a:prstDash val="solid"/>
                     </a:lnB>
                     <a:solidFill>
-                      <a:srgbClr val="EEFCF7"/>
+                      <a:srgbClr val="EAFDF7"/>
                     </a:solidFill>
                   </a:tcPr>
                 </a:tc>
@@ -6084,7 +6244,7 @@
     <p:bg>
       <p:bgPr>
         <a:solidFill>
-          <a:srgbClr val="FFFFFF"/>
+          <a:srgbClr val="EAFDF7"/>
         </a:solidFill>
         <a:effectLst/>
       </p:bgPr>
@@ -6104,14 +6264,14 @@
         </p:nvSpPr>
         <p:spPr>
           <a:xfrm>
-            <a:off x="9905695" y="-1463040"/>
-            <a:ext cx="3840480" cy="3840480"/>
+            <a:off x="10180015" y="-1645920"/>
+            <a:ext cx="3474720" cy="3474720"/>
           </a:xfrm>
           <a:prstGeom prst="ellipse">
             <a:avLst/>
           </a:prstGeom>
           <a:solidFill>
-            <a:srgbClr val="D1FAEC"/>
+            <a:srgbClr val="A5F3D9"/>
           </a:solidFill>
           <a:ln>
             <a:noFill/>
@@ -6127,20 +6287,58 @@
       </p:sp>
       <p:sp>
         <p:nvSpPr>
-          <p:cNvPr id="4" name="장식"/>
+          <p:cNvPr id="4" name="상단 라벨"/>
+          <p:cNvSpPr txBox="1"/>
+          <p:nvPr/>
+        </p:nvSpPr>
+        <p:spPr>
+          <a:xfrm>
+            <a:off x="640080" y="274320"/>
+            <a:ext cx="5486400" cy="274320"/>
+          </a:xfrm>
+          <a:prstGeom prst="rect">
+            <a:avLst/>
+          </a:prstGeom>
+          <a:noFill/>
+        </p:spPr>
+        <p:txBody>
+          <a:bodyPr wrap="square" lIns="54864" rIns="54864" tIns="27432" bIns="27432" anchor="ctr">
+            <a:noAutofit/>
+          </a:bodyPr>
+          <a:lstStyle/>
+          <a:p>
+            <a:pPr algn="l">
+              <a:lnSpc>
+                <a:spcPct val="115000"/>
+              </a:lnSpc>
+            </a:pPr>
+            <a:r>
+              <a:rPr sz="900" b="1" i="0" spc="250">
+                <a:solidFill>
+                  <a:srgbClr val="26231F"/>
+                </a:solidFill>
+              </a:rPr>
+              <a:t>INSURANCE CHECK</a:t>
+            </a:r>
+          </a:p>
+        </p:txBody>
+      </p:sp>
+      <p:sp>
+        <p:nvSpPr>
+          <p:cNvPr id="5" name="포인트"/>
           <p:cNvSpPr/>
           <p:nvPr/>
         </p:nvSpPr>
         <p:spPr>
           <a:xfrm>
-            <a:off x="11094415" y="274320"/>
-            <a:ext cx="411480" cy="411480"/>
-          </a:xfrm>
-          <a:prstGeom prst="ellipse">
+            <a:off x="11048695" y="502919"/>
+            <a:ext cx="274320" cy="109728"/>
+          </a:xfrm>
+          <a:prstGeom prst="wave">
             <a:avLst/>
           </a:prstGeom>
           <a:solidFill>
-            <a:srgbClr val="26C590"/>
+            <a:srgbClr val="FFFFFF"/>
           </a:solidFill>
           <a:ln>
             <a:noFill/>
@@ -6166,8 +6364,8 @@
         </p:nvSpPr>
         <p:spPr>
           <a:xfrm>
-            <a:off x="640080" y="457200"/>
-            <a:ext cx="9722815" cy="868680"/>
+            <a:off x="640080" y="658368"/>
+            <a:ext cx="9082735" cy="868680"/>
           </a:xfrm>
         </p:spPr>
         <p:txBody>
@@ -6184,7 +6382,7 @@
             <a:r>
               <a:rPr sz="3000" b="1" i="0">
                 <a:solidFill>
-                  <a:srgbClr val="115F45"/>
+                  <a:srgbClr val="26231F"/>
                 </a:solidFill>
               </a:rPr>
               <a:t>보장 항목 체크</a:t>
@@ -6194,14 +6392,14 @@
       </p:sp>
       <p:graphicFrame>
         <p:nvGraphicFramePr>
-          <p:cNvPr id="5" name="표"/>
+          <p:cNvPr id="6" name="표"/>
           <p:cNvGraphicFramePr>
             <a:graphicFrameLocks noGrp="1"/>
           </p:cNvGraphicFramePr>
           <p:nvPr/>
         </p:nvGraphicFramePr>
         <p:xfrm>
-          <a:off x="640080" y="1600200"/>
+          <a:off x="640080" y="1783080"/>
           <a:ext cx="10911534" cy="4773168"/>
         </p:xfrm>
         <a:graphic>
@@ -6226,7 +6424,7 @@
                       <a:r>
                         <a:rPr sz="1400" b="1">
                           <a:solidFill>
-                            <a:srgbClr val="FFFFFF"/>
+                            <a:srgbClr val="26231F"/>
                           </a:solidFill>
                         </a:rPr>
                         <a:t>보장 항목</a:t>
@@ -6236,30 +6434,30 @@
                   <a:tcPr anchor="ctr" marL="73152" marR="73152">
                     <a:lnL w="9525" cap="flat" cmpd="sng" algn="ctr">
                       <a:solidFill>
-                        <a:srgbClr val="26C590"/>
+                        <a:srgbClr val="7BEAC5"/>
                       </a:solidFill>
                       <a:prstDash val="solid"/>
                     </a:lnL>
                     <a:lnR w="9525" cap="flat" cmpd="sng" algn="ctr">
                       <a:solidFill>
-                        <a:srgbClr val="26C590"/>
+                        <a:srgbClr val="7BEAC5"/>
                       </a:solidFill>
                       <a:prstDash val="solid"/>
                     </a:lnR>
                     <a:lnT w="9525" cap="flat" cmpd="sng" algn="ctr">
                       <a:solidFill>
-                        <a:srgbClr val="26C590"/>
+                        <a:srgbClr val="7BEAC5"/>
                       </a:solidFill>
                       <a:prstDash val="solid"/>
                     </a:lnT>
                     <a:lnB w="9525" cap="flat" cmpd="sng" algn="ctr">
                       <a:solidFill>
-                        <a:srgbClr val="26C590"/>
+                        <a:srgbClr val="7BEAC5"/>
                       </a:solidFill>
                       <a:prstDash val="solid"/>
                     </a:lnB>
                     <a:solidFill>
-                      <a:srgbClr val="26C590"/>
+                      <a:srgbClr val="7BEAC5"/>
                     </a:solidFill>
                   </a:tcPr>
                 </a:tc>
@@ -6272,7 +6470,7 @@
                       <a:r>
                         <a:rPr sz="1400" b="1">
                           <a:solidFill>
-                            <a:srgbClr val="FFFFFF"/>
+                            <a:srgbClr val="26231F"/>
                           </a:solidFill>
                         </a:rPr>
                         <a:t>가입 확인</a:t>
@@ -6282,30 +6480,30 @@
                   <a:tcPr anchor="ctr" marL="73152" marR="73152">
                     <a:lnL w="9525" cap="flat" cmpd="sng" algn="ctr">
                       <a:solidFill>
-                        <a:srgbClr val="26C590"/>
+                        <a:srgbClr val="7BEAC5"/>
                       </a:solidFill>
                       <a:prstDash val="solid"/>
                     </a:lnL>
                     <a:lnR w="9525" cap="flat" cmpd="sng" algn="ctr">
                       <a:solidFill>
-                        <a:srgbClr val="26C590"/>
+                        <a:srgbClr val="7BEAC5"/>
                       </a:solidFill>
                       <a:prstDash val="solid"/>
                     </a:lnR>
                     <a:lnT w="9525" cap="flat" cmpd="sng" algn="ctr">
                       <a:solidFill>
-                        <a:srgbClr val="26C590"/>
+                        <a:srgbClr val="7BEAC5"/>
                       </a:solidFill>
                       <a:prstDash val="solid"/>
                     </a:lnT>
                     <a:lnB w="9525" cap="flat" cmpd="sng" algn="ctr">
                       <a:solidFill>
-                        <a:srgbClr val="26C590"/>
+                        <a:srgbClr val="7BEAC5"/>
                       </a:solidFill>
                       <a:prstDash val="solid"/>
                     </a:lnB>
                     <a:solidFill>
-                      <a:srgbClr val="26C590"/>
+                      <a:srgbClr val="7BEAC5"/>
                     </a:solidFill>
                   </a:tcPr>
                 </a:tc>
@@ -6318,7 +6516,7 @@
                       <a:r>
                         <a:rPr sz="1400" b="1">
                           <a:solidFill>
-                            <a:srgbClr val="FFFFFF"/>
+                            <a:srgbClr val="26231F"/>
                           </a:solidFill>
                         </a:rPr>
                         <a:t>확인 필요</a:t>
@@ -6328,30 +6526,30 @@
                   <a:tcPr anchor="ctr" marL="73152" marR="73152">
                     <a:lnL w="9525" cap="flat" cmpd="sng" algn="ctr">
                       <a:solidFill>
-                        <a:srgbClr val="26C590"/>
+                        <a:srgbClr val="7BEAC5"/>
                       </a:solidFill>
                       <a:prstDash val="solid"/>
                     </a:lnL>
                     <a:lnR w="9525" cap="flat" cmpd="sng" algn="ctr">
                       <a:solidFill>
-                        <a:srgbClr val="26C590"/>
+                        <a:srgbClr val="7BEAC5"/>
                       </a:solidFill>
                       <a:prstDash val="solid"/>
                     </a:lnR>
                     <a:lnT w="9525" cap="flat" cmpd="sng" algn="ctr">
                       <a:solidFill>
-                        <a:srgbClr val="26C590"/>
+                        <a:srgbClr val="7BEAC5"/>
                       </a:solidFill>
                       <a:prstDash val="solid"/>
                     </a:lnT>
                     <a:lnB w="9525" cap="flat" cmpd="sng" algn="ctr">
                       <a:solidFill>
-                        <a:srgbClr val="26C590"/>
+                        <a:srgbClr val="7BEAC5"/>
                       </a:solidFill>
                       <a:prstDash val="solid"/>
                     </a:lnB>
                     <a:solidFill>
-                      <a:srgbClr val="26C590"/>
+                      <a:srgbClr val="7BEAC5"/>
                     </a:solidFill>
                   </a:tcPr>
                 </a:tc>
@@ -6364,7 +6562,7 @@
                       <a:r>
                         <a:rPr sz="1400" b="1">
                           <a:solidFill>
-                            <a:srgbClr val="FFFFFF"/>
+                            <a:srgbClr val="26231F"/>
                           </a:solidFill>
                         </a:rPr>
                         <a:t>해당 없음</a:t>
@@ -6374,30 +6572,30 @@
                   <a:tcPr anchor="ctr" marL="73152" marR="73152">
                     <a:lnL w="9525" cap="flat" cmpd="sng" algn="ctr">
                       <a:solidFill>
-                        <a:srgbClr val="26C590"/>
+                        <a:srgbClr val="7BEAC5"/>
                       </a:solidFill>
                       <a:prstDash val="solid"/>
                     </a:lnL>
                     <a:lnR w="9525" cap="flat" cmpd="sng" algn="ctr">
                       <a:solidFill>
-                        <a:srgbClr val="26C590"/>
+                        <a:srgbClr val="7BEAC5"/>
                       </a:solidFill>
                       <a:prstDash val="solid"/>
                     </a:lnR>
                     <a:lnT w="9525" cap="flat" cmpd="sng" algn="ctr">
                       <a:solidFill>
-                        <a:srgbClr val="26C590"/>
+                        <a:srgbClr val="7BEAC5"/>
                       </a:solidFill>
                       <a:prstDash val="solid"/>
                     </a:lnT>
                     <a:lnB w="9525" cap="flat" cmpd="sng" algn="ctr">
                       <a:solidFill>
-                        <a:srgbClr val="26C590"/>
+                        <a:srgbClr val="7BEAC5"/>
                       </a:solidFill>
                       <a:prstDash val="solid"/>
                     </a:lnB>
                     <a:solidFill>
-                      <a:srgbClr val="26C590"/>
+                      <a:srgbClr val="7BEAC5"/>
                     </a:solidFill>
                   </a:tcPr>
                 </a:tc>
@@ -6412,7 +6610,7 @@
                       <a:r>
                         <a:rPr sz="1400" b="1">
                           <a:solidFill>
-                            <a:srgbClr val="115F45"/>
+                            <a:srgbClr val="27493E"/>
                           </a:solidFill>
                         </a:rPr>
                         <a:t>사망·재해</a:t>
@@ -6458,7 +6656,7 @@
                       <a:r>
                         <a:rPr sz="1400" b="0">
                           <a:solidFill>
-                            <a:srgbClr val="2B2B2B"/>
+                            <a:srgbClr val="26231F"/>
                           </a:solidFill>
                         </a:rPr>
                         <a:t>□</a:t>
@@ -6504,7 +6702,7 @@
                       <a:r>
                         <a:rPr sz="1400" b="0">
                           <a:solidFill>
-                            <a:srgbClr val="2B2B2B"/>
+                            <a:srgbClr val="26231F"/>
                           </a:solidFill>
                         </a:rPr>
                         <a:t>□</a:t>
@@ -6550,7 +6748,7 @@
                       <a:r>
                         <a:rPr sz="1400" b="0">
                           <a:solidFill>
-                            <a:srgbClr val="2B2B2B"/>
+                            <a:srgbClr val="26231F"/>
                           </a:solidFill>
                         </a:rPr>
                         <a:t>□</a:t>
@@ -6598,7 +6796,7 @@
                       <a:r>
                         <a:rPr sz="1400" b="1">
                           <a:solidFill>
-                            <a:srgbClr val="115F45"/>
+                            <a:srgbClr val="27493E"/>
                           </a:solidFill>
                         </a:rPr>
                         <a:t>질병 진단</a:t>
@@ -6644,7 +6842,7 @@
                       <a:r>
                         <a:rPr sz="1400" b="0">
                           <a:solidFill>
-                            <a:srgbClr val="2B2B2B"/>
+                            <a:srgbClr val="26231F"/>
                           </a:solidFill>
                         </a:rPr>
                         <a:t>□</a:t>
@@ -6677,7 +6875,7 @@
                       <a:prstDash val="solid"/>
                     </a:lnB>
                     <a:solidFill>
-                      <a:srgbClr val="EEFCF7"/>
+                      <a:srgbClr val="EAFDF7"/>
                     </a:solidFill>
                   </a:tcPr>
                 </a:tc>
@@ -6690,7 +6888,7 @@
                       <a:r>
                         <a:rPr sz="1400" b="0">
                           <a:solidFill>
-                            <a:srgbClr val="2B2B2B"/>
+                            <a:srgbClr val="26231F"/>
                           </a:solidFill>
                         </a:rPr>
                         <a:t>□</a:t>
@@ -6723,7 +6921,7 @@
                       <a:prstDash val="solid"/>
                     </a:lnB>
                     <a:solidFill>
-                      <a:srgbClr val="EEFCF7"/>
+                      <a:srgbClr val="EAFDF7"/>
                     </a:solidFill>
                   </a:tcPr>
                 </a:tc>
@@ -6736,7 +6934,7 @@
                       <a:r>
                         <a:rPr sz="1400" b="0">
                           <a:solidFill>
-                            <a:srgbClr val="2B2B2B"/>
+                            <a:srgbClr val="26231F"/>
                           </a:solidFill>
                         </a:rPr>
                         <a:t>□</a:t>
@@ -6769,7 +6967,7 @@
                       <a:prstDash val="solid"/>
                     </a:lnB>
                     <a:solidFill>
-                      <a:srgbClr val="EEFCF7"/>
+                      <a:srgbClr val="EAFDF7"/>
                     </a:solidFill>
                   </a:tcPr>
                 </a:tc>
@@ -6784,7 +6982,7 @@
                       <a:r>
                         <a:rPr sz="1400" b="1">
                           <a:solidFill>
-                            <a:srgbClr val="115F45"/>
+                            <a:srgbClr val="27493E"/>
                           </a:solidFill>
                         </a:rPr>
                         <a:t>암</a:t>
@@ -6830,7 +7028,7 @@
                       <a:r>
                         <a:rPr sz="1400" b="0">
                           <a:solidFill>
-                            <a:srgbClr val="2B2B2B"/>
+                            <a:srgbClr val="26231F"/>
                           </a:solidFill>
                         </a:rPr>
                         <a:t>□</a:t>
@@ -6876,7 +7074,7 @@
                       <a:r>
                         <a:rPr sz="1400" b="0">
                           <a:solidFill>
-                            <a:srgbClr val="2B2B2B"/>
+                            <a:srgbClr val="26231F"/>
                           </a:solidFill>
                         </a:rPr>
                         <a:t>□</a:t>
@@ -6922,7 +7120,7 @@
                       <a:r>
                         <a:rPr sz="1400" b="0">
                           <a:solidFill>
-                            <a:srgbClr val="2B2B2B"/>
+                            <a:srgbClr val="26231F"/>
                           </a:solidFill>
                         </a:rPr>
                         <a:t>□</a:t>
@@ -6970,7 +7168,7 @@
                       <a:r>
                         <a:rPr sz="1400" b="1">
                           <a:solidFill>
-                            <a:srgbClr val="115F45"/>
+                            <a:srgbClr val="27493E"/>
                           </a:solidFill>
                         </a:rPr>
                         <a:t>뇌·심장</a:t>
@@ -7016,7 +7214,7 @@
                       <a:r>
                         <a:rPr sz="1400" b="0">
                           <a:solidFill>
-                            <a:srgbClr val="2B2B2B"/>
+                            <a:srgbClr val="26231F"/>
                           </a:solidFill>
                         </a:rPr>
                         <a:t>□</a:t>
@@ -7049,7 +7247,7 @@
                       <a:prstDash val="solid"/>
                     </a:lnB>
                     <a:solidFill>
-                      <a:srgbClr val="EEFCF7"/>
+                      <a:srgbClr val="EAFDF7"/>
                     </a:solidFill>
                   </a:tcPr>
                 </a:tc>
@@ -7062,7 +7260,7 @@
                       <a:r>
                         <a:rPr sz="1400" b="0">
                           <a:solidFill>
-                            <a:srgbClr val="2B2B2B"/>
+                            <a:srgbClr val="26231F"/>
                           </a:solidFill>
                         </a:rPr>
                         <a:t>□</a:t>
@@ -7095,7 +7293,7 @@
                       <a:prstDash val="solid"/>
                     </a:lnB>
                     <a:solidFill>
-                      <a:srgbClr val="EEFCF7"/>
+                      <a:srgbClr val="EAFDF7"/>
                     </a:solidFill>
                   </a:tcPr>
                 </a:tc>
@@ -7108,7 +7306,7 @@
                       <a:r>
                         <a:rPr sz="1400" b="0">
                           <a:solidFill>
-                            <a:srgbClr val="2B2B2B"/>
+                            <a:srgbClr val="26231F"/>
                           </a:solidFill>
                         </a:rPr>
                         <a:t>□</a:t>
@@ -7141,7 +7339,7 @@
                       <a:prstDash val="solid"/>
                     </a:lnB>
                     <a:solidFill>
-                      <a:srgbClr val="EEFCF7"/>
+                      <a:srgbClr val="EAFDF7"/>
                     </a:solidFill>
                   </a:tcPr>
                 </a:tc>
@@ -7156,7 +7354,7 @@
                       <a:r>
                         <a:rPr sz="1400" b="1">
                           <a:solidFill>
-                            <a:srgbClr val="115F45"/>
+                            <a:srgbClr val="27493E"/>
                           </a:solidFill>
                         </a:rPr>
                         <a:t>입원·수술</a:t>
@@ -7202,7 +7400,7 @@
                       <a:r>
                         <a:rPr sz="1400" b="0">
                           <a:solidFill>
-                            <a:srgbClr val="2B2B2B"/>
+                            <a:srgbClr val="26231F"/>
                           </a:solidFill>
                         </a:rPr>
                         <a:t>□</a:t>
@@ -7248,7 +7446,7 @@
                       <a:r>
                         <a:rPr sz="1400" b="0">
                           <a:solidFill>
-                            <a:srgbClr val="2B2B2B"/>
+                            <a:srgbClr val="26231F"/>
                           </a:solidFill>
                         </a:rPr>
                         <a:t>□</a:t>
@@ -7294,7 +7492,7 @@
                       <a:r>
                         <a:rPr sz="1400" b="0">
                           <a:solidFill>
-                            <a:srgbClr val="2B2B2B"/>
+                            <a:srgbClr val="26231F"/>
                           </a:solidFill>
                         </a:rPr>
                         <a:t>□</a:t>
@@ -7342,7 +7540,7 @@
                       <a:r>
                         <a:rPr sz="1400" b="1">
                           <a:solidFill>
-                            <a:srgbClr val="115F45"/>
+                            <a:srgbClr val="27493E"/>
                           </a:solidFill>
                         </a:rPr>
                         <a:t>상해</a:t>
@@ -7388,7 +7586,7 @@
                       <a:r>
                         <a:rPr sz="1400" b="0">
                           <a:solidFill>
-                            <a:srgbClr val="2B2B2B"/>
+                            <a:srgbClr val="26231F"/>
                           </a:solidFill>
                         </a:rPr>
                         <a:t>□</a:t>
@@ -7421,7 +7619,7 @@
                       <a:prstDash val="solid"/>
                     </a:lnB>
                     <a:solidFill>
-                      <a:srgbClr val="EEFCF7"/>
+                      <a:srgbClr val="EAFDF7"/>
                     </a:solidFill>
                   </a:tcPr>
                 </a:tc>
@@ -7434,7 +7632,7 @@
                       <a:r>
                         <a:rPr sz="1400" b="0">
                           <a:solidFill>
-                            <a:srgbClr val="2B2B2B"/>
+                            <a:srgbClr val="26231F"/>
                           </a:solidFill>
                         </a:rPr>
                         <a:t>□</a:t>
@@ -7467,7 +7665,7 @@
                       <a:prstDash val="solid"/>
                     </a:lnB>
                     <a:solidFill>
-                      <a:srgbClr val="EEFCF7"/>
+                      <a:srgbClr val="EAFDF7"/>
                     </a:solidFill>
                   </a:tcPr>
                 </a:tc>
@@ -7480,7 +7678,7 @@
                       <a:r>
                         <a:rPr sz="1400" b="0">
                           <a:solidFill>
-                            <a:srgbClr val="2B2B2B"/>
+                            <a:srgbClr val="26231F"/>
                           </a:solidFill>
                         </a:rPr>
                         <a:t>□</a:t>
@@ -7513,7 +7711,7 @@
                       <a:prstDash val="solid"/>
                     </a:lnB>
                     <a:solidFill>
-                      <a:srgbClr val="EEFCF7"/>
+                      <a:srgbClr val="EAFDF7"/>
                     </a:solidFill>
                   </a:tcPr>
                 </a:tc>
@@ -7528,7 +7726,7 @@
                       <a:r>
                         <a:rPr sz="1400" b="1">
                           <a:solidFill>
-                            <a:srgbClr val="115F45"/>
+                            <a:srgbClr val="27493E"/>
                           </a:solidFill>
                         </a:rPr>
                         <a:t>실손의료</a:t>
@@ -7574,7 +7772,7 @@
                       <a:r>
                         <a:rPr sz="1400" b="0">
                           <a:solidFill>
-                            <a:srgbClr val="2B2B2B"/>
+                            <a:srgbClr val="26231F"/>
                           </a:solidFill>
                         </a:rPr>
                         <a:t>□</a:t>
@@ -7620,7 +7818,7 @@
                       <a:r>
                         <a:rPr sz="1400" b="0">
                           <a:solidFill>
-                            <a:srgbClr val="2B2B2B"/>
+                            <a:srgbClr val="26231F"/>
                           </a:solidFill>
                         </a:rPr>
                         <a:t>□</a:t>
@@ -7666,7 +7864,7 @@
                       <a:r>
                         <a:rPr sz="1400" b="0">
                           <a:solidFill>
-                            <a:srgbClr val="2B2B2B"/>
+                            <a:srgbClr val="26231F"/>
                           </a:solidFill>
                         </a:rPr>
                         <a:t>□</a:t>
@@ -7714,7 +7912,7 @@
                       <a:r>
                         <a:rPr sz="1400" b="1">
                           <a:solidFill>
-                            <a:srgbClr val="115F45"/>
+                            <a:srgbClr val="27493E"/>
                           </a:solidFill>
                         </a:rPr>
                         <a:t>연금·노후자금</a:t>
@@ -7760,7 +7958,7 @@
                       <a:r>
                         <a:rPr sz="1400" b="0">
                           <a:solidFill>
-                            <a:srgbClr val="2B2B2B"/>
+                            <a:srgbClr val="26231F"/>
                           </a:solidFill>
                         </a:rPr>
                         <a:t>□</a:t>
@@ -7793,7 +7991,7 @@
                       <a:prstDash val="solid"/>
                     </a:lnB>
                     <a:solidFill>
-                      <a:srgbClr val="EEFCF7"/>
+                      <a:srgbClr val="EAFDF7"/>
                     </a:solidFill>
                   </a:tcPr>
                 </a:tc>
@@ -7806,7 +8004,7 @@
                       <a:r>
                         <a:rPr sz="1400" b="0">
                           <a:solidFill>
-                            <a:srgbClr val="2B2B2B"/>
+                            <a:srgbClr val="26231F"/>
                           </a:solidFill>
                         </a:rPr>
                         <a:t>□</a:t>
@@ -7839,7 +8037,7 @@
                       <a:prstDash val="solid"/>
                     </a:lnB>
                     <a:solidFill>
-                      <a:srgbClr val="EEFCF7"/>
+                      <a:srgbClr val="EAFDF7"/>
                     </a:solidFill>
                   </a:tcPr>
                 </a:tc>
@@ -7852,7 +8050,7 @@
                       <a:r>
                         <a:rPr sz="1400" b="0">
                           <a:solidFill>
-                            <a:srgbClr val="2B2B2B"/>
+                            <a:srgbClr val="26231F"/>
                           </a:solidFill>
                         </a:rPr>
                         <a:t>□</a:t>
@@ -7885,7 +8083,7 @@
                       <a:prstDash val="solid"/>
                     </a:lnB>
                     <a:solidFill>
-                      <a:srgbClr val="EEFCF7"/>
+                      <a:srgbClr val="EAFDF7"/>
                     </a:solidFill>
                   </a:tcPr>
                 </a:tc>
@@ -7908,7 +8106,7 @@
     <p:bg>
       <p:bgPr>
         <a:solidFill>
-          <a:srgbClr val="FFFFFF"/>
+          <a:srgbClr val="EAFDF7"/>
         </a:solidFill>
         <a:effectLst/>
       </p:bgPr>
@@ -7928,14 +8126,14 @@
         </p:nvSpPr>
         <p:spPr>
           <a:xfrm>
-            <a:off x="9905695" y="-1463040"/>
-            <a:ext cx="3840480" cy="3840480"/>
+            <a:off x="10180015" y="-1645920"/>
+            <a:ext cx="3474720" cy="3474720"/>
           </a:xfrm>
           <a:prstGeom prst="ellipse">
             <a:avLst/>
           </a:prstGeom>
           <a:solidFill>
-            <a:srgbClr val="D1FAEC"/>
+            <a:srgbClr val="A5F3D9"/>
           </a:solidFill>
           <a:ln>
             <a:noFill/>
@@ -7951,20 +8149,58 @@
       </p:sp>
       <p:sp>
         <p:nvSpPr>
-          <p:cNvPr id="4" name="장식"/>
+          <p:cNvPr id="4" name="상단 라벨"/>
+          <p:cNvSpPr txBox="1"/>
+          <p:nvPr/>
+        </p:nvSpPr>
+        <p:spPr>
+          <a:xfrm>
+            <a:off x="640080" y="274320"/>
+            <a:ext cx="5486400" cy="274320"/>
+          </a:xfrm>
+          <a:prstGeom prst="rect">
+            <a:avLst/>
+          </a:prstGeom>
+          <a:noFill/>
+        </p:spPr>
+        <p:txBody>
+          <a:bodyPr wrap="square" lIns="54864" rIns="54864" tIns="27432" bIns="27432" anchor="ctr">
+            <a:noAutofit/>
+          </a:bodyPr>
+          <a:lstStyle/>
+          <a:p>
+            <a:pPr algn="l">
+              <a:lnSpc>
+                <a:spcPct val="115000"/>
+              </a:lnSpc>
+            </a:pPr>
+            <a:r>
+              <a:rPr sz="900" b="1" i="0" spc="250">
+                <a:solidFill>
+                  <a:srgbClr val="26231F"/>
+                </a:solidFill>
+              </a:rPr>
+              <a:t>INSURANCE CHECK</a:t>
+            </a:r>
+          </a:p>
+        </p:txBody>
+      </p:sp>
+      <p:sp>
+        <p:nvSpPr>
+          <p:cNvPr id="5" name="포인트"/>
           <p:cNvSpPr/>
           <p:nvPr/>
         </p:nvSpPr>
         <p:spPr>
           <a:xfrm>
-            <a:off x="11094415" y="274320"/>
-            <a:ext cx="411480" cy="411480"/>
-          </a:xfrm>
-          <a:prstGeom prst="ellipse">
+            <a:off x="11048695" y="502919"/>
+            <a:ext cx="274320" cy="109728"/>
+          </a:xfrm>
+          <a:prstGeom prst="wave">
             <a:avLst/>
           </a:prstGeom>
           <a:solidFill>
-            <a:srgbClr val="26C590"/>
+            <a:srgbClr val="FFFFFF"/>
           </a:solidFill>
           <a:ln>
             <a:noFill/>
@@ -7990,8 +8226,8 @@
         </p:nvSpPr>
         <p:spPr>
           <a:xfrm>
-            <a:off x="640080" y="457200"/>
-            <a:ext cx="9722815" cy="868680"/>
+            <a:off x="640080" y="658368"/>
+            <a:ext cx="9082735" cy="868680"/>
           </a:xfrm>
         </p:spPr>
         <p:txBody>
@@ -8008,7 +8244,7 @@
             <a:r>
               <a:rPr sz="3000" b="1" i="0">
                 <a:solidFill>
-                  <a:srgbClr val="115F45"/>
+                  <a:srgbClr val="26231F"/>
                 </a:solidFill>
               </a:rPr>
               <a:t>월 보험료 한눈에</a:t>
@@ -8018,27 +8254,25 @@
       </p:sp>
       <p:sp>
         <p:nvSpPr>
-          <p:cNvPr id="5" name="카드 1"/>
+          <p:cNvPr id="6" name="카드 1"/>
           <p:cNvSpPr/>
           <p:nvPr/>
         </p:nvSpPr>
         <p:spPr>
           <a:xfrm>
-            <a:off x="640080" y="1600200"/>
+            <a:off x="640080" y="1783080"/>
             <a:ext cx="3484778" cy="2926080"/>
           </a:xfrm>
           <a:prstGeom prst="roundRect">
             <a:avLst>
-              <a:gd name="adj" fmla="val 8000"/>
+              <a:gd name="adj" fmla="val 4000"/>
             </a:avLst>
           </a:prstGeom>
           <a:solidFill>
-            <a:srgbClr val="EEFCF7"/>
+            <a:srgbClr val="EAFDF7"/>
           </a:solidFill>
-          <a:ln w="15875">
-            <a:solidFill>
-              <a:srgbClr val="D1FAEC"/>
-            </a:solidFill>
+          <a:ln>
+            <a:noFill/>
           </a:ln>
         </p:spPr>
         <p:txBody>
@@ -8051,20 +8285,49 @@
       </p:sp>
       <p:sp>
         <p:nvSpPr>
-          <p:cNvPr id="6" name="번호 1"/>
+          <p:cNvPr id="7" name="포인트 막대"/>
           <p:cNvSpPr/>
           <p:nvPr/>
         </p:nvSpPr>
         <p:spPr>
           <a:xfrm>
-            <a:off x="822959" y="1783080"/>
+            <a:off x="640080" y="1892807"/>
+            <a:ext cx="54864" cy="2706624"/>
+          </a:xfrm>
+          <a:prstGeom prst="rect">
+            <a:avLst/>
+          </a:prstGeom>
+          <a:solidFill>
+            <a:srgbClr val="7BEAC5"/>
+          </a:solidFill>
+          <a:ln>
+            <a:noFill/>
+          </a:ln>
+        </p:spPr>
+        <p:txBody>
+          <a:bodyPr rtlCol="0" anchor="ctr"/>
+          <a:lstStyle/>
+          <a:p>
+            <a:pPr algn="ctr"/>
+          </a:p>
+        </p:txBody>
+      </p:sp>
+      <p:sp>
+        <p:nvSpPr>
+          <p:cNvPr id="8" name="번호 1"/>
+          <p:cNvSpPr/>
+          <p:nvPr/>
+        </p:nvSpPr>
+        <p:spPr>
+          <a:xfrm>
+            <a:off x="822959" y="1965960"/>
             <a:ext cx="457200" cy="457200"/>
           </a:xfrm>
           <a:prstGeom prst="ellipse">
             <a:avLst/>
           </a:prstGeom>
           <a:solidFill>
-            <a:srgbClr val="26C590"/>
+            <a:srgbClr val="9FE5EF"/>
           </a:solidFill>
           <a:ln>
             <a:noFill/>
@@ -8084,7 +8347,7 @@
             <a:r>
               <a:rPr sz="1600" b="1" i="0">
                 <a:solidFill>
-                  <a:srgbClr val="FFFFFF"/>
+                  <a:srgbClr val="26231F"/>
                 </a:solidFill>
               </a:rPr>
               <a:t>1</a:t>
@@ -8094,13 +8357,13 @@
       </p:sp>
       <p:sp>
         <p:nvSpPr>
-          <p:cNvPr id="7" name="TextBox 6"/>
+          <p:cNvPr id="9" name="TextBox 8"/>
           <p:cNvSpPr txBox="1"/>
           <p:nvPr/>
         </p:nvSpPr>
         <p:spPr>
           <a:xfrm>
-            <a:off x="777240" y="2377440"/>
+            <a:off x="777240" y="2560320"/>
             <a:ext cx="3210458" cy="640080"/>
           </a:xfrm>
           <a:prstGeom prst="rect">
@@ -8122,7 +8385,7 @@
             <a:r>
               <a:rPr sz="1700" b="1" i="0">
                 <a:solidFill>
-                  <a:srgbClr val="115F45"/>
+                  <a:srgbClr val="27493E"/>
                 </a:solidFill>
               </a:rPr>
               <a:t>월 보험료 합계</a:t>
@@ -8132,13 +8395,13 @@
       </p:sp>
       <p:sp>
         <p:nvSpPr>
-          <p:cNvPr id="8" name="TextBox 7"/>
+          <p:cNvPr id="10" name="TextBox 9"/>
           <p:cNvSpPr txBox="1"/>
           <p:nvPr/>
         </p:nvSpPr>
         <p:spPr>
           <a:xfrm>
-            <a:off x="777240" y="3063240"/>
+            <a:off x="777240" y="3246120"/>
             <a:ext cx="3210458" cy="1325880"/>
           </a:xfrm>
           <a:prstGeom prst="rect">
@@ -8160,7 +8423,7 @@
             <a:r>
               <a:rPr sz="3000" b="0" i="0">
                 <a:solidFill>
-                  <a:srgbClr val="2B2B2B"/>
+                  <a:srgbClr val="26231F"/>
                 </a:solidFill>
               </a:rPr>
               <a:t>0원</a:t>
@@ -8170,27 +8433,25 @@
       </p:sp>
       <p:sp>
         <p:nvSpPr>
-          <p:cNvPr id="9" name="카드 2"/>
+          <p:cNvPr id="11" name="카드 2"/>
           <p:cNvSpPr/>
           <p:nvPr/>
         </p:nvSpPr>
         <p:spPr>
           <a:xfrm>
-            <a:off x="4353458" y="1600200"/>
+            <a:off x="4353458" y="1783080"/>
             <a:ext cx="3484778" cy="2926080"/>
           </a:xfrm>
           <a:prstGeom prst="roundRect">
             <a:avLst>
-              <a:gd name="adj" fmla="val 8000"/>
+              <a:gd name="adj" fmla="val 4000"/>
             </a:avLst>
           </a:prstGeom>
           <a:solidFill>
-            <a:srgbClr val="EEFCF7"/>
+            <a:srgbClr val="EAFDF7"/>
           </a:solidFill>
-          <a:ln w="15875">
-            <a:solidFill>
-              <a:srgbClr val="D1FAEC"/>
-            </a:solidFill>
+          <a:ln>
+            <a:noFill/>
           </a:ln>
         </p:spPr>
         <p:txBody>
@@ -8203,20 +8464,49 @@
       </p:sp>
       <p:sp>
         <p:nvSpPr>
-          <p:cNvPr id="10" name="번호 2"/>
+          <p:cNvPr id="12" name="포인트 막대"/>
           <p:cNvSpPr/>
           <p:nvPr/>
         </p:nvSpPr>
         <p:spPr>
           <a:xfrm>
-            <a:off x="4536338" y="1783080"/>
+            <a:off x="4353458" y="1892807"/>
+            <a:ext cx="54864" cy="2706624"/>
+          </a:xfrm>
+          <a:prstGeom prst="rect">
+            <a:avLst/>
+          </a:prstGeom>
+          <a:solidFill>
+            <a:srgbClr val="7BEAC5"/>
+          </a:solidFill>
+          <a:ln>
+            <a:noFill/>
+          </a:ln>
+        </p:spPr>
+        <p:txBody>
+          <a:bodyPr rtlCol="0" anchor="ctr"/>
+          <a:lstStyle/>
+          <a:p>
+            <a:pPr algn="ctr"/>
+          </a:p>
+        </p:txBody>
+      </p:sp>
+      <p:sp>
+        <p:nvSpPr>
+          <p:cNvPr id="13" name="번호 2"/>
+          <p:cNvSpPr/>
+          <p:nvPr/>
+        </p:nvSpPr>
+        <p:spPr>
+          <a:xfrm>
+            <a:off x="4536338" y="1965960"/>
             <a:ext cx="457200" cy="457200"/>
           </a:xfrm>
           <a:prstGeom prst="ellipse">
             <a:avLst/>
           </a:prstGeom>
           <a:solidFill>
-            <a:srgbClr val="26C590"/>
+            <a:srgbClr val="9FE5EF"/>
           </a:solidFill>
           <a:ln>
             <a:noFill/>
@@ -8236,7 +8526,7 @@
             <a:r>
               <a:rPr sz="1600" b="1" i="0">
                 <a:solidFill>
-                  <a:srgbClr val="FFFFFF"/>
+                  <a:srgbClr val="26231F"/>
                 </a:solidFill>
               </a:rPr>
               <a:t>2</a:t>
@@ -8246,13 +8536,13 @@
       </p:sp>
       <p:sp>
         <p:nvSpPr>
-          <p:cNvPr id="11" name="TextBox 10"/>
+          <p:cNvPr id="14" name="TextBox 13"/>
           <p:cNvSpPr txBox="1"/>
           <p:nvPr/>
         </p:nvSpPr>
         <p:spPr>
           <a:xfrm>
-            <a:off x="4490618" y="2377440"/>
+            <a:off x="4490618" y="2560320"/>
             <a:ext cx="3210458" cy="640080"/>
           </a:xfrm>
           <a:prstGeom prst="rect">
@@ -8274,7 +8564,7 @@
             <a:r>
               <a:rPr sz="1700" b="1" i="0">
                 <a:solidFill>
-                  <a:srgbClr val="115F45"/>
+                  <a:srgbClr val="27493E"/>
                 </a:solidFill>
               </a:rPr>
               <a:t>연 보험료 합계</a:t>
@@ -8284,13 +8574,13 @@
       </p:sp>
       <p:sp>
         <p:nvSpPr>
-          <p:cNvPr id="12" name="TextBox 11"/>
+          <p:cNvPr id="15" name="TextBox 14"/>
           <p:cNvSpPr txBox="1"/>
           <p:nvPr/>
         </p:nvSpPr>
         <p:spPr>
           <a:xfrm>
-            <a:off x="4490618" y="3063240"/>
+            <a:off x="4490618" y="3246120"/>
             <a:ext cx="3210458" cy="1325880"/>
           </a:xfrm>
           <a:prstGeom prst="rect">
@@ -8312,7 +8602,7 @@
             <a:r>
               <a:rPr sz="3000" b="0" i="0">
                 <a:solidFill>
-                  <a:srgbClr val="2B2B2B"/>
+                  <a:srgbClr val="26231F"/>
                 </a:solidFill>
               </a:rPr>
               <a:t>0원</a:t>
@@ -8322,27 +8612,25 @@
       </p:sp>
       <p:sp>
         <p:nvSpPr>
-          <p:cNvPr id="13" name="카드 3"/>
+          <p:cNvPr id="16" name="카드 3"/>
           <p:cNvSpPr/>
           <p:nvPr/>
         </p:nvSpPr>
         <p:spPr>
           <a:xfrm>
-            <a:off x="8066836" y="1600200"/>
+            <a:off x="8066836" y="1783080"/>
             <a:ext cx="3484778" cy="2926080"/>
           </a:xfrm>
           <a:prstGeom prst="roundRect">
             <a:avLst>
-              <a:gd name="adj" fmla="val 8000"/>
+              <a:gd name="adj" fmla="val 4000"/>
             </a:avLst>
           </a:prstGeom>
           <a:solidFill>
-            <a:srgbClr val="EEFCF7"/>
+            <a:srgbClr val="EAFDF7"/>
           </a:solidFill>
-          <a:ln w="15875">
-            <a:solidFill>
-              <a:srgbClr val="D1FAEC"/>
-            </a:solidFill>
+          <a:ln>
+            <a:noFill/>
           </a:ln>
         </p:spPr>
         <p:txBody>
@@ -8355,20 +8643,49 @@
       </p:sp>
       <p:sp>
         <p:nvSpPr>
-          <p:cNvPr id="14" name="번호 3"/>
+          <p:cNvPr id="17" name="포인트 막대"/>
           <p:cNvSpPr/>
           <p:nvPr/>
         </p:nvSpPr>
         <p:spPr>
           <a:xfrm>
-            <a:off x="8249716" y="1783080"/>
+            <a:off x="8066836" y="1892807"/>
+            <a:ext cx="54864" cy="2706624"/>
+          </a:xfrm>
+          <a:prstGeom prst="rect">
+            <a:avLst/>
+          </a:prstGeom>
+          <a:solidFill>
+            <a:srgbClr val="7BEAC5"/>
+          </a:solidFill>
+          <a:ln>
+            <a:noFill/>
+          </a:ln>
+        </p:spPr>
+        <p:txBody>
+          <a:bodyPr rtlCol="0" anchor="ctr"/>
+          <a:lstStyle/>
+          <a:p>
+            <a:pPr algn="ctr"/>
+          </a:p>
+        </p:txBody>
+      </p:sp>
+      <p:sp>
+        <p:nvSpPr>
+          <p:cNvPr id="18" name="번호 3"/>
+          <p:cNvSpPr/>
+          <p:nvPr/>
+        </p:nvSpPr>
+        <p:spPr>
+          <a:xfrm>
+            <a:off x="8249716" y="1965960"/>
             <a:ext cx="457200" cy="457200"/>
           </a:xfrm>
           <a:prstGeom prst="ellipse">
             <a:avLst/>
           </a:prstGeom>
           <a:solidFill>
-            <a:srgbClr val="26C590"/>
+            <a:srgbClr val="9FE5EF"/>
           </a:solidFill>
           <a:ln>
             <a:noFill/>
@@ -8388,7 +8705,7 @@
             <a:r>
               <a:rPr sz="1600" b="1" i="0">
                 <a:solidFill>
-                  <a:srgbClr val="FFFFFF"/>
+                  <a:srgbClr val="26231F"/>
                 </a:solidFill>
               </a:rPr>
               <a:t>3</a:t>
@@ -8398,13 +8715,13 @@
       </p:sp>
       <p:sp>
         <p:nvSpPr>
-          <p:cNvPr id="15" name="TextBox 14"/>
+          <p:cNvPr id="19" name="TextBox 18"/>
           <p:cNvSpPr txBox="1"/>
           <p:nvPr/>
         </p:nvSpPr>
         <p:spPr>
           <a:xfrm>
-            <a:off x="8203996" y="2377440"/>
+            <a:off x="8203996" y="2560320"/>
             <a:ext cx="3210458" cy="640080"/>
           </a:xfrm>
           <a:prstGeom prst="rect">
@@ -8426,7 +8743,7 @@
             <a:r>
               <a:rPr sz="1700" b="1" i="0">
                 <a:solidFill>
-                  <a:srgbClr val="115F45"/>
+                  <a:srgbClr val="27493E"/>
                 </a:solidFill>
               </a:rPr>
               <a:t>월 소득 대비</a:t>
@@ -8436,13 +8753,13 @@
       </p:sp>
       <p:sp>
         <p:nvSpPr>
-          <p:cNvPr id="16" name="TextBox 15"/>
+          <p:cNvPr id="20" name="TextBox 19"/>
           <p:cNvSpPr txBox="1"/>
           <p:nvPr/>
         </p:nvSpPr>
         <p:spPr>
           <a:xfrm>
-            <a:off x="8203996" y="3063240"/>
+            <a:off x="8203996" y="3246120"/>
             <a:ext cx="3210458" cy="1325880"/>
           </a:xfrm>
           <a:prstGeom prst="rect">
@@ -8464,7 +8781,7 @@
             <a:r>
               <a:rPr sz="3000" b="0" i="0">
                 <a:solidFill>
-                  <a:srgbClr val="2B2B2B"/>
+                  <a:srgbClr val="26231F"/>
                 </a:solidFill>
               </a:rPr>
               <a:t>0 %</a:t>
@@ -8474,13 +8791,13 @@
       </p:sp>
       <p:sp>
         <p:nvSpPr>
-          <p:cNvPr id="17" name="안내"/>
+          <p:cNvPr id="21" name="안내"/>
           <p:cNvSpPr txBox="1"/>
           <p:nvPr/>
         </p:nvSpPr>
         <p:spPr>
           <a:xfrm>
-            <a:off x="640080" y="4709160"/>
+            <a:off x="640080" y="4892040"/>
             <a:ext cx="10911535" cy="365760"/>
           </a:xfrm>
           <a:prstGeom prst="rect">
@@ -8524,7 +8841,7 @@
     <p:bg>
       <p:bgPr>
         <a:solidFill>
-          <a:srgbClr val="FFFFFF"/>
+          <a:srgbClr val="EAFDF7"/>
         </a:solidFill>
         <a:effectLst/>
       </p:bgPr>
@@ -8544,14 +8861,14 @@
         </p:nvSpPr>
         <p:spPr>
           <a:xfrm>
-            <a:off x="9905695" y="-1463040"/>
-            <a:ext cx="3840480" cy="3840480"/>
+            <a:off x="10180015" y="-1645920"/>
+            <a:ext cx="3474720" cy="3474720"/>
           </a:xfrm>
           <a:prstGeom prst="ellipse">
             <a:avLst/>
           </a:prstGeom>
           <a:solidFill>
-            <a:srgbClr val="D1FAEC"/>
+            <a:srgbClr val="A5F3D9"/>
           </a:solidFill>
           <a:ln>
             <a:noFill/>
@@ -8567,20 +8884,58 @@
       </p:sp>
       <p:sp>
         <p:nvSpPr>
-          <p:cNvPr id="4" name="장식"/>
+          <p:cNvPr id="4" name="상단 라벨"/>
+          <p:cNvSpPr txBox="1"/>
+          <p:nvPr/>
+        </p:nvSpPr>
+        <p:spPr>
+          <a:xfrm>
+            <a:off x="640080" y="274320"/>
+            <a:ext cx="5486400" cy="274320"/>
+          </a:xfrm>
+          <a:prstGeom prst="rect">
+            <a:avLst/>
+          </a:prstGeom>
+          <a:noFill/>
+        </p:spPr>
+        <p:txBody>
+          <a:bodyPr wrap="square" lIns="54864" rIns="54864" tIns="27432" bIns="27432" anchor="ctr">
+            <a:noAutofit/>
+          </a:bodyPr>
+          <a:lstStyle/>
+          <a:p>
+            <a:pPr algn="l">
+              <a:lnSpc>
+                <a:spcPct val="115000"/>
+              </a:lnSpc>
+            </a:pPr>
+            <a:r>
+              <a:rPr sz="900" b="1" i="0" spc="250">
+                <a:solidFill>
+                  <a:srgbClr val="26231F"/>
+                </a:solidFill>
+              </a:rPr>
+              <a:t>INSURANCE CHECK</a:t>
+            </a:r>
+          </a:p>
+        </p:txBody>
+      </p:sp>
+      <p:sp>
+        <p:nvSpPr>
+          <p:cNvPr id="5" name="포인트"/>
           <p:cNvSpPr/>
           <p:nvPr/>
         </p:nvSpPr>
         <p:spPr>
           <a:xfrm>
-            <a:off x="11094415" y="274320"/>
-            <a:ext cx="411480" cy="411480"/>
-          </a:xfrm>
-          <a:prstGeom prst="ellipse">
+            <a:off x="11048695" y="502919"/>
+            <a:ext cx="274320" cy="109728"/>
+          </a:xfrm>
+          <a:prstGeom prst="wave">
             <a:avLst/>
           </a:prstGeom>
           <a:solidFill>
-            <a:srgbClr val="26C590"/>
+            <a:srgbClr val="FFFFFF"/>
           </a:solidFill>
           <a:ln>
             <a:noFill/>
@@ -8606,8 +8961,8 @@
         </p:nvSpPr>
         <p:spPr>
           <a:xfrm>
-            <a:off x="640080" y="457200"/>
-            <a:ext cx="9722815" cy="868680"/>
+            <a:off x="640080" y="658368"/>
+            <a:ext cx="9082735" cy="868680"/>
           </a:xfrm>
         </p:spPr>
         <p:txBody>
@@ -8624,7 +8979,7 @@
             <a:r>
               <a:rPr sz="3000" b="1" i="0">
                 <a:solidFill>
-                  <a:srgbClr val="115F45"/>
+                  <a:srgbClr val="26231F"/>
                 </a:solidFill>
               </a:rPr>
               <a:t>점검 메모와 다음 할 일</a:t>
@@ -8634,27 +8989,25 @@
       </p:sp>
       <p:sp>
         <p:nvSpPr>
-          <p:cNvPr id="5" name="카드 1"/>
+          <p:cNvPr id="6" name="카드 1"/>
           <p:cNvSpPr/>
           <p:nvPr/>
         </p:nvSpPr>
         <p:spPr>
           <a:xfrm>
-            <a:off x="640080" y="1600200"/>
-            <a:ext cx="3484778" cy="4160520"/>
+            <a:off x="640080" y="1783080"/>
+            <a:ext cx="3484778" cy="3931920"/>
           </a:xfrm>
           <a:prstGeom prst="roundRect">
             <a:avLst>
-              <a:gd name="adj" fmla="val 8000"/>
+              <a:gd name="adj" fmla="val 4000"/>
             </a:avLst>
           </a:prstGeom>
           <a:solidFill>
-            <a:srgbClr val="EEFCF7"/>
+            <a:srgbClr val="EAFDF7"/>
           </a:solidFill>
-          <a:ln w="15875">
-            <a:solidFill>
-              <a:srgbClr val="D1FAEC"/>
-            </a:solidFill>
+          <a:ln>
+            <a:noFill/>
           </a:ln>
         </p:spPr>
         <p:txBody>
@@ -8667,20 +9020,49 @@
       </p:sp>
       <p:sp>
         <p:nvSpPr>
-          <p:cNvPr id="6" name="번호 1"/>
+          <p:cNvPr id="7" name="포인트 막대"/>
           <p:cNvSpPr/>
           <p:nvPr/>
         </p:nvSpPr>
         <p:spPr>
           <a:xfrm>
-            <a:off x="822959" y="1783080"/>
+            <a:off x="640080" y="1892807"/>
+            <a:ext cx="54864" cy="3712463"/>
+          </a:xfrm>
+          <a:prstGeom prst="rect">
+            <a:avLst/>
+          </a:prstGeom>
+          <a:solidFill>
+            <a:srgbClr val="7BEAC5"/>
+          </a:solidFill>
+          <a:ln>
+            <a:noFill/>
+          </a:ln>
+        </p:spPr>
+        <p:txBody>
+          <a:bodyPr rtlCol="0" anchor="ctr"/>
+          <a:lstStyle/>
+          <a:p>
+            <a:pPr algn="ctr"/>
+          </a:p>
+        </p:txBody>
+      </p:sp>
+      <p:sp>
+        <p:nvSpPr>
+          <p:cNvPr id="8" name="번호 1"/>
+          <p:cNvSpPr/>
+          <p:nvPr/>
+        </p:nvSpPr>
+        <p:spPr>
+          <a:xfrm>
+            <a:off x="822959" y="1965960"/>
             <a:ext cx="457200" cy="457200"/>
           </a:xfrm>
           <a:prstGeom prst="ellipse">
             <a:avLst/>
           </a:prstGeom>
           <a:solidFill>
-            <a:srgbClr val="26C590"/>
+            <a:srgbClr val="9FE5EF"/>
           </a:solidFill>
           <a:ln>
             <a:noFill/>
@@ -8700,7 +9082,7 @@
             <a:r>
               <a:rPr sz="1600" b="1" i="0">
                 <a:solidFill>
-                  <a:srgbClr val="FFFFFF"/>
+                  <a:srgbClr val="26231F"/>
                 </a:solidFill>
               </a:rPr>
               <a:t>1</a:t>
@@ -8710,13 +9092,13 @@
       </p:sp>
       <p:sp>
         <p:nvSpPr>
-          <p:cNvPr id="7" name="TextBox 6"/>
+          <p:cNvPr id="9" name="TextBox 8"/>
           <p:cNvSpPr txBox="1"/>
           <p:nvPr/>
         </p:nvSpPr>
         <p:spPr>
           <a:xfrm>
-            <a:off x="777240" y="2377440"/>
+            <a:off x="777240" y="2560320"/>
             <a:ext cx="3210458" cy="640080"/>
           </a:xfrm>
           <a:prstGeom prst="rect">
@@ -8738,7 +9120,7 @@
             <a:r>
               <a:rPr sz="1800" b="1" i="0">
                 <a:solidFill>
-                  <a:srgbClr val="115F45"/>
+                  <a:srgbClr val="27493E"/>
                 </a:solidFill>
               </a:rPr>
               <a:t>확인할 것</a:t>
@@ -8748,14 +9130,14 @@
       </p:sp>
       <p:sp>
         <p:nvSpPr>
-          <p:cNvPr id="8" name="TextBox 7"/>
+          <p:cNvPr id="10" name="TextBox 9"/>
           <p:cNvSpPr txBox="1"/>
           <p:nvPr/>
         </p:nvSpPr>
         <p:spPr>
           <a:xfrm>
-            <a:off x="777240" y="3063240"/>
-            <a:ext cx="3210458" cy="2560320"/>
+            <a:off x="777240" y="3246120"/>
+            <a:ext cx="3210458" cy="2331720"/>
           </a:xfrm>
           <a:prstGeom prst="rect">
             <a:avLst/>
@@ -8776,7 +9158,7 @@
             <a:r>
               <a:rPr sz="1500" b="0" i="0">
                 <a:solidFill>
-                  <a:srgbClr val="2B2B2B"/>
+                  <a:srgbClr val="26231F"/>
                 </a:solidFill>
               </a:rPr>
               <a:t>내용을 입력하세요</a:t>
@@ -8786,27 +9168,25 @@
       </p:sp>
       <p:sp>
         <p:nvSpPr>
-          <p:cNvPr id="9" name="카드 2"/>
+          <p:cNvPr id="11" name="카드 2"/>
           <p:cNvSpPr/>
           <p:nvPr/>
         </p:nvSpPr>
         <p:spPr>
           <a:xfrm>
-            <a:off x="4353458" y="1600200"/>
-            <a:ext cx="3484778" cy="4160520"/>
+            <a:off x="4353458" y="1783080"/>
+            <a:ext cx="3484778" cy="3931920"/>
           </a:xfrm>
           <a:prstGeom prst="roundRect">
             <a:avLst>
-              <a:gd name="adj" fmla="val 8000"/>
+              <a:gd name="adj" fmla="val 4000"/>
             </a:avLst>
           </a:prstGeom>
           <a:solidFill>
-            <a:srgbClr val="EEFCF7"/>
+            <a:srgbClr val="EAFDF7"/>
           </a:solidFill>
-          <a:ln w="15875">
-            <a:solidFill>
-              <a:srgbClr val="D1FAEC"/>
-            </a:solidFill>
+          <a:ln>
+            <a:noFill/>
           </a:ln>
         </p:spPr>
         <p:txBody>
@@ -8819,20 +9199,49 @@
       </p:sp>
       <p:sp>
         <p:nvSpPr>
-          <p:cNvPr id="10" name="번호 2"/>
+          <p:cNvPr id="12" name="포인트 막대"/>
           <p:cNvSpPr/>
           <p:nvPr/>
         </p:nvSpPr>
         <p:spPr>
           <a:xfrm>
-            <a:off x="4536338" y="1783080"/>
+            <a:off x="4353458" y="1892807"/>
+            <a:ext cx="54864" cy="3712463"/>
+          </a:xfrm>
+          <a:prstGeom prst="rect">
+            <a:avLst/>
+          </a:prstGeom>
+          <a:solidFill>
+            <a:srgbClr val="7BEAC5"/>
+          </a:solidFill>
+          <a:ln>
+            <a:noFill/>
+          </a:ln>
+        </p:spPr>
+        <p:txBody>
+          <a:bodyPr rtlCol="0" anchor="ctr"/>
+          <a:lstStyle/>
+          <a:p>
+            <a:pPr algn="ctr"/>
+          </a:p>
+        </p:txBody>
+      </p:sp>
+      <p:sp>
+        <p:nvSpPr>
+          <p:cNvPr id="13" name="번호 2"/>
+          <p:cNvSpPr/>
+          <p:nvPr/>
+        </p:nvSpPr>
+        <p:spPr>
+          <a:xfrm>
+            <a:off x="4536338" y="1965960"/>
             <a:ext cx="457200" cy="457200"/>
           </a:xfrm>
           <a:prstGeom prst="ellipse">
             <a:avLst/>
           </a:prstGeom>
           <a:solidFill>
-            <a:srgbClr val="26C590"/>
+            <a:srgbClr val="9FE5EF"/>
           </a:solidFill>
           <a:ln>
             <a:noFill/>
@@ -8852,7 +9261,7 @@
             <a:r>
               <a:rPr sz="1600" b="1" i="0">
                 <a:solidFill>
-                  <a:srgbClr val="FFFFFF"/>
+                  <a:srgbClr val="26231F"/>
                 </a:solidFill>
               </a:rPr>
               <a:t>2</a:t>
@@ -8862,13 +9271,13 @@
       </p:sp>
       <p:sp>
         <p:nvSpPr>
-          <p:cNvPr id="11" name="TextBox 10"/>
+          <p:cNvPr id="14" name="TextBox 13"/>
           <p:cNvSpPr txBox="1"/>
           <p:nvPr/>
         </p:nvSpPr>
         <p:spPr>
           <a:xfrm>
-            <a:off x="4490618" y="2377440"/>
+            <a:off x="4490618" y="2560320"/>
             <a:ext cx="3210458" cy="640080"/>
           </a:xfrm>
           <a:prstGeom prst="rect">
@@ -8890,7 +9299,7 @@
             <a:r>
               <a:rPr sz="1800" b="1" i="0">
                 <a:solidFill>
-                  <a:srgbClr val="115F45"/>
+                  <a:srgbClr val="27493E"/>
                 </a:solidFill>
               </a:rPr>
               <a:t>문의할 것</a:t>
@@ -8900,14 +9309,14 @@
       </p:sp>
       <p:sp>
         <p:nvSpPr>
-          <p:cNvPr id="12" name="TextBox 11"/>
+          <p:cNvPr id="15" name="TextBox 14"/>
           <p:cNvSpPr txBox="1"/>
           <p:nvPr/>
         </p:nvSpPr>
         <p:spPr>
           <a:xfrm>
-            <a:off x="4490618" y="3063240"/>
-            <a:ext cx="3210458" cy="2560320"/>
+            <a:off x="4490618" y="3246120"/>
+            <a:ext cx="3210458" cy="2331720"/>
           </a:xfrm>
           <a:prstGeom prst="rect">
             <a:avLst/>
@@ -8928,7 +9337,7 @@
             <a:r>
               <a:rPr sz="1500" b="0" i="0">
                 <a:solidFill>
-                  <a:srgbClr val="2B2B2B"/>
+                  <a:srgbClr val="26231F"/>
                 </a:solidFill>
               </a:rPr>
               <a:t>내용을 입력하세요</a:t>
@@ -8938,27 +9347,25 @@
       </p:sp>
       <p:sp>
         <p:nvSpPr>
-          <p:cNvPr id="13" name="카드 3"/>
+          <p:cNvPr id="16" name="카드 3"/>
           <p:cNvSpPr/>
           <p:nvPr/>
         </p:nvSpPr>
         <p:spPr>
           <a:xfrm>
-            <a:off x="8066836" y="1600200"/>
-            <a:ext cx="3484778" cy="4160520"/>
+            <a:off x="8066836" y="1783080"/>
+            <a:ext cx="3484778" cy="3931920"/>
           </a:xfrm>
           <a:prstGeom prst="roundRect">
             <a:avLst>
-              <a:gd name="adj" fmla="val 8000"/>
+              <a:gd name="adj" fmla="val 4000"/>
             </a:avLst>
           </a:prstGeom>
           <a:solidFill>
-            <a:srgbClr val="EEFCF7"/>
+            <a:srgbClr val="EAFDF7"/>
           </a:solidFill>
-          <a:ln w="15875">
-            <a:solidFill>
-              <a:srgbClr val="D1FAEC"/>
-            </a:solidFill>
+          <a:ln>
+            <a:noFill/>
           </a:ln>
         </p:spPr>
         <p:txBody>
@@ -8971,20 +9378,49 @@
       </p:sp>
       <p:sp>
         <p:nvSpPr>
-          <p:cNvPr id="14" name="번호 3"/>
+          <p:cNvPr id="17" name="포인트 막대"/>
           <p:cNvSpPr/>
           <p:nvPr/>
         </p:nvSpPr>
         <p:spPr>
           <a:xfrm>
-            <a:off x="8249716" y="1783080"/>
+            <a:off x="8066836" y="1892807"/>
+            <a:ext cx="54864" cy="3712463"/>
+          </a:xfrm>
+          <a:prstGeom prst="rect">
+            <a:avLst/>
+          </a:prstGeom>
+          <a:solidFill>
+            <a:srgbClr val="7BEAC5"/>
+          </a:solidFill>
+          <a:ln>
+            <a:noFill/>
+          </a:ln>
+        </p:spPr>
+        <p:txBody>
+          <a:bodyPr rtlCol="0" anchor="ctr"/>
+          <a:lstStyle/>
+          <a:p>
+            <a:pPr algn="ctr"/>
+          </a:p>
+        </p:txBody>
+      </p:sp>
+      <p:sp>
+        <p:nvSpPr>
+          <p:cNvPr id="18" name="번호 3"/>
+          <p:cNvSpPr/>
+          <p:nvPr/>
+        </p:nvSpPr>
+        <p:spPr>
+          <a:xfrm>
+            <a:off x="8249716" y="1965960"/>
             <a:ext cx="457200" cy="457200"/>
           </a:xfrm>
           <a:prstGeom prst="ellipse">
             <a:avLst/>
           </a:prstGeom>
           <a:solidFill>
-            <a:srgbClr val="26C590"/>
+            <a:srgbClr val="9FE5EF"/>
           </a:solidFill>
           <a:ln>
             <a:noFill/>
@@ -9004,7 +9440,7 @@
             <a:r>
               <a:rPr sz="1600" b="1" i="0">
                 <a:solidFill>
-                  <a:srgbClr val="FFFFFF"/>
+                  <a:srgbClr val="26231F"/>
                 </a:solidFill>
               </a:rPr>
               <a:t>3</a:t>
@@ -9014,13 +9450,13 @@
       </p:sp>
       <p:sp>
         <p:nvSpPr>
-          <p:cNvPr id="15" name="TextBox 14"/>
+          <p:cNvPr id="19" name="TextBox 18"/>
           <p:cNvSpPr txBox="1"/>
           <p:nvPr/>
         </p:nvSpPr>
         <p:spPr>
           <a:xfrm>
-            <a:off x="8203996" y="2377440"/>
+            <a:off x="8203996" y="2560320"/>
             <a:ext cx="3210458" cy="640080"/>
           </a:xfrm>
           <a:prstGeom prst="rect">
@@ -9042,7 +9478,7 @@
             <a:r>
               <a:rPr sz="1800" b="1" i="0">
                 <a:solidFill>
-                  <a:srgbClr val="115F45"/>
+                  <a:srgbClr val="27493E"/>
                 </a:solidFill>
               </a:rPr>
               <a:t>정리할 날짜</a:t>
@@ -9052,14 +9488,14 @@
       </p:sp>
       <p:sp>
         <p:nvSpPr>
-          <p:cNvPr id="16" name="TextBox 15"/>
+          <p:cNvPr id="20" name="TextBox 19"/>
           <p:cNvSpPr txBox="1"/>
           <p:nvPr/>
         </p:nvSpPr>
         <p:spPr>
           <a:xfrm>
-            <a:off x="8203996" y="3063240"/>
-            <a:ext cx="3210458" cy="2560320"/>
+            <a:off x="8203996" y="3246120"/>
+            <a:ext cx="3210458" cy="2331720"/>
           </a:xfrm>
           <a:prstGeom prst="rect">
             <a:avLst/>
@@ -9080,7 +9516,7 @@
             <a:r>
               <a:rPr sz="1500" b="0" i="0">
                 <a:solidFill>
-                  <a:srgbClr val="2B2B2B"/>
+                  <a:srgbClr val="26231F"/>
                 </a:solidFill>
               </a:rPr>
               <a:t>내용을 입력하세요</a:t>
@@ -9090,13 +9526,13 @@
       </p:sp>
       <p:sp>
         <p:nvSpPr>
-          <p:cNvPr id="17" name="안내 문구"/>
+          <p:cNvPr id="21" name="안내 문구"/>
           <p:cNvSpPr txBox="1"/>
           <p:nvPr/>
         </p:nvSpPr>
         <p:spPr>
           <a:xfrm>
-            <a:off x="640080" y="5852160"/>
+            <a:off x="640080" y="5806440"/>
             <a:ext cx="10911535" cy="548640"/>
           </a:xfrm>
           <a:prstGeom prst="rect">
@@ -9145,34 +9581,34 @@
         <a:sysClr val="window" lastClr="FFFFFF"/>
       </a:lt1>
       <a:dk2>
-        <a:srgbClr val="115F45"/>
+        <a:srgbClr val="27493E"/>
       </a:dk2>
       <a:lt2>
-        <a:srgbClr val="EEFCF7"/>
+        <a:srgbClr val="EAFDF7"/>
       </a:lt2>
       <a:accent1>
-        <a:srgbClr val="26C590"/>
+        <a:srgbClr val="7BEAC5"/>
       </a:accent1>
       <a:accent2>
-        <a:srgbClr val="209DB6"/>
+        <a:srgbClr val="9FE5EF"/>
       </a:accent2>
       <a:accent3>
-        <a:srgbClr val="115F45"/>
+        <a:srgbClr val="27493E"/>
       </a:accent3>
       <a:accent4>
         <a:srgbClr val="D1FAEC"/>
       </a:accent4>
       <a:accent5>
-        <a:srgbClr val="23B1A3"/>
+        <a:srgbClr val="8DE8DA"/>
       </a:accent5>
       <a:accent6>
-        <a:srgbClr val="709F8F"/>
+        <a:srgbClr val="7D928B"/>
       </a:accent6>
       <a:hlink>
-        <a:srgbClr val="26C590"/>
+        <a:srgbClr val="7BEAC5"/>
       </a:hlink>
       <a:folHlink>
-        <a:srgbClr val="115F45"/>
+        <a:srgbClr val="27493E"/>
       </a:folHlink>
     </a:clrScheme>
     <a:fontScheme name="Office">
